--- a/slides/ch09-informal-reports.pptx
+++ b/slides/ch09-informal-reports.pptx
@@ -27,6 +27,21 @@
     <p:sldId id="275" r:id="rId27"/>
     <p:sldId id="276" r:id="rId28"/>
     <p:sldId id="277" r:id="rId29"/>
+    <p:sldId id="278" r:id="rId30"/>
+    <p:sldId id="279" r:id="rId31"/>
+    <p:sldId id="280" r:id="rId32"/>
+    <p:sldId id="281" r:id="rId33"/>
+    <p:sldId id="282" r:id="rId34"/>
+    <p:sldId id="283" r:id="rId35"/>
+    <p:sldId id="284" r:id="rId36"/>
+    <p:sldId id="285" r:id="rId37"/>
+    <p:sldId id="286" r:id="rId38"/>
+    <p:sldId id="287" r:id="rId39"/>
+    <p:sldId id="288" r:id="rId40"/>
+    <p:sldId id="289" r:id="rId41"/>
+    <p:sldId id="290" r:id="rId42"/>
+    <p:sldId id="291" r:id="rId43"/>
+    <p:sldId id="292" r:id="rId44"/>
   </p:sldIdLst>
   <p:sldSz cx="12191695" cy="6858000" type="screen4x3"/>
   <p:notesSz cx="6858000" cy="9144000"/>
@@ -1223,7 +1238,7 @@
           <a:lstStyle/>
           <a:p>
             <a:r>
-              <a:t>Recap.</a:t>
+              <a:t>Section 4: research for informal reports. Chapter 10 develops formal research; this is the practical week-one version.</a:t>
             </a:r>
           </a:p>
         </p:txBody>
@@ -1363,7 +1378,7 @@
           <a:lstStyle/>
           <a:p>
             <a:r>
-              <a:t>Reports travel above your manager's head with your name attached.</a:t>
+              <a:t>The sequencing rule saves the most time; the dating rule prevents the most embarrassment. Both feed the credibility ladder in Chapter 10.</a:t>
             </a:r>
           </a:p>
         </p:txBody>
@@ -1433,7 +1448,7 @@
           <a:lstStyle/>
           <a:p>
             <a:r>
-              <a:t>Async-ready.</a:t>
+              <a:t>Minimum viable rigor: enough method to be honest, not so much the report never ships. The denominator rule connects to the analysis-vs-advocacy line.</a:t>
             </a:r>
           </a:p>
         </p:txBody>
@@ -1503,7 +1518,497 @@
           <a:lstStyle/>
           <a:p>
             <a:r>
-              <a:t>Delivery-neutral closing.</a:t>
+              <a:t>The evidence trail converts a report from an opinion with formatting into an auditable document — which is what lets it travel above your manager's head safely.</a:t>
+            </a:r>
+          </a:p>
+        </p:txBody>
+      </p:sp>
+      <p:sp>
+        <p:nvSpPr>
+          <p:cNvPr id="4" name="Slide Number Placeholder 3"/>
+          <p:cNvSpPr>
+            <a:spLocks noGrp="1"/>
+          </p:cNvSpPr>
+          <p:nvPr>
+            <p:ph type="sldNum" idx="5" sz="quarter"/>
+          </p:nvPr>
+        </p:nvSpPr>
+        <p:spPr/>
+      </p:sp>
+    </p:spTree>
+  </p:cSld>
+  <p:clrMapOvr>
+    <a:masterClrMapping/>
+  </p:clrMapOvr>
+</p:notes>
+</file>
+
+<file path=ppt/notesSlides/notesSlide23.xml><?xml version="1.0" encoding="utf-8"?>
+<p:notes xmlns:a="http://schemas.openxmlformats.org/drawingml/2006/main" xmlns:p="http://schemas.openxmlformats.org/presentationml/2006/main" xmlns:r="http://schemas.openxmlformats.org/officeDocument/2006/relationships">
+  <p:cSld>
+    <p:spTree>
+      <p:nvGrpSpPr>
+        <p:cNvPr id="1" name=""/>
+        <p:cNvGrpSpPr/>
+        <p:nvPr/>
+      </p:nvGrpSpPr>
+      <p:grpSpPr>
+        <a:xfrm>
+          <a:off x="0" y="0"/>
+          <a:ext cx="0" cy="0"/>
+          <a:chOff x="0" y="0"/>
+          <a:chExt cx="0" cy="0"/>
+        </a:xfrm>
+      </p:grpSpPr>
+      <p:sp>
+        <p:nvSpPr>
+          <p:cNvPr id="2" name="Slide Image Placeholder 1"/>
+          <p:cNvSpPr>
+            <a:spLocks noGrp="1"/>
+          </p:cNvSpPr>
+          <p:nvPr>
+            <p:ph type="sldImg" idx="2"/>
+          </p:nvPr>
+        </p:nvSpPr>
+        <p:spPr/>
+      </p:sp>
+      <p:sp>
+        <p:nvSpPr>
+          <p:cNvPr id="3" name="Notes Placeholder 2"/>
+          <p:cNvSpPr>
+            <a:spLocks noGrp="1"/>
+          </p:cNvSpPr>
+          <p:nvPr>
+            <p:ph type="body" idx="3" sz="quarter"/>
+          </p:nvPr>
+        </p:nvSpPr>
+        <p:spPr/>
+        <p:txBody>
+          <a:bodyPr/>
+          <a:lstStyle/>
+          <a:p>
+            <a:r>
+              <a:t>Section 5: format selection. Students often think format is assigned by tradition; it's chosen by reader and shelf life.</a:t>
+            </a:r>
+          </a:p>
+        </p:txBody>
+      </p:sp>
+      <p:sp>
+        <p:nvSpPr>
+          <p:cNvPr id="4" name="Slide Number Placeholder 3"/>
+          <p:cNvSpPr>
+            <a:spLocks noGrp="1"/>
+          </p:cNvSpPr>
+          <p:nvPr>
+            <p:ph type="sldNum" idx="5" sz="quarter"/>
+          </p:nvPr>
+        </p:nvSpPr>
+        <p:spPr/>
+      </p:sp>
+    </p:spTree>
+  </p:cSld>
+  <p:clrMapOvr>
+    <a:masterClrMapping/>
+  </p:clrMapOvr>
+</p:notes>
+</file>
+
+<file path=ppt/notesSlides/notesSlide24.xml><?xml version="1.0" encoding="utf-8"?>
+<p:notes xmlns:a="http://schemas.openxmlformats.org/drawingml/2006/main" xmlns:p="http://schemas.openxmlformats.org/presentationml/2006/main" xmlns:r="http://schemas.openxmlformats.org/officeDocument/2006/relationships">
+  <p:cSld>
+    <p:spTree>
+      <p:nvGrpSpPr>
+        <p:cNvPr id="1" name=""/>
+        <p:cNvGrpSpPr/>
+        <p:nvPr/>
+      </p:nvGrpSpPr>
+      <p:grpSpPr>
+        <a:xfrm>
+          <a:off x="0" y="0"/>
+          <a:ext cx="0" cy="0"/>
+          <a:chOff x="0" y="0"/>
+          <a:chExt cx="0" cy="0"/>
+        </a:xfrm>
+      </p:grpSpPr>
+      <p:sp>
+        <p:nvSpPr>
+          <p:cNvPr id="2" name="Slide Image Placeholder 1"/>
+          <p:cNvSpPr>
+            <a:spLocks noGrp="1"/>
+          </p:cNvSpPr>
+          <p:nvPr>
+            <p:ph type="sldImg" idx="2"/>
+          </p:nvPr>
+        </p:nvSpPr>
+        <p:spPr/>
+      </p:sp>
+      <p:sp>
+        <p:nvSpPr>
+          <p:cNvPr id="3" name="Notes Placeholder 2"/>
+          <p:cNvSpPr>
+            <a:spLocks noGrp="1"/>
+          </p:cNvSpPr>
+          <p:nvPr>
+            <p:ph type="body" idx="3" sz="quarter"/>
+          </p:nvPr>
+        </p:nvSpPr>
+        <p:spPr/>
+        <p:txBody>
+          <a:bodyPr/>
+          <a:lstStyle/>
+          <a:p>
+            <a:r>
+              <a:t>The slide-doc deserves the caveat: it rewards the takeaway-title discipline and punishes topic titles brutally — a slide titled 'Background' is a blank slide.</a:t>
+            </a:r>
+          </a:p>
+        </p:txBody>
+      </p:sp>
+      <p:sp>
+        <p:nvSpPr>
+          <p:cNvPr id="4" name="Slide Number Placeholder 3"/>
+          <p:cNvSpPr>
+            <a:spLocks noGrp="1"/>
+          </p:cNvSpPr>
+          <p:nvPr>
+            <p:ph type="sldNum" idx="5" sz="quarter"/>
+          </p:nvPr>
+        </p:nvSpPr>
+        <p:spPr/>
+      </p:sp>
+    </p:spTree>
+  </p:cSld>
+  <p:clrMapOvr>
+    <a:masterClrMapping/>
+  </p:clrMapOvr>
+</p:notes>
+</file>
+
+<file path=ppt/notesSlides/notesSlide25.xml><?xml version="1.0" encoding="utf-8"?>
+<p:notes xmlns:a="http://schemas.openxmlformats.org/drawingml/2006/main" xmlns:p="http://schemas.openxmlformats.org/presentationml/2006/main" xmlns:r="http://schemas.openxmlformats.org/officeDocument/2006/relationships">
+  <p:cSld>
+    <p:spTree>
+      <p:nvGrpSpPr>
+        <p:cNvPr id="1" name=""/>
+        <p:cNvGrpSpPr/>
+        <p:nvPr/>
+      </p:nvGrpSpPr>
+      <p:grpSpPr>
+        <a:xfrm>
+          <a:off x="0" y="0"/>
+          <a:ext cx="0" cy="0"/>
+          <a:chOff x="0" y="0"/>
+          <a:chExt cx="0" cy="0"/>
+        </a:xfrm>
+      </p:grpSpPr>
+      <p:sp>
+        <p:nvSpPr>
+          <p:cNvPr id="2" name="Slide Image Placeholder 1"/>
+          <p:cNvSpPr>
+            <a:spLocks noGrp="1"/>
+          </p:cNvSpPr>
+          <p:nvPr>
+            <p:ph type="sldImg" idx="2"/>
+          </p:nvPr>
+        </p:nvSpPr>
+        <p:spPr/>
+      </p:sp>
+      <p:sp>
+        <p:nvSpPr>
+          <p:cNvPr id="3" name="Notes Placeholder 2"/>
+          <p:cNvSpPr>
+            <a:spLocks noGrp="1"/>
+          </p:cNvSpPr>
+          <p:nvPr>
+            <p:ph type="body" idx="3" sz="quarter"/>
+          </p:nvPr>
+        </p:nvSpPr>
+        <p:spPr/>
+        <p:txBody>
+          <a:bodyPr/>
+          <a:lstStyle/>
+          <a:p>
+            <a:r>
+              <a:t>Chapter 5's one-screen rule meeting report genres. The subject-line-as-status-line habit is small and career-visible.</a:t>
+            </a:r>
+          </a:p>
+        </p:txBody>
+      </p:sp>
+      <p:sp>
+        <p:nvSpPr>
+          <p:cNvPr id="4" name="Slide Number Placeholder 3"/>
+          <p:cNvSpPr>
+            <a:spLocks noGrp="1"/>
+          </p:cNvSpPr>
+          <p:nvPr>
+            <p:ph type="sldNum" idx="5" sz="quarter"/>
+          </p:nvPr>
+        </p:nvSpPr>
+        <p:spPr/>
+      </p:sp>
+    </p:spTree>
+  </p:cSld>
+  <p:clrMapOvr>
+    <a:masterClrMapping/>
+  </p:clrMapOvr>
+</p:notes>
+</file>
+
+<file path=ppt/notesSlides/notesSlide26.xml><?xml version="1.0" encoding="utf-8"?>
+<p:notes xmlns:a="http://schemas.openxmlformats.org/drawingml/2006/main" xmlns:p="http://schemas.openxmlformats.org/presentationml/2006/main" xmlns:r="http://schemas.openxmlformats.org/officeDocument/2006/relationships">
+  <p:cSld>
+    <p:spTree>
+      <p:nvGrpSpPr>
+        <p:cNvPr id="1" name=""/>
+        <p:cNvGrpSpPr/>
+        <p:nvPr/>
+      </p:nvGrpSpPr>
+      <p:grpSpPr>
+        <a:xfrm>
+          <a:off x="0" y="0"/>
+          <a:ext cx="0" cy="0"/>
+          <a:chOff x="0" y="0"/>
+          <a:chExt cx="0" cy="0"/>
+        </a:xfrm>
+      </p:grpSpPr>
+      <p:sp>
+        <p:nvSpPr>
+          <p:cNvPr id="2" name="Slide Image Placeholder 1"/>
+          <p:cNvSpPr>
+            <a:spLocks noGrp="1"/>
+          </p:cNvSpPr>
+          <p:nvPr>
+            <p:ph type="sldImg" idx="2"/>
+          </p:nvPr>
+        </p:nvSpPr>
+        <p:spPr/>
+      </p:sp>
+      <p:sp>
+        <p:nvSpPr>
+          <p:cNvPr id="3" name="Notes Placeholder 2"/>
+          <p:cNvSpPr>
+            <a:spLocks noGrp="1"/>
+          </p:cNvSpPr>
+          <p:nvPr>
+            <p:ph type="body" idx="3" sz="quarter"/>
+          </p:nvPr>
+        </p:nvSpPr>
+        <p:spPr/>
+        <p:txBody>
+          <a:bodyPr/>
+          <a:lstStyle/>
+          <a:p>
+            <a:r>
+              <a:t>Section 6: analytical skeletons. The genres that inherit Chapter 8's persuasive machinery under Chapter 9's completeness rules.</a:t>
+            </a:r>
+          </a:p>
+        </p:txBody>
+      </p:sp>
+      <p:sp>
+        <p:nvSpPr>
+          <p:cNvPr id="4" name="Slide Number Placeholder 3"/>
+          <p:cNvSpPr>
+            <a:spLocks noGrp="1"/>
+          </p:cNvSpPr>
+          <p:nvPr>
+            <p:ph type="sldNum" idx="5" sz="quarter"/>
+          </p:nvPr>
+        </p:nvSpPr>
+        <p:spPr/>
+      </p:sp>
+    </p:spTree>
+  </p:cSld>
+  <p:clrMapOvr>
+    <a:masterClrMapping/>
+  </p:clrMapOvr>
+</p:notes>
+</file>
+
+<file path=ppt/notesSlides/notesSlide27.xml><?xml version="1.0" encoding="utf-8"?>
+<p:notes xmlns:a="http://schemas.openxmlformats.org/drawingml/2006/main" xmlns:p="http://schemas.openxmlformats.org/presentationml/2006/main" xmlns:r="http://schemas.openxmlformats.org/officeDocument/2006/relationships">
+  <p:cSld>
+    <p:spTree>
+      <p:nvGrpSpPr>
+        <p:cNvPr id="1" name=""/>
+        <p:cNvGrpSpPr/>
+        <p:nvPr/>
+      </p:nvGrpSpPr>
+      <p:grpSpPr>
+        <a:xfrm>
+          <a:off x="0" y="0"/>
+          <a:ext cx="0" cy="0"/>
+          <a:chOff x="0" y="0"/>
+          <a:chExt cx="0" cy="0"/>
+        </a:xfrm>
+      </p:grpSpPr>
+      <p:sp>
+        <p:nvSpPr>
+          <p:cNvPr id="2" name="Slide Image Placeholder 1"/>
+          <p:cNvSpPr>
+            <a:spLocks noGrp="1"/>
+          </p:cNvSpPr>
+          <p:nvPr>
+            <p:ph type="sldImg" idx="2"/>
+          </p:nvPr>
+        </p:nvSpPr>
+        <p:spPr/>
+      </p:sp>
+      <p:sp>
+        <p:nvSpPr>
+          <p:cNvPr id="3" name="Notes Placeholder 2"/>
+          <p:cNvSpPr>
+            <a:spLocks noGrp="1"/>
+          </p:cNvSpPr>
+          <p:nvPr>
+            <p:ph type="body" idx="3" sz="quarter"/>
+          </p:nvPr>
+        </p:nvSpPr>
+        <p:spPr/>
+        <p:txBody>
+          <a:bodyPr/>
+          <a:lstStyle/>
+          <a:p>
+            <a:r>
+              <a:t>Students have seen this skeleton twice now (proposal, executive ask) — the repetition is the curriculum: one structure, three genres.</a:t>
+            </a:r>
+          </a:p>
+        </p:txBody>
+      </p:sp>
+      <p:sp>
+        <p:nvSpPr>
+          <p:cNvPr id="4" name="Slide Number Placeholder 3"/>
+          <p:cNvSpPr>
+            <a:spLocks noGrp="1"/>
+          </p:cNvSpPr>
+          <p:nvPr>
+            <p:ph type="sldNum" idx="5" sz="quarter"/>
+          </p:nvPr>
+        </p:nvSpPr>
+        <p:spPr/>
+      </p:sp>
+    </p:spTree>
+  </p:cSld>
+  <p:clrMapOvr>
+    <a:masterClrMapping/>
+  </p:clrMapOvr>
+</p:notes>
+</file>
+
+<file path=ppt/notesSlides/notesSlide28.xml><?xml version="1.0" encoding="utf-8"?>
+<p:notes xmlns:a="http://schemas.openxmlformats.org/drawingml/2006/main" xmlns:p="http://schemas.openxmlformats.org/presentationml/2006/main" xmlns:r="http://schemas.openxmlformats.org/officeDocument/2006/relationships">
+  <p:cSld>
+    <p:spTree>
+      <p:nvGrpSpPr>
+        <p:cNvPr id="1" name=""/>
+        <p:cNvGrpSpPr/>
+        <p:nvPr/>
+      </p:nvGrpSpPr>
+      <p:grpSpPr>
+        <a:xfrm>
+          <a:off x="0" y="0"/>
+          <a:ext cx="0" cy="0"/>
+          <a:chOff x="0" y="0"/>
+          <a:chExt cx="0" cy="0"/>
+        </a:xfrm>
+      </p:grpSpPr>
+      <p:sp>
+        <p:nvSpPr>
+          <p:cNvPr id="2" name="Slide Image Placeholder 1"/>
+          <p:cNvSpPr>
+            <a:spLocks noGrp="1"/>
+          </p:cNvSpPr>
+          <p:nvPr>
+            <p:ph type="sldImg" idx="2"/>
+          </p:nvPr>
+        </p:nvSpPr>
+        <p:spPr/>
+      </p:sp>
+      <p:sp>
+        <p:nvSpPr>
+          <p:cNvPr id="3" name="Notes Placeholder 2"/>
+          <p:cNvSpPr>
+            <a:spLocks noGrp="1"/>
+          </p:cNvSpPr>
+          <p:nvPr>
+            <p:ph type="body" idx="3" sz="quarter"/>
+          </p:nvPr>
+        </p:nvSpPr>
+        <p:spPr/>
+        <p:txBody>
+          <a:bodyPr/>
+          <a:lstStyle/>
+          <a:p>
+            <a:r>
+              <a:t>Criteria-first is the anti-rigging discipline — same move as the pilot case's agreed-metrics-in-advance in Chapter 8.</a:t>
+            </a:r>
+          </a:p>
+        </p:txBody>
+      </p:sp>
+      <p:sp>
+        <p:nvSpPr>
+          <p:cNvPr id="4" name="Slide Number Placeholder 3"/>
+          <p:cNvSpPr>
+            <a:spLocks noGrp="1"/>
+          </p:cNvSpPr>
+          <p:nvPr>
+            <p:ph type="sldNum" idx="5" sz="quarter"/>
+          </p:nvPr>
+        </p:nvSpPr>
+        <p:spPr/>
+      </p:sp>
+    </p:spTree>
+  </p:cSld>
+  <p:clrMapOvr>
+    <a:masterClrMapping/>
+  </p:clrMapOvr>
+</p:notes>
+</file>
+
+<file path=ppt/notesSlides/notesSlide29.xml><?xml version="1.0" encoding="utf-8"?>
+<p:notes xmlns:a="http://schemas.openxmlformats.org/drawingml/2006/main" xmlns:p="http://schemas.openxmlformats.org/presentationml/2006/main" xmlns:r="http://schemas.openxmlformats.org/officeDocument/2006/relationships">
+  <p:cSld>
+    <p:spTree>
+      <p:nvGrpSpPr>
+        <p:cNvPr id="1" name=""/>
+        <p:cNvGrpSpPr/>
+        <p:nvPr/>
+      </p:nvGrpSpPr>
+      <p:grpSpPr>
+        <a:xfrm>
+          <a:off x="0" y="0"/>
+          <a:ext cx="0" cy="0"/>
+          <a:chOff x="0" y="0"/>
+          <a:chExt cx="0" cy="0"/>
+        </a:xfrm>
+      </p:grpSpPr>
+      <p:sp>
+        <p:nvSpPr>
+          <p:cNvPr id="2" name="Slide Image Placeholder 1"/>
+          <p:cNvSpPr>
+            <a:spLocks noGrp="1"/>
+          </p:cNvSpPr>
+          <p:nvPr>
+            <p:ph type="sldImg" idx="2"/>
+          </p:nvPr>
+        </p:nvSpPr>
+        <p:spPr/>
+      </p:sp>
+      <p:sp>
+        <p:nvSpPr>
+          <p:cNvPr id="3" name="Notes Placeholder 2"/>
+          <p:cNvSpPr>
+            <a:spLocks noGrp="1"/>
+          </p:cNvSpPr>
+          <p:nvPr>
+            <p:ph type="body" idx="3" sz="quarter"/>
+          </p:nvPr>
+        </p:nvSpPr>
+        <p:spPr/>
+        <p:txBody>
+          <a:bodyPr/>
+          <a:lstStyle/>
+          <a:p>
+            <a:r>
+              <a:t>The conditions section separates professional feasibility work from cheerleading: every yes has load-bearing assumptions, and naming them is the job.</a:t>
             </a:r>
           </a:p>
         </p:txBody>
@@ -1574,6 +2079,566 @@
           <a:p>
             <a:r>
               <a:t>'Informal' describes the container, not the care.</a:t>
+            </a:r>
+          </a:p>
+        </p:txBody>
+      </p:sp>
+      <p:sp>
+        <p:nvSpPr>
+          <p:cNvPr id="4" name="Slide Number Placeholder 3"/>
+          <p:cNvSpPr>
+            <a:spLocks noGrp="1"/>
+          </p:cNvSpPr>
+          <p:nvPr>
+            <p:ph type="sldNum" idx="5" sz="quarter"/>
+          </p:nvPr>
+        </p:nvSpPr>
+        <p:spPr/>
+      </p:sp>
+    </p:spTree>
+  </p:cSld>
+  <p:clrMapOvr>
+    <a:masterClrMapping/>
+  </p:clrMapOvr>
+</p:notes>
+</file>
+
+<file path=ppt/notesSlides/notesSlide30.xml><?xml version="1.0" encoding="utf-8"?>
+<p:notes xmlns:a="http://schemas.openxmlformats.org/drawingml/2006/main" xmlns:p="http://schemas.openxmlformats.org/presentationml/2006/main" xmlns:r="http://schemas.openxmlformats.org/officeDocument/2006/relationships">
+  <p:cSld>
+    <p:spTree>
+      <p:nvGrpSpPr>
+        <p:cNvPr id="1" name=""/>
+        <p:cNvGrpSpPr/>
+        <p:nvPr/>
+      </p:nvGrpSpPr>
+      <p:grpSpPr>
+        <a:xfrm>
+          <a:off x="0" y="0"/>
+          <a:ext cx="0" cy="0"/>
+          <a:chOff x="0" y="0"/>
+          <a:chExt cx="0" cy="0"/>
+        </a:xfrm>
+      </p:grpSpPr>
+      <p:sp>
+        <p:nvSpPr>
+          <p:cNvPr id="2" name="Slide Image Placeholder 1"/>
+          <p:cNvSpPr>
+            <a:spLocks noGrp="1"/>
+          </p:cNvSpPr>
+          <p:nvPr>
+            <p:ph type="sldImg" idx="2"/>
+          </p:nvPr>
+        </p:nvSpPr>
+        <p:spPr/>
+      </p:sp>
+      <p:sp>
+        <p:nvSpPr>
+          <p:cNvPr id="3" name="Notes Placeholder 2"/>
+          <p:cNvSpPr>
+            <a:spLocks noGrp="1"/>
+          </p:cNvSpPr>
+          <p:nvPr>
+            <p:ph type="body" idx="3" sz="quarter"/>
+          </p:nvPr>
+        </p:nvSpPr>
+        <p:spPr/>
+        <p:txBody>
+          <a:bodyPr/>
+          <a:lstStyle/>
+          <a:p>
+            <a:r>
+              <a:t>Section 7: display selection and the integrity rules, extending Section 3's table-or-chart decision.</a:t>
+            </a:r>
+          </a:p>
+        </p:txBody>
+      </p:sp>
+      <p:sp>
+        <p:nvSpPr>
+          <p:cNvPr id="4" name="Slide Number Placeholder 3"/>
+          <p:cNvSpPr>
+            <a:spLocks noGrp="1"/>
+          </p:cNvSpPr>
+          <p:nvPr>
+            <p:ph type="sldNum" idx="5" sz="quarter"/>
+          </p:nvPr>
+        </p:nvSpPr>
+        <p:spPr/>
+      </p:sp>
+    </p:spTree>
+  </p:cSld>
+  <p:clrMapOvr>
+    <a:masterClrMapping/>
+  </p:clrMapOvr>
+</p:notes>
+</file>
+
+<file path=ppt/notesSlides/notesSlide31.xml><?xml version="1.0" encoding="utf-8"?>
+<p:notes xmlns:a="http://schemas.openxmlformats.org/drawingml/2006/main" xmlns:p="http://schemas.openxmlformats.org/presentationml/2006/main" xmlns:r="http://schemas.openxmlformats.org/officeDocument/2006/relationships">
+  <p:cSld>
+    <p:spTree>
+      <p:nvGrpSpPr>
+        <p:cNvPr id="1" name=""/>
+        <p:cNvGrpSpPr/>
+        <p:nvPr/>
+      </p:nvGrpSpPr>
+      <p:grpSpPr>
+        <a:xfrm>
+          <a:off x="0" y="0"/>
+          <a:ext cx="0" cy="0"/>
+          <a:chOff x="0" y="0"/>
+          <a:chExt cx="0" cy="0"/>
+        </a:xfrm>
+      </p:grpSpPr>
+      <p:sp>
+        <p:nvSpPr>
+          <p:cNvPr id="2" name="Slide Image Placeholder 1"/>
+          <p:cNvSpPr>
+            <a:spLocks noGrp="1"/>
+          </p:cNvSpPr>
+          <p:nvPr>
+            <p:ph type="sldImg" idx="2"/>
+          </p:nvPr>
+        </p:nvSpPr>
+        <p:spPr/>
+      </p:sp>
+      <p:sp>
+        <p:nvSpPr>
+          <p:cNvPr id="3" name="Notes Placeholder 2"/>
+          <p:cNvSpPr>
+            <a:spLocks noGrp="1"/>
+          </p:cNvSpPr>
+          <p:nvPr>
+            <p:ph type="body" idx="3" sz="quarter"/>
+          </p:nvPr>
+        </p:nvSpPr>
+        <p:spPr/>
+        <p:txBody>
+          <a:bodyPr/>
+          <a:lstStyle/>
+          <a:p>
+            <a:r>
+              <a:t>Chart selection as question-answering, not decoration. The pie constraint is defensible and practical: humans compare angles poorly.</a:t>
+            </a:r>
+          </a:p>
+        </p:txBody>
+      </p:sp>
+      <p:sp>
+        <p:nvSpPr>
+          <p:cNvPr id="4" name="Slide Number Placeholder 3"/>
+          <p:cNvSpPr>
+            <a:spLocks noGrp="1"/>
+          </p:cNvSpPr>
+          <p:nvPr>
+            <p:ph type="sldNum" idx="5" sz="quarter"/>
+          </p:nvPr>
+        </p:nvSpPr>
+        <p:spPr/>
+      </p:sp>
+    </p:spTree>
+  </p:cSld>
+  <p:clrMapOvr>
+    <a:masterClrMapping/>
+  </p:clrMapOvr>
+</p:notes>
+</file>
+
+<file path=ppt/notesSlides/notesSlide32.xml><?xml version="1.0" encoding="utf-8"?>
+<p:notes xmlns:a="http://schemas.openxmlformats.org/drawingml/2006/main" xmlns:p="http://schemas.openxmlformats.org/presentationml/2006/main" xmlns:r="http://schemas.openxmlformats.org/officeDocument/2006/relationships">
+  <p:cSld>
+    <p:spTree>
+      <p:nvGrpSpPr>
+        <p:cNvPr id="1" name=""/>
+        <p:cNvGrpSpPr/>
+        <p:nvPr/>
+      </p:nvGrpSpPr>
+      <p:grpSpPr>
+        <a:xfrm>
+          <a:off x="0" y="0"/>
+          <a:ext cx="0" cy="0"/>
+          <a:chOff x="0" y="0"/>
+          <a:chExt cx="0" cy="0"/>
+        </a:xfrm>
+      </p:grpSpPr>
+      <p:sp>
+        <p:nvSpPr>
+          <p:cNvPr id="2" name="Slide Image Placeholder 1"/>
+          <p:cNvSpPr>
+            <a:spLocks noGrp="1"/>
+          </p:cNvSpPr>
+          <p:nvPr>
+            <p:ph type="sldImg" idx="2"/>
+          </p:nvPr>
+        </p:nvSpPr>
+        <p:spPr/>
+      </p:sp>
+      <p:sp>
+        <p:nvSpPr>
+          <p:cNvPr id="3" name="Notes Placeholder 2"/>
+          <p:cNvSpPr>
+            <a:spLocks noGrp="1"/>
+          </p:cNvSpPr>
+          <p:nvPr>
+            <p:ph type="body" idx="3" sz="quarter"/>
+          </p:nvPr>
+        </p:nvSpPr>
+        <p:spPr/>
+        <p:txBody>
+          <a:bodyPr/>
+          <a:lstStyle/>
+          <a:p>
+            <a:r>
+              <a:t>Students should be able to both detect and name these — detection for reading, naming for the discussion question about rebuilding a wild chart honestly.</a:t>
+            </a:r>
+          </a:p>
+        </p:txBody>
+      </p:sp>
+      <p:sp>
+        <p:nvSpPr>
+          <p:cNvPr id="4" name="Slide Number Placeholder 3"/>
+          <p:cNvSpPr>
+            <a:spLocks noGrp="1"/>
+          </p:cNvSpPr>
+          <p:nvPr>
+            <p:ph type="sldNum" idx="5" sz="quarter"/>
+          </p:nvPr>
+        </p:nvSpPr>
+        <p:spPr/>
+      </p:sp>
+    </p:spTree>
+  </p:cSld>
+  <p:clrMapOvr>
+    <a:masterClrMapping/>
+  </p:clrMapOvr>
+</p:notes>
+</file>
+
+<file path=ppt/notesSlides/notesSlide33.xml><?xml version="1.0" encoding="utf-8"?>
+<p:notes xmlns:a="http://schemas.openxmlformats.org/drawingml/2006/main" xmlns:p="http://schemas.openxmlformats.org/presentationml/2006/main" xmlns:r="http://schemas.openxmlformats.org/officeDocument/2006/relationships">
+  <p:cSld>
+    <p:spTree>
+      <p:nvGrpSpPr>
+        <p:cNvPr id="1" name=""/>
+        <p:cNvGrpSpPr/>
+        <p:nvPr/>
+      </p:nvGrpSpPr>
+      <p:grpSpPr>
+        <a:xfrm>
+          <a:off x="0" y="0"/>
+          <a:ext cx="0" cy="0"/>
+          <a:chOff x="0" y="0"/>
+          <a:chExt cx="0" cy="0"/>
+        </a:xfrm>
+      </p:grpSpPr>
+      <p:sp>
+        <p:nvSpPr>
+          <p:cNvPr id="2" name="Slide Image Placeholder 1"/>
+          <p:cNvSpPr>
+            <a:spLocks noGrp="1"/>
+          </p:cNvSpPr>
+          <p:nvPr>
+            <p:ph type="sldImg" idx="2"/>
+          </p:nvPr>
+        </p:nvSpPr>
+        <p:spPr/>
+      </p:sp>
+      <p:sp>
+        <p:nvSpPr>
+          <p:cNvPr id="3" name="Notes Placeholder 2"/>
+          <p:cNvSpPr>
+            <a:spLocks noGrp="1"/>
+          </p:cNvSpPr>
+          <p:nvPr>
+            <p:ph type="body" idx="3" sz="quarter"/>
+          </p:nvPr>
+        </p:nvSpPr>
+        <p:spPr/>
+        <p:txBody>
+          <a:bodyPr/>
+          <a:lstStyle/>
+          <a:p>
+            <a:r>
+              <a:t>The squint test is the visual version of the headings-only test from Chapter 3 — a two-second audit anyone can run before a chart ships.</a:t>
+            </a:r>
+          </a:p>
+        </p:txBody>
+      </p:sp>
+      <p:sp>
+        <p:nvSpPr>
+          <p:cNvPr id="4" name="Slide Number Placeholder 3"/>
+          <p:cNvSpPr>
+            <a:spLocks noGrp="1"/>
+          </p:cNvSpPr>
+          <p:nvPr>
+            <p:ph type="sldNum" idx="5" sz="quarter"/>
+          </p:nvPr>
+        </p:nvSpPr>
+        <p:spPr/>
+      </p:sp>
+    </p:spTree>
+  </p:cSld>
+  <p:clrMapOvr>
+    <a:masterClrMapping/>
+  </p:clrMapOvr>
+</p:notes>
+</file>
+
+<file path=ppt/notesSlides/notesSlide34.xml><?xml version="1.0" encoding="utf-8"?>
+<p:notes xmlns:a="http://schemas.openxmlformats.org/drawingml/2006/main" xmlns:p="http://schemas.openxmlformats.org/presentationml/2006/main" xmlns:r="http://schemas.openxmlformats.org/officeDocument/2006/relationships">
+  <p:cSld>
+    <p:spTree>
+      <p:nvGrpSpPr>
+        <p:cNvPr id="1" name=""/>
+        <p:cNvGrpSpPr/>
+        <p:nvPr/>
+      </p:nvGrpSpPr>
+      <p:grpSpPr>
+        <a:xfrm>
+          <a:off x="0" y="0"/>
+          <a:ext cx="0" cy="0"/>
+          <a:chOff x="0" y="0"/>
+          <a:chExt cx="0" cy="0"/>
+        </a:xfrm>
+      </p:grpSpPr>
+      <p:sp>
+        <p:nvSpPr>
+          <p:cNvPr id="2" name="Slide Image Placeholder 1"/>
+          <p:cNvSpPr>
+            <a:spLocks noGrp="1"/>
+          </p:cNvSpPr>
+          <p:nvPr>
+            <p:ph type="sldImg" idx="2"/>
+          </p:nvPr>
+        </p:nvSpPr>
+        <p:spPr/>
+      </p:sp>
+      <p:sp>
+        <p:nvSpPr>
+          <p:cNvPr id="3" name="Notes Placeholder 2"/>
+          <p:cNvSpPr>
+            <a:spLocks noGrp="1"/>
+          </p:cNvSpPr>
+          <p:nvPr>
+            <p:ph type="body" idx="3" sz="quarter"/>
+          </p:nvPr>
+        </p:nvSpPr>
+        <p:spPr/>
+        <p:txBody>
+          <a:bodyPr/>
+          <a:lstStyle/>
+          <a:p>
+            <a:r>
+              <a:t>Recap.</a:t>
+            </a:r>
+          </a:p>
+        </p:txBody>
+      </p:sp>
+      <p:sp>
+        <p:nvSpPr>
+          <p:cNvPr id="4" name="Slide Number Placeholder 3"/>
+          <p:cNvSpPr>
+            <a:spLocks noGrp="1"/>
+          </p:cNvSpPr>
+          <p:nvPr>
+            <p:ph type="sldNum" idx="5" sz="quarter"/>
+          </p:nvPr>
+        </p:nvSpPr>
+        <p:spPr/>
+      </p:sp>
+    </p:spTree>
+  </p:cSld>
+  <p:clrMapOvr>
+    <a:masterClrMapping/>
+  </p:clrMapOvr>
+</p:notes>
+</file>
+
+<file path=ppt/notesSlides/notesSlide35.xml><?xml version="1.0" encoding="utf-8"?>
+<p:notes xmlns:a="http://schemas.openxmlformats.org/drawingml/2006/main" xmlns:p="http://schemas.openxmlformats.org/presentationml/2006/main" xmlns:r="http://schemas.openxmlformats.org/officeDocument/2006/relationships">
+  <p:cSld>
+    <p:spTree>
+      <p:nvGrpSpPr>
+        <p:cNvPr id="1" name=""/>
+        <p:cNvGrpSpPr/>
+        <p:nvPr/>
+      </p:nvGrpSpPr>
+      <p:grpSpPr>
+        <a:xfrm>
+          <a:off x="0" y="0"/>
+          <a:ext cx="0" cy="0"/>
+          <a:chOff x="0" y="0"/>
+          <a:chExt cx="0" cy="0"/>
+        </a:xfrm>
+      </p:grpSpPr>
+      <p:sp>
+        <p:nvSpPr>
+          <p:cNvPr id="2" name="Slide Image Placeholder 1"/>
+          <p:cNvSpPr>
+            <a:spLocks noGrp="1"/>
+          </p:cNvSpPr>
+          <p:nvPr>
+            <p:ph type="sldImg" idx="2"/>
+          </p:nvPr>
+        </p:nvSpPr>
+        <p:spPr/>
+      </p:sp>
+      <p:sp>
+        <p:nvSpPr>
+          <p:cNvPr id="3" name="Notes Placeholder 2"/>
+          <p:cNvSpPr>
+            <a:spLocks noGrp="1"/>
+          </p:cNvSpPr>
+          <p:nvPr>
+            <p:ph type="body" idx="3" sz="quarter"/>
+          </p:nvPr>
+        </p:nvSpPr>
+        <p:spPr/>
+        <p:txBody>
+          <a:bodyPr/>
+          <a:lstStyle/>
+          <a:p>
+            <a:r>
+              <a:t>Reports travel above your manager's head with your name attached.</a:t>
+            </a:r>
+          </a:p>
+        </p:txBody>
+      </p:sp>
+      <p:sp>
+        <p:nvSpPr>
+          <p:cNvPr id="4" name="Slide Number Placeholder 3"/>
+          <p:cNvSpPr>
+            <a:spLocks noGrp="1"/>
+          </p:cNvSpPr>
+          <p:nvPr>
+            <p:ph type="sldNum" idx="5" sz="quarter"/>
+          </p:nvPr>
+        </p:nvSpPr>
+        <p:spPr/>
+      </p:sp>
+    </p:spTree>
+  </p:cSld>
+  <p:clrMapOvr>
+    <a:masterClrMapping/>
+  </p:clrMapOvr>
+</p:notes>
+</file>
+
+<file path=ppt/notesSlides/notesSlide36.xml><?xml version="1.0" encoding="utf-8"?>
+<p:notes xmlns:a="http://schemas.openxmlformats.org/drawingml/2006/main" xmlns:p="http://schemas.openxmlformats.org/presentationml/2006/main" xmlns:r="http://schemas.openxmlformats.org/officeDocument/2006/relationships">
+  <p:cSld>
+    <p:spTree>
+      <p:nvGrpSpPr>
+        <p:cNvPr id="1" name=""/>
+        <p:cNvGrpSpPr/>
+        <p:nvPr/>
+      </p:nvGrpSpPr>
+      <p:grpSpPr>
+        <a:xfrm>
+          <a:off x="0" y="0"/>
+          <a:ext cx="0" cy="0"/>
+          <a:chOff x="0" y="0"/>
+          <a:chExt cx="0" cy="0"/>
+        </a:xfrm>
+      </p:grpSpPr>
+      <p:sp>
+        <p:nvSpPr>
+          <p:cNvPr id="2" name="Slide Image Placeholder 1"/>
+          <p:cNvSpPr>
+            <a:spLocks noGrp="1"/>
+          </p:cNvSpPr>
+          <p:nvPr>
+            <p:ph type="sldImg" idx="2"/>
+          </p:nvPr>
+        </p:nvSpPr>
+        <p:spPr/>
+      </p:sp>
+      <p:sp>
+        <p:nvSpPr>
+          <p:cNvPr id="3" name="Notes Placeholder 2"/>
+          <p:cNvSpPr>
+            <a:spLocks noGrp="1"/>
+          </p:cNvSpPr>
+          <p:nvPr>
+            <p:ph type="body" idx="3" sz="quarter"/>
+          </p:nvPr>
+        </p:nvSpPr>
+        <p:spPr/>
+        <p:txBody>
+          <a:bodyPr/>
+          <a:lstStyle/>
+          <a:p>
+            <a:r>
+              <a:t>Async-ready.</a:t>
+            </a:r>
+          </a:p>
+        </p:txBody>
+      </p:sp>
+      <p:sp>
+        <p:nvSpPr>
+          <p:cNvPr id="4" name="Slide Number Placeholder 3"/>
+          <p:cNvSpPr>
+            <a:spLocks noGrp="1"/>
+          </p:cNvSpPr>
+          <p:nvPr>
+            <p:ph type="sldNum" idx="5" sz="quarter"/>
+          </p:nvPr>
+        </p:nvSpPr>
+        <p:spPr/>
+      </p:sp>
+    </p:spTree>
+  </p:cSld>
+  <p:clrMapOvr>
+    <a:masterClrMapping/>
+  </p:clrMapOvr>
+</p:notes>
+</file>
+
+<file path=ppt/notesSlides/notesSlide37.xml><?xml version="1.0" encoding="utf-8"?>
+<p:notes xmlns:a="http://schemas.openxmlformats.org/drawingml/2006/main" xmlns:p="http://schemas.openxmlformats.org/presentationml/2006/main" xmlns:r="http://schemas.openxmlformats.org/officeDocument/2006/relationships">
+  <p:cSld>
+    <p:spTree>
+      <p:nvGrpSpPr>
+        <p:cNvPr id="1" name=""/>
+        <p:cNvGrpSpPr/>
+        <p:nvPr/>
+      </p:nvGrpSpPr>
+      <p:grpSpPr>
+        <a:xfrm>
+          <a:off x="0" y="0"/>
+          <a:ext cx="0" cy="0"/>
+          <a:chOff x="0" y="0"/>
+          <a:chExt cx="0" cy="0"/>
+        </a:xfrm>
+      </p:grpSpPr>
+      <p:sp>
+        <p:nvSpPr>
+          <p:cNvPr id="2" name="Slide Image Placeholder 1"/>
+          <p:cNvSpPr>
+            <a:spLocks noGrp="1"/>
+          </p:cNvSpPr>
+          <p:nvPr>
+            <p:ph type="sldImg" idx="2"/>
+          </p:nvPr>
+        </p:nvSpPr>
+        <p:spPr/>
+      </p:sp>
+      <p:sp>
+        <p:nvSpPr>
+          <p:cNvPr id="3" name="Notes Placeholder 2"/>
+          <p:cNvSpPr>
+            <a:spLocks noGrp="1"/>
+          </p:cNvSpPr>
+          <p:nvPr>
+            <p:ph type="body" idx="3" sz="quarter"/>
+          </p:nvPr>
+        </p:nvSpPr>
+        <p:spPr/>
+        <p:txBody>
+          <a:bodyPr/>
+          <a:lstStyle/>
+          <a:p>
+            <a:r>
+              <a:t>Delivery-neutral closing.</a:t>
             </a:r>
           </a:p>
         </p:txBody>
@@ -8293,7 +9358,7 @@
     <p:bg>
       <p:bgPr>
         <a:solidFill>
-          <a:srgbClr val="FFFFFF"/>
+          <a:srgbClr val="0E4D33"/>
         </a:solidFill>
         <a:effectLst/>
       </p:bgPr>
@@ -8307,7 +9372,7 @@
       <p:grpSpPr/>
       <p:sp>
         <p:nvSpPr>
-          <p:cNvPr id="2" name="Title 1" descr="Slide title: Key takeaways"/>
+          <p:cNvPr id="2" name="Title 1" descr="Slide title: Getting the data"/>
           <p:cNvSpPr>
             <a:spLocks noGrp="1"/>
           </p:cNvSpPr>
@@ -8317,8 +9382,8 @@
         </p:nvSpPr>
         <p:spPr>
           <a:xfrm>
-            <a:off x="502920" y="411480"/>
-            <a:ext cx="11155680" cy="914400"/>
+            <a:off x="822960" y="2834640"/>
+            <a:ext cx="10515600" cy="914400"/>
           </a:xfrm>
         </p:spPr>
         <p:txBody>
@@ -8327,149 +9392,27 @@
           <a:p>
             <a:pPr algn="l"/>
             <a:r>
-              <a:rPr sz="3200" b="1">
-                <a:solidFill>
-                  <a:srgbClr val="0E4D33"/>
+              <a:rPr sz="4000" b="1">
+                <a:solidFill>
+                  <a:srgbClr val="FFFFFF"/>
                 </a:solidFill>
                 <a:latin typeface="Cambria"/>
               </a:rPr>
-              <a:t>Key takeaways</a:t>
-            </a:r>
-          </a:p>
-        </p:txBody>
-      </p:sp>
-      <p:sp>
-        <p:nvSpPr>
-          <p:cNvPr id="3" name="TextBox 2" descr="Footer: BADM 225 · Chapter 9"/>
+              <a:t>Getting the data</a:t>
+            </a:r>
+          </a:p>
+        </p:txBody>
+      </p:sp>
+      <p:sp>
+        <p:nvSpPr>
+          <p:cNvPr id="3" name="TextBox 2" descr="Section number 04"/>
           <p:cNvSpPr txBox="1"/>
           <p:nvPr/>
         </p:nvSpPr>
         <p:spPr>
           <a:xfrm>
-            <a:off x="502920" y="6446520"/>
-            <a:ext cx="5486400" cy="320040"/>
-          </a:xfrm>
-          <a:prstGeom prst="rect">
-            <a:avLst/>
-          </a:prstGeom>
-          <a:noFill/>
-        </p:spPr>
-        <p:txBody>
-          <a:bodyPr wrap="none">
-            <a:spAutoFit/>
-          </a:bodyPr>
-          <a:lstStyle/>
-          <a:p>
-            <a:r>
-              <a:rPr sz="1000">
-                <a:solidFill>
-                  <a:srgbClr val="5E6B64"/>
-                </a:solidFill>
-                <a:latin typeface="Calibri"/>
-              </a:rPr>
-              <a:t>BADM 225 · Chapter 9</a:t>
-            </a:r>
-          </a:p>
-        </p:txBody>
-      </p:sp>
-      <p:sp>
-        <p:nvSpPr>
-          <p:cNvPr id="4" name="TextBox 3" descr="Slide number 19"/>
-          <p:cNvSpPr txBox="1"/>
-          <p:nvPr/>
-        </p:nvSpPr>
-        <p:spPr>
-          <a:xfrm>
-            <a:off x="11247120" y="6446520"/>
-            <a:ext cx="640080" cy="320040"/>
-          </a:xfrm>
-          <a:prstGeom prst="rect">
-            <a:avLst/>
-          </a:prstGeom>
-          <a:noFill/>
-        </p:spPr>
-        <p:txBody>
-          <a:bodyPr wrap="none">
-            <a:spAutoFit/>
-          </a:bodyPr>
-          <a:lstStyle/>
-          <a:p>
-            <a:pPr algn="r"/>
-            <a:r>
-              <a:rPr sz="1000">
-                <a:solidFill>
-                  <a:srgbClr val="5E6B64"/>
-                </a:solidFill>
-                <a:latin typeface="Calibri"/>
-              </a:rPr>
-              <a:t>19</a:t>
-            </a:r>
-          </a:p>
-        </p:txBody>
-      </p:sp>
-      <p:sp>
-        <p:nvSpPr>
-          <p:cNvPr id="5" name="Oval 4" descr="Checkmark"/>
-          <p:cNvSpPr/>
-          <p:nvPr/>
-        </p:nvSpPr>
-        <p:spPr>
-          <a:xfrm>
-            <a:off x="640080" y="1572768"/>
-            <a:ext cx="420624" cy="420624"/>
-          </a:xfrm>
-          <a:prstGeom prst="ellipse">
-            <a:avLst/>
-          </a:prstGeom>
-          <a:solidFill>
-            <a:srgbClr val="0E4D33"/>
-          </a:solidFill>
-          <a:ln>
-            <a:noFill/>
-          </a:ln>
-          <a:effectLst/>
-        </p:spPr>
-        <p:style>
-          <a:lnRef idx="1">
-            <a:schemeClr val="accent1"/>
-          </a:lnRef>
-          <a:fillRef idx="3">
-            <a:schemeClr val="accent1"/>
-          </a:fillRef>
-          <a:effectRef idx="2">
-            <a:schemeClr val="accent1"/>
-          </a:effectRef>
-          <a:fontRef idx="minor">
-            <a:schemeClr val="lt1"/>
-          </a:fontRef>
-        </p:style>
-        <p:txBody>
-          <a:bodyPr rtlCol="0" anchor="ctr" lIns="0" rIns="0" tIns="0" bIns="0"/>
-          <a:lstStyle/>
-          <a:p>
-            <a:pPr algn="ctr"/>
-            <a:r>
-              <a:rPr sz="1100" b="1">
-                <a:solidFill>
-                  <a:srgbClr val="FFFFFF"/>
-                </a:solidFill>
-                <a:latin typeface="Calibri"/>
-              </a:rPr>
-              <a:t>✓</a:t>
-            </a:r>
-          </a:p>
-        </p:txBody>
-      </p:sp>
-      <p:sp>
-        <p:nvSpPr>
-          <p:cNvPr id="6" name="TextBox 5" descr="Takeaway 1"/>
-          <p:cNvSpPr txBox="1"/>
-          <p:nvPr/>
-        </p:nvSpPr>
-        <p:spPr>
-          <a:xfrm>
-            <a:off x="1325880" y="1554480"/>
-            <a:ext cx="10332720" cy="640080"/>
+            <a:off x="822960" y="1188720"/>
+            <a:ext cx="2743200" cy="1463040"/>
           </a:xfrm>
           <a:prstGeom prst="rect">
             <a:avLst/>
@@ -8488,80 +9431,27 @@
               </a:spcAft>
             </a:pPr>
             <a:r>
-              <a:rPr sz="1550" b="0" i="0">
-                <a:solidFill>
-                  <a:srgbClr val="212A26"/>
-                </a:solidFill>
-                <a:latin typeface="Calibri"/>
-              </a:rPr>
-              <a:t>Classify by the reader's question; a recommendation ending invokes analytical rules.</a:t>
-            </a:r>
-          </a:p>
-        </p:txBody>
-      </p:sp>
-      <p:sp>
-        <p:nvSpPr>
-          <p:cNvPr id="7" name="Oval 6" descr="Checkmark"/>
-          <p:cNvSpPr/>
-          <p:nvPr/>
-        </p:nvSpPr>
-        <p:spPr>
-          <a:xfrm>
-            <a:off x="640080" y="2212848"/>
-            <a:ext cx="420624" cy="420624"/>
-          </a:xfrm>
-          <a:prstGeom prst="ellipse">
-            <a:avLst/>
-          </a:prstGeom>
-          <a:solidFill>
-            <a:srgbClr val="0E4D33"/>
-          </a:solidFill>
-          <a:ln>
-            <a:noFill/>
-          </a:ln>
-          <a:effectLst/>
-        </p:spPr>
-        <p:style>
-          <a:lnRef idx="1">
-            <a:schemeClr val="accent1"/>
-          </a:lnRef>
-          <a:fillRef idx="3">
-            <a:schemeClr val="accent1"/>
-          </a:fillRef>
-          <a:effectRef idx="2">
-            <a:schemeClr val="accent1"/>
-          </a:effectRef>
-          <a:fontRef idx="minor">
-            <a:schemeClr val="lt1"/>
-          </a:fontRef>
-        </p:style>
-        <p:txBody>
-          <a:bodyPr rtlCol="0" anchor="ctr" lIns="0" rIns="0" tIns="0" bIns="0"/>
-          <a:lstStyle/>
-          <a:p>
-            <a:pPr algn="ctr"/>
-            <a:r>
-              <a:rPr sz="1100" b="1">
-                <a:solidFill>
-                  <a:srgbClr val="FFFFFF"/>
-                </a:solidFill>
-                <a:latin typeface="Calibri"/>
-              </a:rPr>
-              <a:t>✓</a:t>
-            </a:r>
-          </a:p>
-        </p:txBody>
-      </p:sp>
-      <p:sp>
-        <p:nvSpPr>
-          <p:cNvPr id="8" name="TextBox 7" descr="Takeaway 2"/>
+              <a:rPr sz="8000" b="1" i="0">
+                <a:solidFill>
+                  <a:srgbClr val="C9931A"/>
+                </a:solidFill>
+                <a:latin typeface="Cambria"/>
+              </a:rPr>
+              <a:t>04</a:t>
+            </a:r>
+          </a:p>
+        </p:txBody>
+      </p:sp>
+      <p:sp>
+        <p:nvSpPr>
+          <p:cNvPr id="4" name="TextBox 3" descr="Section note"/>
           <p:cNvSpPr txBox="1"/>
           <p:nvPr/>
         </p:nvSpPr>
         <p:spPr>
           <a:xfrm>
-            <a:off x="1325880" y="2194560"/>
-            <a:ext cx="10332720" cy="640080"/>
+            <a:off x="822960" y="4023360"/>
+            <a:ext cx="9601200" cy="1097280"/>
           </a:xfrm>
           <a:prstGeom prst="rect">
             <a:avLst/>
@@ -8580,80 +9470,27 @@
               </a:spcAft>
             </a:pPr>
             <a:r>
-              <a:rPr sz="1550" b="0" i="0">
-                <a:solidFill>
-                  <a:srgbClr val="212A26"/>
-                </a:solidFill>
-                <a:latin typeface="Calibri"/>
-              </a:rPr>
-              <a:t>Conclude before structuring — then build the pyramid: answer, MECE reasons, evidence.</a:t>
-            </a:r>
-          </a:p>
-        </p:txBody>
-      </p:sp>
-      <p:sp>
-        <p:nvSpPr>
-          <p:cNvPr id="9" name="Oval 8" descr="Checkmark"/>
-          <p:cNvSpPr/>
-          <p:nvPr/>
-        </p:nvSpPr>
-        <p:spPr>
-          <a:xfrm>
-            <a:off x="640080" y="2852928"/>
-            <a:ext cx="420624" cy="420624"/>
-          </a:xfrm>
-          <a:prstGeom prst="ellipse">
-            <a:avLst/>
-          </a:prstGeom>
-          <a:solidFill>
-            <a:srgbClr val="0E4D33"/>
-          </a:solidFill>
-          <a:ln>
-            <a:noFill/>
-          </a:ln>
-          <a:effectLst/>
-        </p:spPr>
-        <p:style>
-          <a:lnRef idx="1">
-            <a:schemeClr val="accent1"/>
-          </a:lnRef>
-          <a:fillRef idx="3">
-            <a:schemeClr val="accent1"/>
-          </a:fillRef>
-          <a:effectRef idx="2">
-            <a:schemeClr val="accent1"/>
-          </a:effectRef>
-          <a:fontRef idx="minor">
-            <a:schemeClr val="lt1"/>
-          </a:fontRef>
-        </p:style>
-        <p:txBody>
-          <a:bodyPr rtlCol="0" anchor="ctr" lIns="0" rIns="0" tIns="0" bIns="0"/>
-          <a:lstStyle/>
-          <a:p>
-            <a:pPr algn="ctr"/>
-            <a:r>
-              <a:rPr sz="1100" b="1">
-                <a:solidFill>
-                  <a:srgbClr val="FFFFFF"/>
-                </a:solidFill>
-                <a:latin typeface="Calibri"/>
-              </a:rPr>
-              <a:t>✓</a:t>
-            </a:r>
-          </a:p>
-        </p:txBody>
-      </p:sp>
-      <p:sp>
-        <p:nvSpPr>
-          <p:cNvPr id="10" name="TextBox 9" descr="Takeaway 3"/>
+              <a:rPr sz="1700" b="0" i="0">
+                <a:solidFill>
+                  <a:srgbClr val="EAF1EB"/>
+                </a:solidFill>
+                <a:latin typeface="Calibri"/>
+              </a:rPr>
+              <a:t>A report is only as good as what it stands on — gather before you conclude.</a:t>
+            </a:r>
+          </a:p>
+        </p:txBody>
+      </p:sp>
+      <p:sp>
+        <p:nvSpPr>
+          <p:cNvPr id="5" name="TextBox 4" descr="Footer: BADM 225 · Chapter 9"/>
           <p:cNvSpPr txBox="1"/>
           <p:nvPr/>
         </p:nvSpPr>
         <p:spPr>
           <a:xfrm>
-            <a:off x="1325880" y="2834640"/>
-            <a:ext cx="10332720" cy="640080"/>
+            <a:off x="502920" y="6446520"/>
+            <a:ext cx="5486400" cy="320040"/>
           </a:xfrm>
           <a:prstGeom prst="rect">
             <a:avLst/>
@@ -8661,91 +9498,33 @@
           <a:noFill/>
         </p:spPr>
         <p:txBody>
-          <a:bodyPr wrap="square">
+          <a:bodyPr wrap="none">
             <a:spAutoFit/>
           </a:bodyPr>
           <a:lstStyle/>
           <a:p>
-            <a:pPr algn="l">
-              <a:spcAft>
-                <a:spcPts val="800"/>
-              </a:spcAft>
-            </a:pPr>
-            <a:r>
-              <a:rPr sz="1550" b="0" i="0">
-                <a:solidFill>
-                  <a:srgbClr val="212A26"/>
-                </a:solidFill>
-                <a:latin typeface="Calibri"/>
-              </a:rPr>
-              <a:t>Status lines carry verdicts; honest yellows beat green-to-red surprises — the audit is retrospective.</a:t>
-            </a:r>
-          </a:p>
-        </p:txBody>
-      </p:sp>
-      <p:sp>
-        <p:nvSpPr>
-          <p:cNvPr id="11" name="Oval 10" descr="Checkmark"/>
-          <p:cNvSpPr/>
-          <p:nvPr/>
-        </p:nvSpPr>
-        <p:spPr>
-          <a:xfrm>
-            <a:off x="640080" y="3493008"/>
-            <a:ext cx="420624" cy="420624"/>
-          </a:xfrm>
-          <a:prstGeom prst="ellipse">
-            <a:avLst/>
-          </a:prstGeom>
-          <a:solidFill>
-            <a:srgbClr val="0E4D33"/>
-          </a:solidFill>
-          <a:ln>
-            <a:noFill/>
-          </a:ln>
-          <a:effectLst/>
-        </p:spPr>
-        <p:style>
-          <a:lnRef idx="1">
-            <a:schemeClr val="accent1"/>
-          </a:lnRef>
-          <a:fillRef idx="3">
-            <a:schemeClr val="accent1"/>
-          </a:fillRef>
-          <a:effectRef idx="2">
-            <a:schemeClr val="accent1"/>
-          </a:effectRef>
-          <a:fontRef idx="minor">
-            <a:schemeClr val="lt1"/>
-          </a:fontRef>
-        </p:style>
-        <p:txBody>
-          <a:bodyPr rtlCol="0" anchor="ctr" lIns="0" rIns="0" tIns="0" bIns="0"/>
-          <a:lstStyle/>
-          <a:p>
-            <a:pPr algn="ctr"/>
-            <a:r>
-              <a:rPr sz="1100" b="1">
-                <a:solidFill>
-                  <a:srgbClr val="FFFFFF"/>
-                </a:solidFill>
-                <a:latin typeface="Calibri"/>
-              </a:rPr>
-              <a:t>✓</a:t>
-            </a:r>
-          </a:p>
-        </p:txBody>
-      </p:sp>
-      <p:sp>
-        <p:nvSpPr>
-          <p:cNvPr id="12" name="TextBox 11" descr="Takeaway 4"/>
+            <a:r>
+              <a:rPr sz="1000">
+                <a:solidFill>
+                  <a:srgbClr val="5E6B64"/>
+                </a:solidFill>
+                <a:latin typeface="Calibri"/>
+              </a:rPr>
+              <a:t>BADM 225 · Chapter 9</a:t>
+            </a:r>
+          </a:p>
+        </p:txBody>
+      </p:sp>
+      <p:sp>
+        <p:nvSpPr>
+          <p:cNvPr id="6" name="TextBox 5" descr="Slide number 19"/>
           <p:cNvSpPr txBox="1"/>
           <p:nvPr/>
         </p:nvSpPr>
         <p:spPr>
           <a:xfrm>
-            <a:off x="1325880" y="3474720"/>
-            <a:ext cx="10332720" cy="640080"/>
+            <a:off x="11247120" y="6446520"/>
+            <a:ext cx="640080" cy="320040"/>
           </a:xfrm>
           <a:prstGeom prst="rect">
             <a:avLst/>
@@ -8753,265 +9532,20 @@
           <a:noFill/>
         </p:spPr>
         <p:txBody>
-          <a:bodyPr wrap="square">
+          <a:bodyPr wrap="none">
             <a:spAutoFit/>
           </a:bodyPr>
           <a:lstStyle/>
           <a:p>
-            <a:pPr algn="l">
-              <a:spcAft>
-                <a:spcPts val="800"/>
-              </a:spcAft>
-            </a:pPr>
-            <a:r>
-              <a:rPr sz="1550" b="0" i="0">
-                <a:solidFill>
-                  <a:srgbClr val="212A26"/>
-                </a:solidFill>
-                <a:latin typeface="Calibri"/>
-              </a:rPr>
-              <a:t>Minutes: decisions, owners, deadlines — one page, same day. Incidents: actors, causes, owners, prevention.</a:t>
-            </a:r>
-          </a:p>
-        </p:txBody>
-      </p:sp>
-      <p:sp>
-        <p:nvSpPr>
-          <p:cNvPr id="13" name="Oval 12" descr="Checkmark"/>
-          <p:cNvSpPr/>
-          <p:nvPr/>
-        </p:nvSpPr>
-        <p:spPr>
-          <a:xfrm>
-            <a:off x="640080" y="4133088"/>
-            <a:ext cx="420624" cy="420624"/>
-          </a:xfrm>
-          <a:prstGeom prst="ellipse">
-            <a:avLst/>
-          </a:prstGeom>
-          <a:solidFill>
-            <a:srgbClr val="0E4D33"/>
-          </a:solidFill>
-          <a:ln>
-            <a:noFill/>
-          </a:ln>
-          <a:effectLst/>
-        </p:spPr>
-        <p:style>
-          <a:lnRef idx="1">
-            <a:schemeClr val="accent1"/>
-          </a:lnRef>
-          <a:fillRef idx="3">
-            <a:schemeClr val="accent1"/>
-          </a:fillRef>
-          <a:effectRef idx="2">
-            <a:schemeClr val="accent1"/>
-          </a:effectRef>
-          <a:fontRef idx="minor">
-            <a:schemeClr val="lt1"/>
-          </a:fontRef>
-        </p:style>
-        <p:txBody>
-          <a:bodyPr rtlCol="0" anchor="ctr" lIns="0" rIns="0" tIns="0" bIns="0"/>
-          <a:lstStyle/>
-          <a:p>
-            <a:pPr algn="ctr"/>
-            <a:r>
-              <a:rPr sz="1100" b="1">
-                <a:solidFill>
-                  <a:srgbClr val="FFFFFF"/>
-                </a:solidFill>
-                <a:latin typeface="Calibri"/>
-              </a:rPr>
-              <a:t>✓</a:t>
-            </a:r>
-          </a:p>
-        </p:txBody>
-      </p:sp>
-      <p:sp>
-        <p:nvSpPr>
-          <p:cNvPr id="14" name="TextBox 13" descr="Takeaway 5"/>
-          <p:cNvSpPr txBox="1"/>
-          <p:nvPr/>
-        </p:nvSpPr>
-        <p:spPr>
-          <a:xfrm>
-            <a:off x="1325880" y="4114800"/>
-            <a:ext cx="10332720" cy="640080"/>
-          </a:xfrm>
-          <a:prstGeom prst="rect">
-            <a:avLst/>
-          </a:prstGeom>
-          <a:noFill/>
-        </p:spPr>
-        <p:txBody>
-          <a:bodyPr wrap="square">
-            <a:spAutoFit/>
-          </a:bodyPr>
-          <a:lstStyle/>
-          <a:p>
-            <a:pPr algn="l">
-              <a:spcAft>
-                <a:spcPts val="800"/>
-              </a:spcAft>
-            </a:pPr>
-            <a:r>
-              <a:rPr sz="1550" b="0" i="0">
-                <a:solidFill>
-                  <a:srgbClr val="212A26"/>
-                </a:solidFill>
-                <a:latin typeface="Calibri"/>
-              </a:rPr>
-              <a:t>Displays make one point, announced in the title, on honest axes.</a:t>
-            </a:r>
-          </a:p>
-        </p:txBody>
-      </p:sp>
-      <p:sp>
-        <p:nvSpPr>
-          <p:cNvPr id="15" name="Oval 14" descr="Checkmark"/>
-          <p:cNvSpPr/>
-          <p:nvPr/>
-        </p:nvSpPr>
-        <p:spPr>
-          <a:xfrm>
-            <a:off x="640080" y="4773168"/>
-            <a:ext cx="420624" cy="420624"/>
-          </a:xfrm>
-          <a:prstGeom prst="ellipse">
-            <a:avLst/>
-          </a:prstGeom>
-          <a:solidFill>
-            <a:srgbClr val="0E4D33"/>
-          </a:solidFill>
-          <a:ln>
-            <a:noFill/>
-          </a:ln>
-          <a:effectLst/>
-        </p:spPr>
-        <p:style>
-          <a:lnRef idx="1">
-            <a:schemeClr val="accent1"/>
-          </a:lnRef>
-          <a:fillRef idx="3">
-            <a:schemeClr val="accent1"/>
-          </a:fillRef>
-          <a:effectRef idx="2">
-            <a:schemeClr val="accent1"/>
-          </a:effectRef>
-          <a:fontRef idx="minor">
-            <a:schemeClr val="lt1"/>
-          </a:fontRef>
-        </p:style>
-        <p:txBody>
-          <a:bodyPr rtlCol="0" anchor="ctr" lIns="0" rIns="0" tIns="0" bIns="0"/>
-          <a:lstStyle/>
-          <a:p>
-            <a:pPr algn="ctr"/>
-            <a:r>
-              <a:rPr sz="1100" b="1">
-                <a:solidFill>
-                  <a:srgbClr val="FFFFFF"/>
-                </a:solidFill>
-                <a:latin typeface="Calibri"/>
-              </a:rPr>
-              <a:t>✓</a:t>
-            </a:r>
-          </a:p>
-        </p:txBody>
-      </p:sp>
-      <p:sp>
-        <p:nvSpPr>
-          <p:cNvPr id="16" name="TextBox 15" descr="Takeaway 6"/>
-          <p:cNvSpPr txBox="1"/>
-          <p:nvPr/>
-        </p:nvSpPr>
-        <p:spPr>
-          <a:xfrm>
-            <a:off x="1325880" y="4754880"/>
-            <a:ext cx="10332720" cy="640080"/>
-          </a:xfrm>
-          <a:prstGeom prst="rect">
-            <a:avLst/>
-          </a:prstGeom>
-          <a:noFill/>
-        </p:spPr>
-        <p:txBody>
-          <a:bodyPr wrap="square">
-            <a:spAutoFit/>
-          </a:bodyPr>
-          <a:lstStyle/>
-          <a:p>
-            <a:pPr algn="l">
-              <a:spcAft>
-                <a:spcPts val="800"/>
-              </a:spcAft>
-            </a:pPr>
-            <a:r>
-              <a:rPr sz="1550" b="0" i="0">
-                <a:solidFill>
-                  <a:srgbClr val="212A26"/>
-                </a:solidFill>
-                <a:latin typeface="Calibri"/>
-              </a:rPr>
-              <a:t>Persuasive AND complete: the skeptic test governs the analytical line.</a:t>
-            </a:r>
-          </a:p>
-        </p:txBody>
-      </p:sp>
-      <p:sp>
-        <p:nvSpPr>
-          <p:cNvPr id="17" name="Rounded Rectangle 16" descr="Practice reminder"/>
-          <p:cNvSpPr/>
-          <p:nvPr/>
-        </p:nvSpPr>
-        <p:spPr>
-          <a:xfrm>
-            <a:off x="548640" y="5468112"/>
-            <a:ext cx="10424160" cy="685800"/>
-          </a:xfrm>
-          <a:prstGeom prst="roundRect">
-            <a:avLst/>
-          </a:prstGeom>
-          <a:solidFill>
-            <a:srgbClr val="0E4D33"/>
-          </a:solidFill>
-          <a:ln>
-            <a:noFill/>
-          </a:ln>
-          <a:effectLst/>
-        </p:spPr>
-        <p:style>
-          <a:lnRef idx="1">
-            <a:schemeClr val="accent1"/>
-          </a:lnRef>
-          <a:fillRef idx="3">
-            <a:schemeClr val="accent1"/>
-          </a:fillRef>
-          <a:effectRef idx="2">
-            <a:schemeClr val="accent1"/>
-          </a:effectRef>
-          <a:fontRef idx="minor">
-            <a:schemeClr val="lt1"/>
-          </a:fontRef>
-        </p:style>
-        <p:txBody>
-          <a:bodyPr rtlCol="0" anchor="t" wrap="square" lIns="164592" rIns="164592" tIns="128016" bIns="109728"/>
-          <a:lstStyle/>
-          <a:p>
-            <a:pPr algn="l">
-              <a:spcAft>
-                <a:spcPts val="0"/>
-              </a:spcAft>
-            </a:pPr>
-            <a:r>
-              <a:rPr sz="1450" b="1" i="0">
-                <a:solidFill>
-                  <a:srgbClr val="FFFFFF"/>
-                </a:solidFill>
-                <a:latin typeface="Calibri"/>
-              </a:rPr>
-              <a:t>Practice now: course site → Chapter 9 → Practice, then the graded homework before the weekly deadline.</a:t>
+            <a:pPr algn="r"/>
+            <a:r>
+              <a:rPr sz="1000">
+                <a:solidFill>
+                  <a:srgbClr val="5E6B64"/>
+                </a:solidFill>
+                <a:latin typeface="Calibri"/>
+              </a:rPr>
+              <a:t>19</a:t>
             </a:r>
           </a:p>
         </p:txBody>
@@ -9351,7 +9885,7 @@
     <p:bg>
       <p:bgPr>
         <a:solidFill>
-          <a:srgbClr val="EAF1EB"/>
+          <a:srgbClr val="FFFFFF"/>
         </a:solidFill>
         <a:effectLst/>
       </p:bgPr>
@@ -9365,7 +9899,7 @@
       <p:grpSpPr/>
       <p:sp>
         <p:nvSpPr>
-          <p:cNvPr id="2" name="Title 1" descr="Slide title: Worth keeping"/>
+          <p:cNvPr id="2" name="Title 1" descr="Slide title: Secondary first, primary second"/>
           <p:cNvSpPr>
             <a:spLocks noGrp="1"/>
           </p:cNvSpPr>
@@ -9385,27 +9919,96 @@
           <a:p>
             <a:pPr algn="l"/>
             <a:r>
-              <a:rPr sz="3400" b="1">
+              <a:rPr sz="3200" b="1">
                 <a:solidFill>
                   <a:srgbClr val="0E4D33"/>
                 </a:solidFill>
                 <a:latin typeface="Cambria"/>
               </a:rPr>
-              <a:t>Worth keeping</a:t>
-            </a:r>
-          </a:p>
-        </p:txBody>
-      </p:sp>
-      <p:sp>
-        <p:nvSpPr>
-          <p:cNvPr id="3" name="TextBox 2" descr="Quotation"/>
+              <a:t>Secondary first, primary second</a:t>
+            </a:r>
+          </a:p>
+        </p:txBody>
+      </p:sp>
+      <p:sp>
+        <p:nvSpPr>
+          <p:cNvPr id="3" name="TextBox 2" descr="Footer: BADM 225 · Chapter 9"/>
           <p:cNvSpPr txBox="1"/>
           <p:nvPr/>
         </p:nvSpPr>
         <p:spPr>
           <a:xfrm>
-            <a:off x="1280160" y="2194560"/>
-            <a:ext cx="9601200" cy="2377440"/>
+            <a:off x="502920" y="6446520"/>
+            <a:ext cx="5486400" cy="320040"/>
+          </a:xfrm>
+          <a:prstGeom prst="rect">
+            <a:avLst/>
+          </a:prstGeom>
+          <a:noFill/>
+        </p:spPr>
+        <p:txBody>
+          <a:bodyPr wrap="none">
+            <a:spAutoFit/>
+          </a:bodyPr>
+          <a:lstStyle/>
+          <a:p>
+            <a:r>
+              <a:rPr sz="1000">
+                <a:solidFill>
+                  <a:srgbClr val="5E6B64"/>
+                </a:solidFill>
+                <a:latin typeface="Calibri"/>
+              </a:rPr>
+              <a:t>BADM 225 · Chapter 9</a:t>
+            </a:r>
+          </a:p>
+        </p:txBody>
+      </p:sp>
+      <p:sp>
+        <p:nvSpPr>
+          <p:cNvPr id="4" name="TextBox 3" descr="Slide number 20"/>
+          <p:cNvSpPr txBox="1"/>
+          <p:nvPr/>
+        </p:nvSpPr>
+        <p:spPr>
+          <a:xfrm>
+            <a:off x="11247120" y="6446520"/>
+            <a:ext cx="640080" cy="320040"/>
+          </a:xfrm>
+          <a:prstGeom prst="rect">
+            <a:avLst/>
+          </a:prstGeom>
+          <a:noFill/>
+        </p:spPr>
+        <p:txBody>
+          <a:bodyPr wrap="none">
+            <a:spAutoFit/>
+          </a:bodyPr>
+          <a:lstStyle/>
+          <a:p>
+            <a:pPr algn="r"/>
+            <a:r>
+              <a:rPr sz="1000">
+                <a:solidFill>
+                  <a:srgbClr val="5E6B64"/>
+                </a:solidFill>
+                <a:latin typeface="Calibri"/>
+              </a:rPr>
+              <a:t>20</a:t>
+            </a:r>
+          </a:p>
+        </p:txBody>
+      </p:sp>
+      <p:sp>
+        <p:nvSpPr>
+          <p:cNvPr id="5" name="TextBox 4" descr="Key points"/>
+          <p:cNvSpPr txBox="1"/>
+          <p:nvPr/>
+        </p:nvSpPr>
+        <p:spPr>
+          <a:xfrm>
+            <a:off x="548640" y="1554480"/>
+            <a:ext cx="11064240" cy="4663440"/>
           </a:xfrm>
           <a:prstGeom prst="rect">
             <a:avLst/>
@@ -9420,125 +10023,137 @@
           <a:p>
             <a:pPr algn="l">
               <a:spcAft>
-                <a:spcPts val="800"/>
+                <a:spcPts val="1200"/>
               </a:spcAft>
             </a:pPr>
             <a:r>
-              <a:rPr sz="2700" b="0" i="1">
+              <a:rPr sz="1700">
+                <a:solidFill>
+                  <a:srgbClr val="8A6410"/>
+                </a:solidFill>
+                <a:latin typeface="Calibri"/>
+              </a:rPr>
+              <a:t>▪  </a:t>
+            </a:r>
+            <a:r>
+              <a:rPr sz="1700" b="1">
+                <a:solidFill>
+                  <a:srgbClr val="0E4D33"/>
+                </a:solidFill>
+                <a:latin typeface="Calibri"/>
+              </a:rPr>
+              <a:t>Someone probably measured it already.  </a:t>
+            </a:r>
+            <a:r>
+              <a:rPr sz="1700" b="0" i="0">
                 <a:solidFill>
                   <a:srgbClr val="212A26"/>
                 </a:solidFill>
-                <a:latin typeface="Cambria"/>
-              </a:rPr>
-              <a:t>“Every report is an audition you didn't know was scheduled — judged by readers you may never meet, on the one skill organizations can't fake caring about: knowing what matters.”</a:t>
-            </a:r>
-          </a:p>
-        </p:txBody>
-      </p:sp>
-      <p:sp>
-        <p:nvSpPr>
-          <p:cNvPr id="4" name="TextBox 3" descr="Attribution"/>
-          <p:cNvSpPr txBox="1"/>
-          <p:nvPr/>
-        </p:nvSpPr>
-        <p:spPr>
-          <a:xfrm>
-            <a:off x="1280160" y="4754880"/>
-            <a:ext cx="9601200" cy="548640"/>
-          </a:xfrm>
-          <a:prstGeom prst="rect">
-            <a:avLst/>
-          </a:prstGeom>
-          <a:noFill/>
-        </p:spPr>
-        <p:txBody>
-          <a:bodyPr wrap="square">
-            <a:spAutoFit/>
-          </a:bodyPr>
-          <a:lstStyle/>
+                <a:latin typeface="Calibri"/>
+              </a:rPr>
+              <a:t>Internal dashboards, past reports, industry data, published benchmarks — an hour of looking beats a week of collecting.</a:t>
+            </a:r>
+          </a:p>
           <a:p>
             <a:pPr algn="l">
               <a:spcAft>
-                <a:spcPts val="800"/>
+                <a:spcPts val="1200"/>
               </a:spcAft>
             </a:pPr>
             <a:r>
-              <a:rPr sz="1600" b="0" i="0">
-                <a:solidFill>
-                  <a:srgbClr val="5E6B64"/>
-                </a:solidFill>
-                <a:latin typeface="Calibri"/>
-              </a:rPr>
-              <a:t>— this chapter, compressed</a:t>
-            </a:r>
-          </a:p>
-        </p:txBody>
-      </p:sp>
-      <p:sp>
-        <p:nvSpPr>
-          <p:cNvPr id="5" name="TextBox 4" descr="Footer: BADM 225 · Chapter 9"/>
-          <p:cNvSpPr txBox="1"/>
-          <p:nvPr/>
-        </p:nvSpPr>
-        <p:spPr>
-          <a:xfrm>
-            <a:off x="502920" y="6446520"/>
-            <a:ext cx="5486400" cy="320040"/>
-          </a:xfrm>
-          <a:prstGeom prst="rect">
-            <a:avLst/>
-          </a:prstGeom>
-          <a:noFill/>
-        </p:spPr>
-        <p:txBody>
-          <a:bodyPr wrap="none">
-            <a:spAutoFit/>
-          </a:bodyPr>
-          <a:lstStyle/>
-          <a:p>
-            <a:r>
-              <a:rPr sz="1000">
-                <a:solidFill>
-                  <a:srgbClr val="5E6B64"/>
-                </a:solidFill>
-                <a:latin typeface="Calibri"/>
-              </a:rPr>
-              <a:t>BADM 225 · Chapter 9</a:t>
-            </a:r>
-          </a:p>
-        </p:txBody>
-      </p:sp>
-      <p:sp>
-        <p:nvSpPr>
-          <p:cNvPr id="6" name="TextBox 5" descr="Slide number 20"/>
-          <p:cNvSpPr txBox="1"/>
-          <p:nvPr/>
-        </p:nvSpPr>
-        <p:spPr>
-          <a:xfrm>
-            <a:off x="11247120" y="6446520"/>
-            <a:ext cx="640080" cy="320040"/>
-          </a:xfrm>
-          <a:prstGeom prst="rect">
-            <a:avLst/>
-          </a:prstGeom>
-          <a:noFill/>
-        </p:spPr>
-        <p:txBody>
-          <a:bodyPr wrap="none">
-            <a:spAutoFit/>
-          </a:bodyPr>
-          <a:lstStyle/>
-          <a:p>
-            <a:pPr algn="r"/>
-            <a:r>
-              <a:rPr sz="1000">
-                <a:solidFill>
-                  <a:srgbClr val="5E6B64"/>
-                </a:solidFill>
-                <a:latin typeface="Calibri"/>
-              </a:rPr>
-              <a:t>20</a:t>
+              <a:rPr sz="1700">
+                <a:solidFill>
+                  <a:srgbClr val="8A6410"/>
+                </a:solidFill>
+                <a:latin typeface="Calibri"/>
+              </a:rPr>
+              <a:t>▪  </a:t>
+            </a:r>
+            <a:r>
+              <a:rPr sz="1700" b="1">
+                <a:solidFill>
+                  <a:srgbClr val="0E4D33"/>
+                </a:solidFill>
+                <a:latin typeface="Calibri"/>
+              </a:rPr>
+              <a:t>Then fill the gaps with primary work:  </a:t>
+            </a:r>
+            <a:r>
+              <a:rPr sz="1700" b="0" i="0">
+                <a:solidFill>
+                  <a:srgbClr val="212A26"/>
+                </a:solidFill>
+                <a:latin typeface="Calibri"/>
+              </a:rPr>
+              <a:t>your own counts, timings, interviews, and pilots — collected for THIS question, owned by you, defended by you.</a:t>
+            </a:r>
+          </a:p>
+          <a:p>
+            <a:pPr algn="l">
+              <a:spcAft>
+                <a:spcPts val="1200"/>
+              </a:spcAft>
+            </a:pPr>
+            <a:r>
+              <a:rPr sz="1700">
+                <a:solidFill>
+                  <a:srgbClr val="8A6410"/>
+                </a:solidFill>
+                <a:latin typeface="Calibri"/>
+              </a:rPr>
+              <a:t>▪  </a:t>
+            </a:r>
+            <a:r>
+              <a:rPr sz="1700" b="1">
+                <a:solidFill>
+                  <a:srgbClr val="0E4D33"/>
+                </a:solidFill>
+                <a:latin typeface="Calibri"/>
+              </a:rPr>
+              <a:t>Date every number you inherit.  </a:t>
+            </a:r>
+            <a:r>
+              <a:rPr sz="1700" b="0" i="0">
+                <a:solidFill>
+                  <a:srgbClr val="212A26"/>
+                </a:solidFill>
+                <a:latin typeface="Calibri"/>
+              </a:rPr>
+              <a:t>Last year's baseline presented as current is the most common silent error in workplace reports.</a:t>
+            </a:r>
+          </a:p>
+          <a:p>
+            <a:pPr algn="l">
+              <a:spcAft>
+                <a:spcPts val="1200"/>
+              </a:spcAft>
+            </a:pPr>
+            <a:r>
+              <a:rPr sz="1700">
+                <a:solidFill>
+                  <a:srgbClr val="8A6410"/>
+                </a:solidFill>
+                <a:latin typeface="Calibri"/>
+              </a:rPr>
+              <a:t>▪  </a:t>
+            </a:r>
+            <a:r>
+              <a:rPr sz="1700" b="1">
+                <a:solidFill>
+                  <a:srgbClr val="0E4D33"/>
+                </a:solidFill>
+                <a:latin typeface="Calibri"/>
+              </a:rPr>
+              <a:t>Record the 'as of' and the source in the exhibit itself  </a:t>
+            </a:r>
+            <a:r>
+              <a:rPr sz="1700" b="0" i="0">
+                <a:solidFill>
+                  <a:srgbClr val="212A26"/>
+                </a:solidFill>
+                <a:latin typeface="Calibri"/>
+              </a:rPr>
+              <a:t>— 'Support tickets, Jan–Jun 2026, helpdesk export 7/1' — so the report survives its author's vacation.</a:t>
             </a:r>
           </a:p>
         </p:txBody>
@@ -9557,7 +10172,7 @@
     <p:bg>
       <p:bgPr>
         <a:solidFill>
-          <a:srgbClr val="0E4D33"/>
+          <a:srgbClr val="FFFFFF"/>
         </a:solidFill>
         <a:effectLst/>
       </p:bgPr>
@@ -9571,7 +10186,7 @@
       <p:grpSpPr/>
       <p:sp>
         <p:nvSpPr>
-          <p:cNvPr id="2" name="Title 1" descr="Slide title: Discussion questions"/>
+          <p:cNvPr id="2" name="Title 1" descr="Slide title: Interviews and quick surveys, minimum viable rigor"/>
           <p:cNvSpPr>
             <a:spLocks noGrp="1"/>
           </p:cNvSpPr>
@@ -9591,27 +10206,96 @@
           <a:p>
             <a:pPr algn="l"/>
             <a:r>
-              <a:rPr sz="3400" b="1">
-                <a:solidFill>
-                  <a:srgbClr val="FFFFFF"/>
+              <a:rPr sz="3200" b="1">
+                <a:solidFill>
+                  <a:srgbClr val="0E4D33"/>
                 </a:solidFill>
                 <a:latin typeface="Cambria"/>
               </a:rPr>
-              <a:t>Discussion questions</a:t>
-            </a:r>
-          </a:p>
-        </p:txBody>
-      </p:sp>
-      <p:sp>
-        <p:nvSpPr>
-          <p:cNvPr id="3" name="TextBox 2" descr="Discussion questions"/>
+              <a:t>Interviews and quick surveys, minimum viable rigor</a:t>
+            </a:r>
+          </a:p>
+        </p:txBody>
+      </p:sp>
+      <p:sp>
+        <p:nvSpPr>
+          <p:cNvPr id="3" name="TextBox 2" descr="Footer: BADM 225 · Chapter 9"/>
           <p:cNvSpPr txBox="1"/>
           <p:nvPr/>
         </p:nvSpPr>
         <p:spPr>
           <a:xfrm>
-            <a:off x="731520" y="1737360"/>
-            <a:ext cx="10698480" cy="4480560"/>
+            <a:off x="502920" y="6446520"/>
+            <a:ext cx="5486400" cy="320040"/>
+          </a:xfrm>
+          <a:prstGeom prst="rect">
+            <a:avLst/>
+          </a:prstGeom>
+          <a:noFill/>
+        </p:spPr>
+        <p:txBody>
+          <a:bodyPr wrap="none">
+            <a:spAutoFit/>
+          </a:bodyPr>
+          <a:lstStyle/>
+          <a:p>
+            <a:r>
+              <a:rPr sz="1000">
+                <a:solidFill>
+                  <a:srgbClr val="5E6B64"/>
+                </a:solidFill>
+                <a:latin typeface="Calibri"/>
+              </a:rPr>
+              <a:t>BADM 225 · Chapter 9</a:t>
+            </a:r>
+          </a:p>
+        </p:txBody>
+      </p:sp>
+      <p:sp>
+        <p:nvSpPr>
+          <p:cNvPr id="4" name="TextBox 3" descr="Slide number 21"/>
+          <p:cNvSpPr txBox="1"/>
+          <p:nvPr/>
+        </p:nvSpPr>
+        <p:spPr>
+          <a:xfrm>
+            <a:off x="11247120" y="6446520"/>
+            <a:ext cx="640080" cy="320040"/>
+          </a:xfrm>
+          <a:prstGeom prst="rect">
+            <a:avLst/>
+          </a:prstGeom>
+          <a:noFill/>
+        </p:spPr>
+        <p:txBody>
+          <a:bodyPr wrap="none">
+            <a:spAutoFit/>
+          </a:bodyPr>
+          <a:lstStyle/>
+          <a:p>
+            <a:pPr algn="r"/>
+            <a:r>
+              <a:rPr sz="1000">
+                <a:solidFill>
+                  <a:srgbClr val="5E6B64"/>
+                </a:solidFill>
+                <a:latin typeface="Calibri"/>
+              </a:rPr>
+              <a:t>21</a:t>
+            </a:r>
+          </a:p>
+        </p:txBody>
+      </p:sp>
+      <p:sp>
+        <p:nvSpPr>
+          <p:cNvPr id="5" name="TextBox 4" descr="Key points"/>
+          <p:cNvSpPr txBox="1"/>
+          <p:nvPr/>
+        </p:nvSpPr>
+        <p:spPr>
+          <a:xfrm>
+            <a:off x="548640" y="1554480"/>
+            <a:ext cx="11064240" cy="4663440"/>
           </a:xfrm>
           <a:prstGeom prst="rect">
             <a:avLst/>
@@ -9626,160 +10310,137 @@
           <a:p>
             <a:pPr algn="l">
               <a:spcAft>
-                <a:spcPts val="1800"/>
+                <a:spcPts val="1200"/>
               </a:spcAft>
             </a:pPr>
             <a:r>
-              <a:rPr sz="1800" b="1">
-                <a:solidFill>
-                  <a:srgbClr val="C9931A"/>
-                </a:solidFill>
-                <a:latin typeface="Calibri"/>
-              </a:rPr>
-              <a:t>1.  </a:t>
-            </a:r>
-            <a:r>
-              <a:rPr sz="1800" b="0" i="0">
-                <a:solidFill>
-                  <a:srgbClr val="FFFFFF"/>
-                </a:solidFill>
-                <a:latin typeface="Calibri"/>
-              </a:rPr>
-              <a:t>Bring a real report and build its pyramid on one page: summit, reasons, orphans.</a:t>
+              <a:rPr sz="1700">
+                <a:solidFill>
+                  <a:srgbClr val="8A6410"/>
+                </a:solidFill>
+                <a:latin typeface="Calibri"/>
+              </a:rPr>
+              <a:t>▪  </a:t>
+            </a:r>
+            <a:r>
+              <a:rPr sz="1700" b="1">
+                <a:solidFill>
+                  <a:srgbClr val="0E4D33"/>
+                </a:solidFill>
+                <a:latin typeface="Calibri"/>
+              </a:rPr>
+              <a:t>Interviews: prepare five questions, ask three,  </a:t>
+            </a:r>
+            <a:r>
+              <a:rPr sz="1700" b="0" i="0">
+                <a:solidFill>
+                  <a:srgbClr val="212A26"/>
+                </a:solidFill>
+                <a:latin typeface="Calibri"/>
+              </a:rPr>
+              <a:t>and spend the savings listening (Chapter 1) — the best material is behind the follow-up, not the script.</a:t>
             </a:r>
           </a:p>
           <a:p>
             <a:pPr algn="l">
               <a:spcAft>
-                <a:spcPts val="1800"/>
+                <a:spcPts val="1200"/>
               </a:spcAft>
             </a:pPr>
             <a:r>
-              <a:rPr sz="1800" b="1">
-                <a:solidFill>
-                  <a:srgbClr val="C9931A"/>
-                </a:solidFill>
-                <a:latin typeface="Calibri"/>
-              </a:rPr>
-              <a:t>2.  </a:t>
-            </a:r>
-            <a:r>
-              <a:rPr sz="1800" b="0" i="0">
-                <a:solidFill>
-                  <a:srgbClr val="FFFFFF"/>
-                </a:solidFill>
-                <a:latin typeface="Calibri"/>
-              </a:rPr>
-              <a:t>Why do organizations reward the reporting behaviors they claim to hate? Locate the incentive.</a:t>
+              <a:rPr sz="1700">
+                <a:solidFill>
+                  <a:srgbClr val="8A6410"/>
+                </a:solidFill>
+                <a:latin typeface="Calibri"/>
+              </a:rPr>
+              <a:t>▪  </a:t>
+            </a:r>
+            <a:r>
+              <a:rPr sz="1700" b="1">
+                <a:solidFill>
+                  <a:srgbClr val="0E4D33"/>
+                </a:solidFill>
+                <a:latin typeface="Calibri"/>
+              </a:rPr>
+              <a:t>Ask for stories, not opinions.  </a:t>
+            </a:r>
+            <a:r>
+              <a:rPr sz="1700" b="0" i="0">
+                <a:solidFill>
+                  <a:srgbClr val="212A26"/>
+                </a:solidFill>
+                <a:latin typeface="Calibri"/>
+              </a:rPr>
+              <a:t>'Walk me through the last time intake backed up' yields facts; 'do you think intake is slow?' yields politics.</a:t>
             </a:r>
           </a:p>
           <a:p>
             <a:pPr algn="l">
               <a:spcAft>
-                <a:spcPts val="1800"/>
+                <a:spcPts val="1200"/>
               </a:spcAft>
             </a:pPr>
             <a:r>
-              <a:rPr sz="1800" b="1">
-                <a:solidFill>
-                  <a:srgbClr val="C9931A"/>
-                </a:solidFill>
-                <a:latin typeface="Calibri"/>
-              </a:rPr>
-              <a:t>3.  </a:t>
-            </a:r>
-            <a:r>
-              <a:rPr sz="1800" b="0" i="0">
-                <a:solidFill>
-                  <a:srgbClr val="FFFFFF"/>
-                </a:solidFill>
-                <a:latin typeface="Calibri"/>
-              </a:rPr>
-              <a:t>Defend or attack: the one-page report is harder and more senior than the twelve-page report.</a:t>
+              <a:rPr sz="1700">
+                <a:solidFill>
+                  <a:srgbClr val="8A6410"/>
+                </a:solidFill>
+                <a:latin typeface="Calibri"/>
+              </a:rPr>
+              <a:t>▪  </a:t>
+            </a:r>
+            <a:r>
+              <a:rPr sz="1700" b="1">
+                <a:solidFill>
+                  <a:srgbClr val="0E4D33"/>
+                </a:solidFill>
+                <a:latin typeface="Calibri"/>
+              </a:rPr>
+              <a:t>Surveys: every question you add cuts completion.  </a:t>
+            </a:r>
+            <a:r>
+              <a:rPr sz="1700" b="0" i="0">
+                <a:solidFill>
+                  <a:srgbClr val="212A26"/>
+                </a:solidFill>
+                <a:latin typeface="Calibri"/>
+              </a:rPr>
+              <a:t>Five questions, one open-ended, mobile-friendly — and pilot it on two people before sending to two hundred.</a:t>
             </a:r>
           </a:p>
           <a:p>
             <a:pPr algn="l">
               <a:spcAft>
-                <a:spcPts val="1800"/>
+                <a:spcPts val="1200"/>
               </a:spcAft>
             </a:pPr>
             <a:r>
-              <a:rPr sz="1800" b="1">
-                <a:solidFill>
-                  <a:srgbClr val="C9931A"/>
-                </a:solidFill>
-                <a:latin typeface="Calibri"/>
-              </a:rPr>
-              <a:t>4.  </a:t>
-            </a:r>
-            <a:r>
-              <a:rPr sz="1800" b="0" i="0">
-                <a:solidFill>
-                  <a:srgbClr val="FFFFFF"/>
-                </a:solidFill>
-                <a:latin typeface="Calibri"/>
-              </a:rPr>
-              <a:t>Design a definition of “green” that a judgment call cannot stretch.</a:t>
-            </a:r>
-          </a:p>
-          <a:p>
-            <a:pPr algn="l">
-              <a:spcAft>
-                <a:spcPts val="1800"/>
-              </a:spcAft>
-            </a:pPr>
-            <a:r>
-              <a:rPr sz="1800" b="1">
-                <a:solidFill>
-                  <a:srgbClr val="C9931A"/>
-                </a:solidFill>
-                <a:latin typeface="Calibri"/>
-              </a:rPr>
-              <a:t>5.  </a:t>
-            </a:r>
-            <a:r>
-              <a:rPr sz="1800" b="0" i="0">
-                <a:solidFill>
-                  <a:srgbClr val="FFFFFF"/>
-                </a:solidFill>
-                <a:latin typeface="Calibri"/>
-              </a:rPr>
-              <a:t>Find a misleading-but-true chart in the wild; name the mechanism and rebuild it honestly.</a:t>
-            </a:r>
-          </a:p>
-        </p:txBody>
-      </p:sp>
-      <p:sp>
-        <p:nvSpPr>
-          <p:cNvPr id="4" name="TextBox 3" descr="Footer"/>
-          <p:cNvSpPr txBox="1"/>
-          <p:nvPr/>
-        </p:nvSpPr>
-        <p:spPr>
-          <a:xfrm>
-            <a:off x="502920" y="6446520"/>
-            <a:ext cx="5486400" cy="320040"/>
-          </a:xfrm>
-          <a:prstGeom prst="rect">
-            <a:avLst/>
-          </a:prstGeom>
-          <a:noFill/>
-        </p:spPr>
-        <p:txBody>
-          <a:bodyPr wrap="none">
-            <a:spAutoFit/>
-          </a:bodyPr>
-          <a:lstStyle/>
-          <a:p>
-            <a:r>
-              <a:rPr sz="1000">
-                <a:solidFill>
-                  <a:srgbClr val="A8C4B2"/>
-                </a:solidFill>
-                <a:latin typeface="Calibri"/>
-              </a:rPr>
-              <a:t>BADM 225 · Chapter 9</a:t>
+              <a:rPr sz="1700">
+                <a:solidFill>
+                  <a:srgbClr val="8A6410"/>
+                </a:solidFill>
+                <a:latin typeface="Calibri"/>
+              </a:rPr>
+              <a:t>▪  </a:t>
+            </a:r>
+            <a:r>
+              <a:rPr sz="1700" b="1">
+                <a:solidFill>
+                  <a:srgbClr val="0E4D33"/>
+                </a:solidFill>
+                <a:latin typeface="Calibri"/>
+              </a:rPr>
+              <a:t>Report the denominator, always.  </a:t>
+            </a:r>
+            <a:r>
+              <a:rPr sz="1700" b="0" i="0">
+                <a:solidFill>
+                  <a:srgbClr val="212A26"/>
+                </a:solidFill>
+                <a:latin typeface="Calibri"/>
+              </a:rPr>
+              <a:t>'80% of respondents' means nothing without '…of the 10 who answered, from 200 asked' — hiding the response rate is selection bias in a costume.</a:t>
             </a:r>
           </a:p>
         </p:txBody>
@@ -9812,7 +10473,7 @@
       <p:grpSpPr/>
       <p:sp>
         <p:nvSpPr>
-          <p:cNvPr id="2" name="Title 1" descr="Slide title: Your next steps"/>
+          <p:cNvPr id="2" name="Title 1" descr="Slide title: Keep the evidence trail"/>
           <p:cNvSpPr>
             <a:spLocks noGrp="1"/>
           </p:cNvSpPr>
@@ -9838,7 +10499,7 @@
                 </a:solidFill>
                 <a:latin typeface="Cambria"/>
               </a:rPr>
-              <a:t>Your next steps</a:t>
+              <a:t>Keep the evidence trail</a:t>
             </a:r>
           </a:p>
         </p:txBody>
@@ -9955,7 +10616,7 @@
                 </a:solidFill>
                 <a:latin typeface="Calibri"/>
               </a:rPr>
-              <a:t>Practice:  </a:t>
+              <a:t>Every claim in the report should be traceable  </a:t>
             </a:r>
             <a:r>
               <a:rPr sz="1700" b="0" i="0">
@@ -9964,7 +10625,7 @@
                 </a:solidFill>
                 <a:latin typeface="Calibri"/>
               </a:rPr>
-              <a:t>Course site → Chapter 9 → Practice questions (instant feedback, unlimited tries).</a:t>
+              <a:t>to a file, a dataset, an interview note — by you, six months later, under hostile questioning.</a:t>
             </a:r>
           </a:p>
           <a:p>
@@ -9989,7 +10650,7 @@
                 </a:solidFill>
                 <a:latin typeface="Calibri"/>
               </a:rPr>
-              <a:t>Graded:  </a:t>
+              <a:t>Keep a sources appendix as you work,  </a:t>
             </a:r>
             <a:r>
               <a:rPr sz="1700" b="0" i="0">
@@ -9998,7 +10659,7 @@
                 </a:solidFill>
                 <a:latin typeface="Calibri"/>
               </a:rPr>
-              <a:t>Complete the Chapter 9 homework on the site; paste your completion code into the Blackboard assignment before the weekly deadline.</a:t>
+              <a:t>not after: one line per source — what it is, where it lives, what it supports.</a:t>
             </a:r>
           </a:p>
           <a:p>
@@ -10023,7 +10684,7 @@
                 </a:solidFill>
                 <a:latin typeface="Calibri"/>
               </a:rPr>
-              <a:t>Apply:  </a:t>
+              <a:t>Screenshots and exports age better than links.  </a:t>
             </a:r>
             <a:r>
               <a:rPr sz="1700" b="0" i="0">
@@ -10032,7 +10693,7 @@
                 </a:solidFill>
                 <a:latin typeface="Calibri"/>
               </a:rPr>
-              <a:t>Your market-research assignment's sections are a pyramid scaffold — this chapter is its manual.</a:t>
+              <a:t>The dashboard will change; your report's exhibit shouldn't.</a:t>
             </a:r>
           </a:p>
           <a:p>
@@ -10057,7 +10718,7 @@
                 </a:solidFill>
                 <a:latin typeface="Calibri"/>
               </a:rPr>
-              <a:t>Read:  </a:t>
+              <a:t>The trail is also your protection:  </a:t>
             </a:r>
             <a:r>
               <a:rPr sz="1700" b="0" i="0">
@@ -10066,9 +10727,965 @@
                 </a:solidFill>
                 <a:latin typeface="Calibri"/>
               </a:rPr>
-              <a:t>The Chapter 9 Study Guide — the full workshop, templates, and both cases.</a:t>
-            </a:r>
-          </a:p>
+              <a:t>when the recommendation is challenged, 'here's the export, here's the method' ends arguments that 'I'm pretty sure' starts.</a:t>
+            </a:r>
+          </a:p>
+        </p:txBody>
+      </p:sp>
+    </p:spTree>
+  </p:cSld>
+  <p:clrMapOvr>
+    <a:masterClrMapping/>
+  </p:clrMapOvr>
+</p:sld>
+</file>
+
+<file path=ppt/slides/slide23.xml><?xml version="1.0" encoding="utf-8"?>
+<p:sld xmlns:a="http://schemas.openxmlformats.org/drawingml/2006/main" xmlns:p="http://schemas.openxmlformats.org/presentationml/2006/main" xmlns:r="http://schemas.openxmlformats.org/officeDocument/2006/relationships">
+  <p:cSld>
+    <p:bg>
+      <p:bgPr>
+        <a:solidFill>
+          <a:srgbClr val="0E4D33"/>
+        </a:solidFill>
+        <a:effectLst/>
+      </p:bgPr>
+    </p:bg>
+    <p:spTree>
+      <p:nvGrpSpPr>
+        <p:cNvPr id="1" name=""/>
+        <p:cNvGrpSpPr/>
+        <p:nvPr/>
+      </p:nvGrpSpPr>
+      <p:grpSpPr/>
+      <p:sp>
+        <p:nvSpPr>
+          <p:cNvPr id="2" name="Title 1" descr="Slide title: Containers and delivery"/>
+          <p:cNvSpPr>
+            <a:spLocks noGrp="1"/>
+          </p:cNvSpPr>
+          <p:nvPr>
+            <p:ph type="title"/>
+          </p:nvPr>
+        </p:nvSpPr>
+        <p:spPr>
+          <a:xfrm>
+            <a:off x="822960" y="2834640"/>
+            <a:ext cx="10515600" cy="914400"/>
+          </a:xfrm>
+        </p:spPr>
+        <p:txBody>
+          <a:bodyPr wrap="square"/>
+          <a:lstStyle/>
+          <a:p>
+            <a:pPr algn="l"/>
+            <a:r>
+              <a:rPr sz="4000" b="1">
+                <a:solidFill>
+                  <a:srgbClr val="FFFFFF"/>
+                </a:solidFill>
+                <a:latin typeface="Cambria"/>
+              </a:rPr>
+              <a:t>Containers and delivery</a:t>
+            </a:r>
+          </a:p>
+        </p:txBody>
+      </p:sp>
+      <p:sp>
+        <p:nvSpPr>
+          <p:cNvPr id="3" name="TextBox 2" descr="Section number 05"/>
+          <p:cNvSpPr txBox="1"/>
+          <p:nvPr/>
+        </p:nvSpPr>
+        <p:spPr>
+          <a:xfrm>
+            <a:off x="822960" y="1188720"/>
+            <a:ext cx="2743200" cy="1463040"/>
+          </a:xfrm>
+          <a:prstGeom prst="rect">
+            <a:avLst/>
+          </a:prstGeom>
+          <a:noFill/>
+        </p:spPr>
+        <p:txBody>
+          <a:bodyPr wrap="square">
+            <a:spAutoFit/>
+          </a:bodyPr>
+          <a:lstStyle/>
+          <a:p>
+            <a:pPr algn="l">
+              <a:spcAft>
+                <a:spcPts val="800"/>
+              </a:spcAft>
+            </a:pPr>
+            <a:r>
+              <a:rPr sz="8000" b="1" i="0">
+                <a:solidFill>
+                  <a:srgbClr val="C9931A"/>
+                </a:solidFill>
+                <a:latin typeface="Cambria"/>
+              </a:rPr>
+              <a:t>05</a:t>
+            </a:r>
+          </a:p>
+        </p:txBody>
+      </p:sp>
+      <p:sp>
+        <p:nvSpPr>
+          <p:cNvPr id="4" name="TextBox 3" descr="Section note"/>
+          <p:cNvSpPr txBox="1"/>
+          <p:nvPr/>
+        </p:nvSpPr>
+        <p:spPr>
+          <a:xfrm>
+            <a:off x="822960" y="4023360"/>
+            <a:ext cx="9601200" cy="1097280"/>
+          </a:xfrm>
+          <a:prstGeom prst="rect">
+            <a:avLst/>
+          </a:prstGeom>
+          <a:noFill/>
+        </p:spPr>
+        <p:txBody>
+          <a:bodyPr wrap="square">
+            <a:spAutoFit/>
+          </a:bodyPr>
+          <a:lstStyle/>
+          <a:p>
+            <a:pPr algn="l">
+              <a:spcAft>
+                <a:spcPts val="800"/>
+              </a:spcAft>
+            </a:pPr>
+            <a:r>
+              <a:rPr sz="1700" b="0" i="0">
+                <a:solidFill>
+                  <a:srgbClr val="EAF1EB"/>
+                </a:solidFill>
+                <a:latin typeface="Calibri"/>
+              </a:rPr>
+              <a:t>Same pyramid, four wrappers — pick by audience and afterlife.</a:t>
+            </a:r>
+          </a:p>
+        </p:txBody>
+      </p:sp>
+      <p:sp>
+        <p:nvSpPr>
+          <p:cNvPr id="5" name="TextBox 4" descr="Footer: BADM 225 · Chapter 9"/>
+          <p:cNvSpPr txBox="1"/>
+          <p:nvPr/>
+        </p:nvSpPr>
+        <p:spPr>
+          <a:xfrm>
+            <a:off x="502920" y="6446520"/>
+            <a:ext cx="5486400" cy="320040"/>
+          </a:xfrm>
+          <a:prstGeom prst="rect">
+            <a:avLst/>
+          </a:prstGeom>
+          <a:noFill/>
+        </p:spPr>
+        <p:txBody>
+          <a:bodyPr wrap="none">
+            <a:spAutoFit/>
+          </a:bodyPr>
+          <a:lstStyle/>
+          <a:p>
+            <a:r>
+              <a:rPr sz="1000">
+                <a:solidFill>
+                  <a:srgbClr val="5E6B64"/>
+                </a:solidFill>
+                <a:latin typeface="Calibri"/>
+              </a:rPr>
+              <a:t>BADM 225 · Chapter 9</a:t>
+            </a:r>
+          </a:p>
+        </p:txBody>
+      </p:sp>
+      <p:sp>
+        <p:nvSpPr>
+          <p:cNvPr id="6" name="TextBox 5" descr="Slide number 23"/>
+          <p:cNvSpPr txBox="1"/>
+          <p:nvPr/>
+        </p:nvSpPr>
+        <p:spPr>
+          <a:xfrm>
+            <a:off x="11247120" y="6446520"/>
+            <a:ext cx="640080" cy="320040"/>
+          </a:xfrm>
+          <a:prstGeom prst="rect">
+            <a:avLst/>
+          </a:prstGeom>
+          <a:noFill/>
+        </p:spPr>
+        <p:txBody>
+          <a:bodyPr wrap="none">
+            <a:spAutoFit/>
+          </a:bodyPr>
+          <a:lstStyle/>
+          <a:p>
+            <a:pPr algn="r"/>
+            <a:r>
+              <a:rPr sz="1000">
+                <a:solidFill>
+                  <a:srgbClr val="5E6B64"/>
+                </a:solidFill>
+                <a:latin typeface="Calibri"/>
+              </a:rPr>
+              <a:t>23</a:t>
+            </a:r>
+          </a:p>
+        </p:txBody>
+      </p:sp>
+    </p:spTree>
+  </p:cSld>
+  <p:clrMapOvr>
+    <a:masterClrMapping/>
+  </p:clrMapOvr>
+</p:sld>
+</file>
+
+<file path=ppt/slides/slide24.xml><?xml version="1.0" encoding="utf-8"?>
+<p:sld xmlns:a="http://schemas.openxmlformats.org/drawingml/2006/main" xmlns:p="http://schemas.openxmlformats.org/presentationml/2006/main" xmlns:r="http://schemas.openxmlformats.org/officeDocument/2006/relationships">
+  <p:cSld>
+    <p:bg>
+      <p:bgPr>
+        <a:solidFill>
+          <a:srgbClr val="FFFFFF"/>
+        </a:solidFill>
+        <a:effectLst/>
+      </p:bgPr>
+    </p:bg>
+    <p:spTree>
+      <p:nvGrpSpPr>
+        <p:cNvPr id="1" name=""/>
+        <p:cNvGrpSpPr/>
+        <p:nvPr/>
+      </p:nvGrpSpPr>
+      <p:grpSpPr/>
+      <p:sp>
+        <p:nvSpPr>
+          <p:cNvPr id="2" name="Title 1" descr="Slide title: The four containers"/>
+          <p:cNvSpPr>
+            <a:spLocks noGrp="1"/>
+          </p:cNvSpPr>
+          <p:nvPr>
+            <p:ph type="title"/>
+          </p:nvPr>
+        </p:nvSpPr>
+        <p:spPr>
+          <a:xfrm>
+            <a:off x="502920" y="411480"/>
+            <a:ext cx="11155680" cy="914400"/>
+          </a:xfrm>
+        </p:spPr>
+        <p:txBody>
+          <a:bodyPr wrap="square"/>
+          <a:lstStyle/>
+          <a:p>
+            <a:pPr algn="l"/>
+            <a:r>
+              <a:rPr sz="3200" b="1">
+                <a:solidFill>
+                  <a:srgbClr val="0E4D33"/>
+                </a:solidFill>
+                <a:latin typeface="Cambria"/>
+              </a:rPr>
+              <a:t>The four containers</a:t>
+            </a:r>
+          </a:p>
+        </p:txBody>
+      </p:sp>
+      <p:sp>
+        <p:nvSpPr>
+          <p:cNvPr id="3" name="TextBox 2" descr="Footer: BADM 225 · Chapter 9"/>
+          <p:cNvSpPr txBox="1"/>
+          <p:nvPr/>
+        </p:nvSpPr>
+        <p:spPr>
+          <a:xfrm>
+            <a:off x="502920" y="6446520"/>
+            <a:ext cx="5486400" cy="320040"/>
+          </a:xfrm>
+          <a:prstGeom prst="rect">
+            <a:avLst/>
+          </a:prstGeom>
+          <a:noFill/>
+        </p:spPr>
+        <p:txBody>
+          <a:bodyPr wrap="none">
+            <a:spAutoFit/>
+          </a:bodyPr>
+          <a:lstStyle/>
+          <a:p>
+            <a:r>
+              <a:rPr sz="1000">
+                <a:solidFill>
+                  <a:srgbClr val="5E6B64"/>
+                </a:solidFill>
+                <a:latin typeface="Calibri"/>
+              </a:rPr>
+              <a:t>BADM 225 · Chapter 9</a:t>
+            </a:r>
+          </a:p>
+        </p:txBody>
+      </p:sp>
+      <p:sp>
+        <p:nvSpPr>
+          <p:cNvPr id="4" name="TextBox 3" descr="Slide number 24"/>
+          <p:cNvSpPr txBox="1"/>
+          <p:nvPr/>
+        </p:nvSpPr>
+        <p:spPr>
+          <a:xfrm>
+            <a:off x="11247120" y="6446520"/>
+            <a:ext cx="640080" cy="320040"/>
+          </a:xfrm>
+          <a:prstGeom prst="rect">
+            <a:avLst/>
+          </a:prstGeom>
+          <a:noFill/>
+        </p:spPr>
+        <p:txBody>
+          <a:bodyPr wrap="none">
+            <a:spAutoFit/>
+          </a:bodyPr>
+          <a:lstStyle/>
+          <a:p>
+            <a:pPr algn="r"/>
+            <a:r>
+              <a:rPr sz="1000">
+                <a:solidFill>
+                  <a:srgbClr val="5E6B64"/>
+                </a:solidFill>
+                <a:latin typeface="Calibri"/>
+              </a:rPr>
+              <a:t>24</a:t>
+            </a:r>
+          </a:p>
+        </p:txBody>
+      </p:sp>
+      <p:sp>
+        <p:nvSpPr>
+          <p:cNvPr id="5" name="TextBox 4" descr="Context"/>
+          <p:cNvSpPr txBox="1"/>
+          <p:nvPr/>
+        </p:nvSpPr>
+        <p:spPr>
+          <a:xfrm>
+            <a:off x="548640" y="1417320"/>
+            <a:ext cx="10972800" cy="411480"/>
+          </a:xfrm>
+          <a:prstGeom prst="rect">
+            <a:avLst/>
+          </a:prstGeom>
+          <a:noFill/>
+        </p:spPr>
+        <p:txBody>
+          <a:bodyPr wrap="square">
+            <a:spAutoFit/>
+          </a:bodyPr>
+          <a:lstStyle/>
+          <a:p>
+            <a:pPr algn="l">
+              <a:spcAft>
+                <a:spcPts val="800"/>
+              </a:spcAft>
+            </a:pPr>
+            <a:r>
+              <a:rPr sz="1400" b="0" i="1">
+                <a:solidFill>
+                  <a:srgbClr val="5E6B64"/>
+                </a:solidFill>
+                <a:latin typeface="Calibri"/>
+              </a:rPr>
+              <a:t>The container changes the dress code, never the pyramid.</a:t>
+            </a:r>
+          </a:p>
+        </p:txBody>
+      </p:sp>
+      <p:sp>
+        <p:nvSpPr>
+          <p:cNvPr id="6" name="Oval 5" descr="The email report icon"/>
+          <p:cNvSpPr/>
+          <p:nvPr/>
+        </p:nvSpPr>
+        <p:spPr>
+          <a:xfrm>
+            <a:off x="640080" y="1975104"/>
+            <a:ext cx="566928" cy="566928"/>
+          </a:xfrm>
+          <a:prstGeom prst="ellipse">
+            <a:avLst/>
+          </a:prstGeom>
+          <a:solidFill>
+            <a:srgbClr val="0E4D33"/>
+          </a:solidFill>
+          <a:ln>
+            <a:noFill/>
+          </a:ln>
+          <a:effectLst/>
+        </p:spPr>
+        <p:style>
+          <a:lnRef idx="1">
+            <a:schemeClr val="accent1"/>
+          </a:lnRef>
+          <a:fillRef idx="3">
+            <a:schemeClr val="accent1"/>
+          </a:fillRef>
+          <a:effectRef idx="2">
+            <a:schemeClr val="accent1"/>
+          </a:effectRef>
+          <a:fontRef idx="minor">
+            <a:schemeClr val="lt1"/>
+          </a:fontRef>
+        </p:style>
+        <p:txBody>
+          <a:bodyPr rtlCol="0" anchor="ctr" lIns="0" rIns="0" tIns="0" bIns="0"/>
+          <a:lstStyle/>
+          <a:p>
+            <a:pPr algn="ctr"/>
+            <a:r>
+              <a:rPr sz="1600" b="1">
+                <a:solidFill>
+                  <a:srgbClr val="FFFFFF"/>
+                </a:solidFill>
+                <a:latin typeface="Calibri"/>
+              </a:rPr>
+              <a:t>✉</a:t>
+            </a:r>
+          </a:p>
+        </p:txBody>
+      </p:sp>
+      <p:sp>
+        <p:nvSpPr>
+          <p:cNvPr id="7" name="TextBox 6" descr="The email report"/>
+          <p:cNvSpPr txBox="1"/>
+          <p:nvPr/>
+        </p:nvSpPr>
+        <p:spPr>
+          <a:xfrm>
+            <a:off x="1417320" y="1920240"/>
+            <a:ext cx="10241280" cy="1078992"/>
+          </a:xfrm>
+          <a:prstGeom prst="rect">
+            <a:avLst/>
+          </a:prstGeom>
+          <a:noFill/>
+        </p:spPr>
+        <p:txBody>
+          <a:bodyPr wrap="square">
+            <a:spAutoFit/>
+          </a:bodyPr>
+          <a:lstStyle/>
+          <a:p>
+            <a:pPr algn="l">
+              <a:spcAft>
+                <a:spcPts val="200"/>
+              </a:spcAft>
+            </a:pPr>
+            <a:r>
+              <a:rPr sz="1650" b="1" i="0">
+                <a:solidFill>
+                  <a:srgbClr val="0E4D33"/>
+                </a:solidFill>
+                <a:latin typeface="Cambria"/>
+              </a:rPr>
+              <a:t>The email report</a:t>
+            </a:r>
+          </a:p>
+          <a:p>
+            <a:pPr algn="l">
+              <a:spcAft>
+                <a:spcPts val="0"/>
+              </a:spcAft>
+            </a:pPr>
+            <a:r>
+              <a:rPr sz="1550" b="0" i="0">
+                <a:solidFill>
+                  <a:srgbClr val="212A26"/>
+                </a:solidFill>
+                <a:latin typeface="Calibri"/>
+              </a:rPr>
+              <a:t>Short, internal, time-stamped — the status update and quick findings live here. Dies with the thread.</a:t>
+            </a:r>
+          </a:p>
+        </p:txBody>
+      </p:sp>
+      <p:sp>
+        <p:nvSpPr>
+          <p:cNvPr id="8" name="Oval 7" descr="The memo report icon"/>
+          <p:cNvSpPr/>
+          <p:nvPr/>
+        </p:nvSpPr>
+        <p:spPr>
+          <a:xfrm>
+            <a:off x="640080" y="3163824"/>
+            <a:ext cx="566928" cy="566928"/>
+          </a:xfrm>
+          <a:prstGeom prst="ellipse">
+            <a:avLst/>
+          </a:prstGeom>
+          <a:solidFill>
+            <a:srgbClr val="0E4D33"/>
+          </a:solidFill>
+          <a:ln>
+            <a:noFill/>
+          </a:ln>
+          <a:effectLst/>
+        </p:spPr>
+        <p:style>
+          <a:lnRef idx="1">
+            <a:schemeClr val="accent1"/>
+          </a:lnRef>
+          <a:fillRef idx="3">
+            <a:schemeClr val="accent1"/>
+          </a:fillRef>
+          <a:effectRef idx="2">
+            <a:schemeClr val="accent1"/>
+          </a:effectRef>
+          <a:fontRef idx="minor">
+            <a:schemeClr val="lt1"/>
+          </a:fontRef>
+        </p:style>
+        <p:txBody>
+          <a:bodyPr rtlCol="0" anchor="ctr" lIns="0" rIns="0" tIns="0" bIns="0"/>
+          <a:lstStyle/>
+          <a:p>
+            <a:pPr algn="ctr"/>
+            <a:r>
+              <a:rPr sz="1600" b="1">
+                <a:solidFill>
+                  <a:srgbClr val="FFFFFF"/>
+                </a:solidFill>
+                <a:latin typeface="Calibri"/>
+              </a:rPr>
+              <a:t>📄</a:t>
+            </a:r>
+          </a:p>
+        </p:txBody>
+      </p:sp>
+      <p:sp>
+        <p:nvSpPr>
+          <p:cNvPr id="9" name="TextBox 8" descr="The memo report"/>
+          <p:cNvSpPr txBox="1"/>
+          <p:nvPr/>
+        </p:nvSpPr>
+        <p:spPr>
+          <a:xfrm>
+            <a:off x="1417320" y="3108960"/>
+            <a:ext cx="10241280" cy="1078992"/>
+          </a:xfrm>
+          <a:prstGeom prst="rect">
+            <a:avLst/>
+          </a:prstGeom>
+          <a:noFill/>
+        </p:spPr>
+        <p:txBody>
+          <a:bodyPr wrap="square">
+            <a:spAutoFit/>
+          </a:bodyPr>
+          <a:lstStyle/>
+          <a:p>
+            <a:pPr algn="l">
+              <a:spcAft>
+                <a:spcPts val="200"/>
+              </a:spcAft>
+            </a:pPr>
+            <a:r>
+              <a:rPr sz="1650" b="1" i="0">
+                <a:solidFill>
+                  <a:srgbClr val="0E4D33"/>
+                </a:solidFill>
+                <a:latin typeface="Cambria"/>
+              </a:rPr>
+              <a:t>The memo report</a:t>
+            </a:r>
+          </a:p>
+          <a:p>
+            <a:pPr algn="l">
+              <a:spcAft>
+                <a:spcPts val="0"/>
+              </a:spcAft>
+            </a:pPr>
+            <a:r>
+              <a:rPr sz="1550" b="0" i="0">
+                <a:solidFill>
+                  <a:srgbClr val="212A26"/>
+                </a:solidFill>
+                <a:latin typeface="Calibri"/>
+              </a:rPr>
+              <a:t>Internal, 1–5 pages, headed sections — the workhorse for anything that gets filed or forwarded.</a:t>
+            </a:r>
+          </a:p>
+        </p:txBody>
+      </p:sp>
+      <p:sp>
+        <p:nvSpPr>
+          <p:cNvPr id="10" name="Oval 9" descr="The letter report icon"/>
+          <p:cNvSpPr/>
+          <p:nvPr/>
+        </p:nvSpPr>
+        <p:spPr>
+          <a:xfrm>
+            <a:off x="640080" y="4352544"/>
+            <a:ext cx="566928" cy="566928"/>
+          </a:xfrm>
+          <a:prstGeom prst="ellipse">
+            <a:avLst/>
+          </a:prstGeom>
+          <a:solidFill>
+            <a:srgbClr val="0E4D33"/>
+          </a:solidFill>
+          <a:ln>
+            <a:noFill/>
+          </a:ln>
+          <a:effectLst/>
+        </p:spPr>
+        <p:style>
+          <a:lnRef idx="1">
+            <a:schemeClr val="accent1"/>
+          </a:lnRef>
+          <a:fillRef idx="3">
+            <a:schemeClr val="accent1"/>
+          </a:fillRef>
+          <a:effectRef idx="2">
+            <a:schemeClr val="accent1"/>
+          </a:effectRef>
+          <a:fontRef idx="minor">
+            <a:schemeClr val="lt1"/>
+          </a:fontRef>
+        </p:style>
+        <p:txBody>
+          <a:bodyPr rtlCol="0" anchor="ctr" lIns="0" rIns="0" tIns="0" bIns="0"/>
+          <a:lstStyle/>
+          <a:p>
+            <a:pPr algn="ctr"/>
+            <a:r>
+              <a:rPr sz="1600" b="1">
+                <a:solidFill>
+                  <a:srgbClr val="FFFFFF"/>
+                </a:solidFill>
+                <a:latin typeface="Calibri"/>
+              </a:rPr>
+              <a:t>🏛</a:t>
+            </a:r>
+          </a:p>
+        </p:txBody>
+      </p:sp>
+      <p:sp>
+        <p:nvSpPr>
+          <p:cNvPr id="11" name="TextBox 10" descr="The letter report"/>
+          <p:cNvSpPr txBox="1"/>
+          <p:nvPr/>
+        </p:nvSpPr>
+        <p:spPr>
+          <a:xfrm>
+            <a:off x="1417320" y="4297680"/>
+            <a:ext cx="10241280" cy="1078992"/>
+          </a:xfrm>
+          <a:prstGeom prst="rect">
+            <a:avLst/>
+          </a:prstGeom>
+          <a:noFill/>
+        </p:spPr>
+        <p:txBody>
+          <a:bodyPr wrap="square">
+            <a:spAutoFit/>
+          </a:bodyPr>
+          <a:lstStyle/>
+          <a:p>
+            <a:pPr algn="l">
+              <a:spcAft>
+                <a:spcPts val="200"/>
+              </a:spcAft>
+            </a:pPr>
+            <a:r>
+              <a:rPr sz="1650" b="1" i="0">
+                <a:solidFill>
+                  <a:srgbClr val="0E4D33"/>
+                </a:solidFill>
+                <a:latin typeface="Cambria"/>
+              </a:rPr>
+              <a:t>The letter report</a:t>
+            </a:r>
+          </a:p>
+          <a:p>
+            <a:pPr algn="l">
+              <a:spcAft>
+                <a:spcPts val="0"/>
+              </a:spcAft>
+            </a:pPr>
+            <a:r>
+              <a:rPr sz="1550" b="0" i="0">
+                <a:solidFill>
+                  <a:srgbClr val="212A26"/>
+                </a:solidFill>
+                <a:latin typeface="Calibri"/>
+              </a:rPr>
+              <a:t>Short report to an EXTERNAL reader on letterhead — consultant findings, inspection results (Chapter 6's letter rules apply).</a:t>
+            </a:r>
+          </a:p>
+        </p:txBody>
+      </p:sp>
+      <p:sp>
+        <p:nvSpPr>
+          <p:cNvPr id="12" name="Oval 11" descr="The slide-doc icon"/>
+          <p:cNvSpPr/>
+          <p:nvPr/>
+        </p:nvSpPr>
+        <p:spPr>
+          <a:xfrm>
+            <a:off x="640080" y="5541264"/>
+            <a:ext cx="566928" cy="566928"/>
+          </a:xfrm>
+          <a:prstGeom prst="ellipse">
+            <a:avLst/>
+          </a:prstGeom>
+          <a:solidFill>
+            <a:srgbClr val="0E4D33"/>
+          </a:solidFill>
+          <a:ln>
+            <a:noFill/>
+          </a:ln>
+          <a:effectLst/>
+        </p:spPr>
+        <p:style>
+          <a:lnRef idx="1">
+            <a:schemeClr val="accent1"/>
+          </a:lnRef>
+          <a:fillRef idx="3">
+            <a:schemeClr val="accent1"/>
+          </a:fillRef>
+          <a:effectRef idx="2">
+            <a:schemeClr val="accent1"/>
+          </a:effectRef>
+          <a:fontRef idx="minor">
+            <a:schemeClr val="lt1"/>
+          </a:fontRef>
+        </p:style>
+        <p:txBody>
+          <a:bodyPr rtlCol="0" anchor="ctr" lIns="0" rIns="0" tIns="0" bIns="0"/>
+          <a:lstStyle/>
+          <a:p>
+            <a:pPr algn="ctr"/>
+            <a:r>
+              <a:rPr sz="1600" b="1">
+                <a:solidFill>
+                  <a:srgbClr val="FFFFFF"/>
+                </a:solidFill>
+                <a:latin typeface="Calibri"/>
+              </a:rPr>
+              <a:t>🖥</a:t>
+            </a:r>
+          </a:p>
+        </p:txBody>
+      </p:sp>
+      <p:sp>
+        <p:nvSpPr>
+          <p:cNvPr id="13" name="TextBox 12" descr="The slide-doc"/>
+          <p:cNvSpPr txBox="1"/>
+          <p:nvPr/>
+        </p:nvSpPr>
+        <p:spPr>
+          <a:xfrm>
+            <a:off x="1417320" y="5486400"/>
+            <a:ext cx="10241280" cy="1078992"/>
+          </a:xfrm>
+          <a:prstGeom prst="rect">
+            <a:avLst/>
+          </a:prstGeom>
+          <a:noFill/>
+        </p:spPr>
+        <p:txBody>
+          <a:bodyPr wrap="square">
+            <a:spAutoFit/>
+          </a:bodyPr>
+          <a:lstStyle/>
+          <a:p>
+            <a:pPr algn="l">
+              <a:spcAft>
+                <a:spcPts val="200"/>
+              </a:spcAft>
+            </a:pPr>
+            <a:r>
+              <a:rPr sz="1650" b="1" i="0">
+                <a:solidFill>
+                  <a:srgbClr val="0E4D33"/>
+                </a:solidFill>
+                <a:latin typeface="Cambria"/>
+              </a:rPr>
+              <a:t>The slide-doc</a:t>
+            </a:r>
+          </a:p>
+          <a:p>
+            <a:pPr algn="l">
+              <a:spcAft>
+                <a:spcPts val="0"/>
+              </a:spcAft>
+            </a:pPr>
+            <a:r>
+              <a:rPr sz="1550" b="0" i="0">
+                <a:solidFill>
+                  <a:srgbClr val="212A26"/>
+                </a:solidFill>
+                <a:latin typeface="Calibri"/>
+              </a:rPr>
+              <a:t>Sections become slides, read not presented — executive-friendly, but every slide needs a takeaway title or it's just a thin report in landscape.</a:t>
+            </a:r>
+          </a:p>
+        </p:txBody>
+      </p:sp>
+    </p:spTree>
+  </p:cSld>
+  <p:clrMapOvr>
+    <a:masterClrMapping/>
+  </p:clrMapOvr>
+</p:sld>
+</file>
+
+<file path=ppt/slides/slide25.xml><?xml version="1.0" encoding="utf-8"?>
+<p:sld xmlns:a="http://schemas.openxmlformats.org/drawingml/2006/main" xmlns:p="http://schemas.openxmlformats.org/presentationml/2006/main" xmlns:r="http://schemas.openxmlformats.org/officeDocument/2006/relationships">
+  <p:cSld>
+    <p:bg>
+      <p:bgPr>
+        <a:solidFill>
+          <a:srgbClr val="FFFFFF"/>
+        </a:solidFill>
+        <a:effectLst/>
+      </p:bgPr>
+    </p:bg>
+    <p:spTree>
+      <p:nvGrpSpPr>
+        <p:cNvPr id="1" name=""/>
+        <p:cNvGrpSpPr/>
+        <p:nvPr/>
+      </p:nvGrpSpPr>
+      <p:grpSpPr/>
+      <p:sp>
+        <p:nvSpPr>
+          <p:cNvPr id="2" name="Title 1" descr="Slide title: When the report IS the email"/>
+          <p:cNvSpPr>
+            <a:spLocks noGrp="1"/>
+          </p:cNvSpPr>
+          <p:nvPr>
+            <p:ph type="title"/>
+          </p:nvPr>
+        </p:nvSpPr>
+        <p:spPr>
+          <a:xfrm>
+            <a:off x="502920" y="411480"/>
+            <a:ext cx="11155680" cy="914400"/>
+          </a:xfrm>
+        </p:spPr>
+        <p:txBody>
+          <a:bodyPr wrap="square"/>
+          <a:lstStyle/>
+          <a:p>
+            <a:pPr algn="l"/>
+            <a:r>
+              <a:rPr sz="3200" b="1">
+                <a:solidFill>
+                  <a:srgbClr val="0E4D33"/>
+                </a:solidFill>
+                <a:latin typeface="Cambria"/>
+              </a:rPr>
+              <a:t>When the report IS the email</a:t>
+            </a:r>
+          </a:p>
+        </p:txBody>
+      </p:sp>
+      <p:sp>
+        <p:nvSpPr>
+          <p:cNvPr id="3" name="TextBox 2" descr="Footer: BADM 225 · Chapter 9"/>
+          <p:cNvSpPr txBox="1"/>
+          <p:nvPr/>
+        </p:nvSpPr>
+        <p:spPr>
+          <a:xfrm>
+            <a:off x="502920" y="6446520"/>
+            <a:ext cx="5486400" cy="320040"/>
+          </a:xfrm>
+          <a:prstGeom prst="rect">
+            <a:avLst/>
+          </a:prstGeom>
+          <a:noFill/>
+        </p:spPr>
+        <p:txBody>
+          <a:bodyPr wrap="none">
+            <a:spAutoFit/>
+          </a:bodyPr>
+          <a:lstStyle/>
+          <a:p>
+            <a:r>
+              <a:rPr sz="1000">
+                <a:solidFill>
+                  <a:srgbClr val="5E6B64"/>
+                </a:solidFill>
+                <a:latin typeface="Calibri"/>
+              </a:rPr>
+              <a:t>BADM 225 · Chapter 9</a:t>
+            </a:r>
+          </a:p>
+        </p:txBody>
+      </p:sp>
+      <p:sp>
+        <p:nvSpPr>
+          <p:cNvPr id="4" name="TextBox 3" descr="Slide number 25"/>
+          <p:cNvSpPr txBox="1"/>
+          <p:nvPr/>
+        </p:nvSpPr>
+        <p:spPr>
+          <a:xfrm>
+            <a:off x="11247120" y="6446520"/>
+            <a:ext cx="640080" cy="320040"/>
+          </a:xfrm>
+          <a:prstGeom prst="rect">
+            <a:avLst/>
+          </a:prstGeom>
+          <a:noFill/>
+        </p:spPr>
+        <p:txBody>
+          <a:bodyPr wrap="none">
+            <a:spAutoFit/>
+          </a:bodyPr>
+          <a:lstStyle/>
+          <a:p>
+            <a:pPr algn="r"/>
+            <a:r>
+              <a:rPr sz="1000">
+                <a:solidFill>
+                  <a:srgbClr val="5E6B64"/>
+                </a:solidFill>
+                <a:latin typeface="Calibri"/>
+              </a:rPr>
+              <a:t>25</a:t>
+            </a:r>
+          </a:p>
+        </p:txBody>
+      </p:sp>
+      <p:sp>
+        <p:nvSpPr>
+          <p:cNvPr id="5" name="TextBox 4" descr="Key points"/>
+          <p:cNvSpPr txBox="1"/>
+          <p:nvPr/>
+        </p:nvSpPr>
+        <p:spPr>
+          <a:xfrm>
+            <a:off x="548640" y="1554480"/>
+            <a:ext cx="11064240" cy="4663440"/>
+          </a:xfrm>
+          <a:prstGeom prst="rect">
+            <a:avLst/>
+          </a:prstGeom>
+          <a:noFill/>
+        </p:spPr>
+        <p:txBody>
+          <a:bodyPr wrap="square">
+            <a:spAutoFit/>
+          </a:bodyPr>
+          <a:lstStyle/>
           <a:p>
             <a:pPr algn="l">
               <a:spcAft>
@@ -10091,7 +11708,7 @@
                 </a:solidFill>
                 <a:latin typeface="Calibri"/>
               </a:rPr>
-              <a:t>Coming next:  </a:t>
+              <a:t>Under a page? Don't attach it.  </a:t>
             </a:r>
             <a:r>
               <a:rPr sz="1700" b="0" i="0">
@@ -10100,7 +11717,1910 @@
                 </a:solidFill>
                 <a:latin typeface="Calibri"/>
               </a:rPr>
-              <a:t>Chapter 10 — proposals and formal reports: the upgrade kit for the same engine.</a:t>
+              <a:t>An attached one-pager is a click that half the readers won't spend — the body of the email is prime real estate.</a:t>
+            </a:r>
+          </a:p>
+          <a:p>
+            <a:pPr algn="l">
+              <a:spcAft>
+                <a:spcPts val="1200"/>
+              </a:spcAft>
+            </a:pPr>
+            <a:r>
+              <a:rPr sz="1700">
+                <a:solidFill>
+                  <a:srgbClr val="8A6410"/>
+                </a:solidFill>
+                <a:latin typeface="Calibri"/>
+              </a:rPr>
+              <a:t>▪  </a:t>
+            </a:r>
+            <a:r>
+              <a:rPr sz="1700" b="1">
+                <a:solidFill>
+                  <a:srgbClr val="0E4D33"/>
+                </a:solidFill>
+                <a:latin typeface="Calibri"/>
+              </a:rPr>
+              <a:t>Subject line = status line:  </a:t>
+            </a:r>
+            <a:r>
+              <a:rPr sz="1700" b="0" i="0">
+                <a:solidFill>
+                  <a:srgbClr val="212A26"/>
+                </a:solidFill>
+                <a:latin typeface="Calibri"/>
+              </a:rPr>
+              <a:t>'Migration report: on track, one yellow (vendor cert, fix by 7/20)' — the report's summit, in the inbox list view.</a:t>
+            </a:r>
+          </a:p>
+          <a:p>
+            <a:pPr algn="l">
+              <a:spcAft>
+                <a:spcPts val="1200"/>
+              </a:spcAft>
+            </a:pPr>
+            <a:r>
+              <a:rPr sz="1700">
+                <a:solidFill>
+                  <a:srgbClr val="8A6410"/>
+                </a:solidFill>
+                <a:latin typeface="Calibri"/>
+              </a:rPr>
+              <a:t>▪  </a:t>
+            </a:r>
+            <a:r>
+              <a:rPr sz="1700" b="1">
+                <a:solidFill>
+                  <a:srgbClr val="0E4D33"/>
+                </a:solidFill>
+                <a:latin typeface="Calibri"/>
+              </a:rPr>
+              <a:t>Attachment threshold:  </a:t>
+            </a:r>
+            <a:r>
+              <a:rPr sz="1700" b="0" i="0">
+                <a:solidFill>
+                  <a:srgbClr val="212A26"/>
+                </a:solidFill>
+                <a:latin typeface="Calibri"/>
+              </a:rPr>
+              <a:t>past one page, or needing tables/exhibits, or destined for filing — attach, and make the email body the three-line transmittal.</a:t>
+            </a:r>
+          </a:p>
+          <a:p>
+            <a:pPr algn="l">
+              <a:spcAft>
+                <a:spcPts val="1200"/>
+              </a:spcAft>
+            </a:pPr>
+            <a:r>
+              <a:rPr sz="1700">
+                <a:solidFill>
+                  <a:srgbClr val="8A6410"/>
+                </a:solidFill>
+                <a:latin typeface="Calibri"/>
+              </a:rPr>
+              <a:t>▪  </a:t>
+            </a:r>
+            <a:r>
+              <a:rPr sz="1700" b="1">
+                <a:solidFill>
+                  <a:srgbClr val="0E4D33"/>
+                </a:solidFill>
+                <a:latin typeface="Calibri"/>
+              </a:rPr>
+              <a:t>Never make readers open a file to learn the verdict.  </a:t>
+            </a:r>
+            <a:r>
+              <a:rPr sz="1700" b="0" i="0">
+                <a:solidFill>
+                  <a:srgbClr val="212A26"/>
+                </a:solidFill>
+                <a:latin typeface="Calibri"/>
+              </a:rPr>
+              <a:t>The verdict travels in the body even when the evidence travels attached.</a:t>
+            </a:r>
+          </a:p>
+        </p:txBody>
+      </p:sp>
+    </p:spTree>
+  </p:cSld>
+  <p:clrMapOvr>
+    <a:masterClrMapping/>
+  </p:clrMapOvr>
+</p:sld>
+</file>
+
+<file path=ppt/slides/slide26.xml><?xml version="1.0" encoding="utf-8"?>
+<p:sld xmlns:a="http://schemas.openxmlformats.org/drawingml/2006/main" xmlns:p="http://schemas.openxmlformats.org/presentationml/2006/main" xmlns:r="http://schemas.openxmlformats.org/officeDocument/2006/relationships">
+  <p:cSld>
+    <p:bg>
+      <p:bgPr>
+        <a:solidFill>
+          <a:srgbClr val="0E4D33"/>
+        </a:solidFill>
+        <a:effectLst/>
+      </p:bgPr>
+    </p:bg>
+    <p:spTree>
+      <p:nvGrpSpPr>
+        <p:cNvPr id="1" name=""/>
+        <p:cNvGrpSpPr/>
+        <p:nvPr/>
+      </p:nvGrpSpPr>
+      <p:grpSpPr/>
+      <p:sp>
+        <p:nvSpPr>
+          <p:cNvPr id="2" name="Title 1" descr="Slide title: The analytical workhorses"/>
+          <p:cNvSpPr>
+            <a:spLocks noGrp="1"/>
+          </p:cNvSpPr>
+          <p:nvPr>
+            <p:ph type="title"/>
+          </p:nvPr>
+        </p:nvSpPr>
+        <p:spPr>
+          <a:xfrm>
+            <a:off x="822960" y="2834640"/>
+            <a:ext cx="10515600" cy="914400"/>
+          </a:xfrm>
+        </p:spPr>
+        <p:txBody>
+          <a:bodyPr wrap="square"/>
+          <a:lstStyle/>
+          <a:p>
+            <a:pPr algn="l"/>
+            <a:r>
+              <a:rPr sz="4000" b="1">
+                <a:solidFill>
+                  <a:srgbClr val="FFFFFF"/>
+                </a:solidFill>
+                <a:latin typeface="Cambria"/>
+              </a:rPr>
+              <a:t>The analytical workhorses</a:t>
+            </a:r>
+          </a:p>
+        </p:txBody>
+      </p:sp>
+      <p:sp>
+        <p:nvSpPr>
+          <p:cNvPr id="3" name="TextBox 2" descr="Section number 06"/>
+          <p:cNvSpPr txBox="1"/>
+          <p:nvPr/>
+        </p:nvSpPr>
+        <p:spPr>
+          <a:xfrm>
+            <a:off x="822960" y="1188720"/>
+            <a:ext cx="2743200" cy="1463040"/>
+          </a:xfrm>
+          <a:prstGeom prst="rect">
+            <a:avLst/>
+          </a:prstGeom>
+          <a:noFill/>
+        </p:spPr>
+        <p:txBody>
+          <a:bodyPr wrap="square">
+            <a:spAutoFit/>
+          </a:bodyPr>
+          <a:lstStyle/>
+          <a:p>
+            <a:pPr algn="l">
+              <a:spcAft>
+                <a:spcPts val="800"/>
+              </a:spcAft>
+            </a:pPr>
+            <a:r>
+              <a:rPr sz="8000" b="1" i="0">
+                <a:solidFill>
+                  <a:srgbClr val="C9931A"/>
+                </a:solidFill>
+                <a:latin typeface="Cambria"/>
+              </a:rPr>
+              <a:t>06</a:t>
+            </a:r>
+          </a:p>
+        </p:txBody>
+      </p:sp>
+      <p:sp>
+        <p:nvSpPr>
+          <p:cNvPr id="4" name="TextBox 3" descr="Section note"/>
+          <p:cNvSpPr txBox="1"/>
+          <p:nvPr/>
+        </p:nvSpPr>
+        <p:spPr>
+          <a:xfrm>
+            <a:off x="822960" y="4023360"/>
+            <a:ext cx="9601200" cy="1097280"/>
+          </a:xfrm>
+          <a:prstGeom prst="rect">
+            <a:avLst/>
+          </a:prstGeom>
+          <a:noFill/>
+        </p:spPr>
+        <p:txBody>
+          <a:bodyPr wrap="square">
+            <a:spAutoFit/>
+          </a:bodyPr>
+          <a:lstStyle/>
+          <a:p>
+            <a:pPr algn="l">
+              <a:spcAft>
+                <a:spcPts val="800"/>
+              </a:spcAft>
+            </a:pPr>
+            <a:r>
+              <a:rPr sz="1700" b="0" i="0">
+                <a:solidFill>
+                  <a:srgbClr val="EAF1EB"/>
+                </a:solidFill>
+                <a:latin typeface="Calibri"/>
+              </a:rPr>
+              <a:t>Justification, comparison, feasibility — the reports that end in a decision.</a:t>
+            </a:r>
+          </a:p>
+        </p:txBody>
+      </p:sp>
+      <p:sp>
+        <p:nvSpPr>
+          <p:cNvPr id="5" name="TextBox 4" descr="Footer: BADM 225 · Chapter 9"/>
+          <p:cNvSpPr txBox="1"/>
+          <p:nvPr/>
+        </p:nvSpPr>
+        <p:spPr>
+          <a:xfrm>
+            <a:off x="502920" y="6446520"/>
+            <a:ext cx="5486400" cy="320040"/>
+          </a:xfrm>
+          <a:prstGeom prst="rect">
+            <a:avLst/>
+          </a:prstGeom>
+          <a:noFill/>
+        </p:spPr>
+        <p:txBody>
+          <a:bodyPr wrap="none">
+            <a:spAutoFit/>
+          </a:bodyPr>
+          <a:lstStyle/>
+          <a:p>
+            <a:r>
+              <a:rPr sz="1000">
+                <a:solidFill>
+                  <a:srgbClr val="5E6B64"/>
+                </a:solidFill>
+                <a:latin typeface="Calibri"/>
+              </a:rPr>
+              <a:t>BADM 225 · Chapter 9</a:t>
+            </a:r>
+          </a:p>
+        </p:txBody>
+      </p:sp>
+      <p:sp>
+        <p:nvSpPr>
+          <p:cNvPr id="6" name="TextBox 5" descr="Slide number 26"/>
+          <p:cNvSpPr txBox="1"/>
+          <p:nvPr/>
+        </p:nvSpPr>
+        <p:spPr>
+          <a:xfrm>
+            <a:off x="11247120" y="6446520"/>
+            <a:ext cx="640080" cy="320040"/>
+          </a:xfrm>
+          <a:prstGeom prst="rect">
+            <a:avLst/>
+          </a:prstGeom>
+          <a:noFill/>
+        </p:spPr>
+        <p:txBody>
+          <a:bodyPr wrap="none">
+            <a:spAutoFit/>
+          </a:bodyPr>
+          <a:lstStyle/>
+          <a:p>
+            <a:pPr algn="r"/>
+            <a:r>
+              <a:rPr sz="1000">
+                <a:solidFill>
+                  <a:srgbClr val="5E6B64"/>
+                </a:solidFill>
+                <a:latin typeface="Calibri"/>
+              </a:rPr>
+              <a:t>26</a:t>
+            </a:r>
+          </a:p>
+        </p:txBody>
+      </p:sp>
+    </p:spTree>
+  </p:cSld>
+  <p:clrMapOvr>
+    <a:masterClrMapping/>
+  </p:clrMapOvr>
+</p:sld>
+</file>
+
+<file path=ppt/slides/slide27.xml><?xml version="1.0" encoding="utf-8"?>
+<p:sld xmlns:a="http://schemas.openxmlformats.org/drawingml/2006/main" xmlns:p="http://schemas.openxmlformats.org/presentationml/2006/main" xmlns:r="http://schemas.openxmlformats.org/officeDocument/2006/relationships">
+  <p:cSld>
+    <p:bg>
+      <p:bgPr>
+        <a:solidFill>
+          <a:srgbClr val="FFFFFF"/>
+        </a:solidFill>
+        <a:effectLst/>
+      </p:bgPr>
+    </p:bg>
+    <p:spTree>
+      <p:nvGrpSpPr>
+        <p:cNvPr id="1" name=""/>
+        <p:cNvGrpSpPr/>
+        <p:nvPr/>
+      </p:nvGrpSpPr>
+      <p:grpSpPr/>
+      <p:sp>
+        <p:nvSpPr>
+          <p:cNvPr id="2" name="Title 1" descr="Slide title: The justification report"/>
+          <p:cNvSpPr>
+            <a:spLocks noGrp="1"/>
+          </p:cNvSpPr>
+          <p:nvPr>
+            <p:ph type="title"/>
+          </p:nvPr>
+        </p:nvSpPr>
+        <p:spPr>
+          <a:xfrm>
+            <a:off x="502920" y="411480"/>
+            <a:ext cx="11155680" cy="914400"/>
+          </a:xfrm>
+        </p:spPr>
+        <p:txBody>
+          <a:bodyPr wrap="square"/>
+          <a:lstStyle/>
+          <a:p>
+            <a:pPr algn="l"/>
+            <a:r>
+              <a:rPr sz="3200" b="1">
+                <a:solidFill>
+                  <a:srgbClr val="0E4D33"/>
+                </a:solidFill>
+                <a:latin typeface="Cambria"/>
+              </a:rPr>
+              <a:t>The justification report</a:t>
+            </a:r>
+          </a:p>
+        </p:txBody>
+      </p:sp>
+      <p:sp>
+        <p:nvSpPr>
+          <p:cNvPr id="3" name="TextBox 2" descr="Footer: BADM 225 · Chapter 9"/>
+          <p:cNvSpPr txBox="1"/>
+          <p:nvPr/>
+        </p:nvSpPr>
+        <p:spPr>
+          <a:xfrm>
+            <a:off x="502920" y="6446520"/>
+            <a:ext cx="5486400" cy="320040"/>
+          </a:xfrm>
+          <a:prstGeom prst="rect">
+            <a:avLst/>
+          </a:prstGeom>
+          <a:noFill/>
+        </p:spPr>
+        <p:txBody>
+          <a:bodyPr wrap="none">
+            <a:spAutoFit/>
+          </a:bodyPr>
+          <a:lstStyle/>
+          <a:p>
+            <a:r>
+              <a:rPr sz="1000">
+                <a:solidFill>
+                  <a:srgbClr val="5E6B64"/>
+                </a:solidFill>
+                <a:latin typeface="Calibri"/>
+              </a:rPr>
+              <a:t>BADM 225 · Chapter 9</a:t>
+            </a:r>
+          </a:p>
+        </p:txBody>
+      </p:sp>
+      <p:sp>
+        <p:nvSpPr>
+          <p:cNvPr id="4" name="TextBox 3" descr="Slide number 27"/>
+          <p:cNvSpPr txBox="1"/>
+          <p:nvPr/>
+        </p:nvSpPr>
+        <p:spPr>
+          <a:xfrm>
+            <a:off x="11247120" y="6446520"/>
+            <a:ext cx="640080" cy="320040"/>
+          </a:xfrm>
+          <a:prstGeom prst="rect">
+            <a:avLst/>
+          </a:prstGeom>
+          <a:noFill/>
+        </p:spPr>
+        <p:txBody>
+          <a:bodyPr wrap="none">
+            <a:spAutoFit/>
+          </a:bodyPr>
+          <a:lstStyle/>
+          <a:p>
+            <a:pPr algn="r"/>
+            <a:r>
+              <a:rPr sz="1000">
+                <a:solidFill>
+                  <a:srgbClr val="5E6B64"/>
+                </a:solidFill>
+                <a:latin typeface="Calibri"/>
+              </a:rPr>
+              <a:t>27</a:t>
+            </a:r>
+          </a:p>
+        </p:txBody>
+      </p:sp>
+      <p:sp>
+        <p:nvSpPr>
+          <p:cNvPr id="5" name="Chevron 4" descr="Step 1: RECOMMEND"/>
+          <p:cNvSpPr/>
+          <p:nvPr/>
+        </p:nvSpPr>
+        <p:spPr>
+          <a:xfrm>
+            <a:off x="548640" y="1828800"/>
+            <a:ext cx="2143353" cy="1143000"/>
+          </a:xfrm>
+          <a:prstGeom prst="chevron">
+            <a:avLst/>
+          </a:prstGeom>
+          <a:solidFill>
+            <a:srgbClr val="0E4D33"/>
+          </a:solidFill>
+          <a:ln>
+            <a:noFill/>
+          </a:ln>
+          <a:effectLst/>
+        </p:spPr>
+        <p:style>
+          <a:lnRef idx="1">
+            <a:schemeClr val="accent1"/>
+          </a:lnRef>
+          <a:fillRef idx="3">
+            <a:schemeClr val="accent1"/>
+          </a:fillRef>
+          <a:effectRef idx="2">
+            <a:schemeClr val="accent1"/>
+          </a:effectRef>
+          <a:fontRef idx="minor">
+            <a:schemeClr val="lt1"/>
+          </a:fontRef>
+        </p:style>
+        <p:txBody>
+          <a:bodyPr rtlCol="0" anchor="ctr" wrap="square"/>
+          <a:lstStyle/>
+          <a:p>
+            <a:pPr algn="ctr"/>
+            <a:r>
+              <a:rPr sz="1400" b="1">
+                <a:solidFill>
+                  <a:srgbClr val="FFFFFF"/>
+                </a:solidFill>
+                <a:latin typeface="Calibri"/>
+              </a:rPr>
+              <a:t>RECOMMEND</a:t>
+            </a:r>
+          </a:p>
+        </p:txBody>
+      </p:sp>
+      <p:sp>
+        <p:nvSpPr>
+          <p:cNvPr id="6" name="TextBox 5" descr="RECOMMEND detail"/>
+          <p:cNvSpPr txBox="1"/>
+          <p:nvPr/>
+        </p:nvSpPr>
+        <p:spPr>
+          <a:xfrm>
+            <a:off x="548640" y="3154680"/>
+            <a:ext cx="2143353" cy="1463040"/>
+          </a:xfrm>
+          <a:prstGeom prst="rect">
+            <a:avLst/>
+          </a:prstGeom>
+          <a:noFill/>
+        </p:spPr>
+        <p:txBody>
+          <a:bodyPr wrap="square">
+            <a:spAutoFit/>
+          </a:bodyPr>
+          <a:lstStyle/>
+          <a:p>
+            <a:pPr algn="ctr">
+              <a:spcAft>
+                <a:spcPts val="800"/>
+              </a:spcAft>
+            </a:pPr>
+            <a:r>
+              <a:rPr sz="1250" b="0" i="0">
+                <a:solidFill>
+                  <a:srgbClr val="212A26"/>
+                </a:solidFill>
+                <a:latin typeface="Calibri"/>
+              </a:rPr>
+              <a:t>Sentence one: the action and its headline number</a:t>
+            </a:r>
+          </a:p>
+        </p:txBody>
+      </p:sp>
+      <p:sp>
+        <p:nvSpPr>
+          <p:cNvPr id="7" name="Chevron 6" descr="Step 2: PROBLEM"/>
+          <p:cNvSpPr/>
+          <p:nvPr/>
+        </p:nvSpPr>
+        <p:spPr>
+          <a:xfrm>
+            <a:off x="2801721" y="1828800"/>
+            <a:ext cx="2143353" cy="1143000"/>
+          </a:xfrm>
+          <a:prstGeom prst="chevron">
+            <a:avLst/>
+          </a:prstGeom>
+          <a:solidFill>
+            <a:srgbClr val="5C8A6E"/>
+          </a:solidFill>
+          <a:ln>
+            <a:noFill/>
+          </a:ln>
+          <a:effectLst/>
+        </p:spPr>
+        <p:style>
+          <a:lnRef idx="1">
+            <a:schemeClr val="accent1"/>
+          </a:lnRef>
+          <a:fillRef idx="3">
+            <a:schemeClr val="accent1"/>
+          </a:fillRef>
+          <a:effectRef idx="2">
+            <a:schemeClr val="accent1"/>
+          </a:effectRef>
+          <a:fontRef idx="minor">
+            <a:schemeClr val="lt1"/>
+          </a:fontRef>
+        </p:style>
+        <p:txBody>
+          <a:bodyPr rtlCol="0" anchor="ctr" wrap="square"/>
+          <a:lstStyle/>
+          <a:p>
+            <a:pPr algn="ctr"/>
+            <a:r>
+              <a:rPr sz="1400" b="1">
+                <a:solidFill>
+                  <a:srgbClr val="FFFFFF"/>
+                </a:solidFill>
+                <a:latin typeface="Calibri"/>
+              </a:rPr>
+              <a:t>PROBLEM</a:t>
+            </a:r>
+          </a:p>
+        </p:txBody>
+      </p:sp>
+      <p:sp>
+        <p:nvSpPr>
+          <p:cNvPr id="8" name="TextBox 7" descr="PROBLEM detail"/>
+          <p:cNvSpPr txBox="1"/>
+          <p:nvPr/>
+        </p:nvSpPr>
+        <p:spPr>
+          <a:xfrm>
+            <a:off x="2801721" y="3154680"/>
+            <a:ext cx="2143353" cy="1463040"/>
+          </a:xfrm>
+          <a:prstGeom prst="rect">
+            <a:avLst/>
+          </a:prstGeom>
+          <a:noFill/>
+        </p:spPr>
+        <p:txBody>
+          <a:bodyPr wrap="square">
+            <a:spAutoFit/>
+          </a:bodyPr>
+          <a:lstStyle/>
+          <a:p>
+            <a:pPr algn="ctr">
+              <a:spcAft>
+                <a:spcPts val="800"/>
+              </a:spcAft>
+            </a:pPr>
+            <a:r>
+              <a:rPr sz="1250" b="0" i="0">
+                <a:solidFill>
+                  <a:srgbClr val="212A26"/>
+                </a:solidFill>
+                <a:latin typeface="Calibri"/>
+              </a:rPr>
+              <a:t>The cost of now — quantified, sourced</a:t>
+            </a:r>
+          </a:p>
+        </p:txBody>
+      </p:sp>
+      <p:sp>
+        <p:nvSpPr>
+          <p:cNvPr id="9" name="Chevron 8" descr="Step 3: SOLUTION + COST"/>
+          <p:cNvSpPr/>
+          <p:nvPr/>
+        </p:nvSpPr>
+        <p:spPr>
+          <a:xfrm>
+            <a:off x="5054803" y="1828800"/>
+            <a:ext cx="2143353" cy="1143000"/>
+          </a:xfrm>
+          <a:prstGeom prst="chevron">
+            <a:avLst/>
+          </a:prstGeom>
+          <a:solidFill>
+            <a:srgbClr val="0E4D33"/>
+          </a:solidFill>
+          <a:ln>
+            <a:noFill/>
+          </a:ln>
+          <a:effectLst/>
+        </p:spPr>
+        <p:style>
+          <a:lnRef idx="1">
+            <a:schemeClr val="accent1"/>
+          </a:lnRef>
+          <a:fillRef idx="3">
+            <a:schemeClr val="accent1"/>
+          </a:fillRef>
+          <a:effectRef idx="2">
+            <a:schemeClr val="accent1"/>
+          </a:effectRef>
+          <a:fontRef idx="minor">
+            <a:schemeClr val="lt1"/>
+          </a:fontRef>
+        </p:style>
+        <p:txBody>
+          <a:bodyPr rtlCol="0" anchor="ctr" wrap="square"/>
+          <a:lstStyle/>
+          <a:p>
+            <a:pPr algn="ctr"/>
+            <a:r>
+              <a:rPr sz="1400" b="1">
+                <a:solidFill>
+                  <a:srgbClr val="FFFFFF"/>
+                </a:solidFill>
+                <a:latin typeface="Calibri"/>
+              </a:rPr>
+              <a:t>SOLUTION + COST</a:t>
+            </a:r>
+          </a:p>
+        </p:txBody>
+      </p:sp>
+      <p:sp>
+        <p:nvSpPr>
+          <p:cNvPr id="10" name="TextBox 9" descr="SOLUTION + COST detail"/>
+          <p:cNvSpPr txBox="1"/>
+          <p:nvPr/>
+        </p:nvSpPr>
+        <p:spPr>
+          <a:xfrm>
+            <a:off x="5054803" y="3154680"/>
+            <a:ext cx="2143353" cy="1463040"/>
+          </a:xfrm>
+          <a:prstGeom prst="rect">
+            <a:avLst/>
+          </a:prstGeom>
+          <a:noFill/>
+        </p:spPr>
+        <p:txBody>
+          <a:bodyPr wrap="square">
+            <a:spAutoFit/>
+          </a:bodyPr>
+          <a:lstStyle/>
+          <a:p>
+            <a:pPr algn="ctr">
+              <a:spcAft>
+                <a:spcPts val="800"/>
+              </a:spcAft>
+            </a:pPr>
+            <a:r>
+              <a:rPr sz="1250" b="0" i="0">
+                <a:solidFill>
+                  <a:srgbClr val="212A26"/>
+                </a:solidFill>
+                <a:latin typeface="Calibri"/>
+              </a:rPr>
+              <a:t>What, how much, how long</a:t>
+            </a:r>
+          </a:p>
+        </p:txBody>
+      </p:sp>
+      <p:sp>
+        <p:nvSpPr>
+          <p:cNvPr id="11" name="Chevron 10" descr="Step 4: PAYBACK"/>
+          <p:cNvSpPr/>
+          <p:nvPr/>
+        </p:nvSpPr>
+        <p:spPr>
+          <a:xfrm>
+            <a:off x="7307884" y="1828800"/>
+            <a:ext cx="2143353" cy="1143000"/>
+          </a:xfrm>
+          <a:prstGeom prst="chevron">
+            <a:avLst/>
+          </a:prstGeom>
+          <a:solidFill>
+            <a:srgbClr val="5C8A6E"/>
+          </a:solidFill>
+          <a:ln>
+            <a:noFill/>
+          </a:ln>
+          <a:effectLst/>
+        </p:spPr>
+        <p:style>
+          <a:lnRef idx="1">
+            <a:schemeClr val="accent1"/>
+          </a:lnRef>
+          <a:fillRef idx="3">
+            <a:schemeClr val="accent1"/>
+          </a:fillRef>
+          <a:effectRef idx="2">
+            <a:schemeClr val="accent1"/>
+          </a:effectRef>
+          <a:fontRef idx="minor">
+            <a:schemeClr val="lt1"/>
+          </a:fontRef>
+        </p:style>
+        <p:txBody>
+          <a:bodyPr rtlCol="0" anchor="ctr" wrap="square"/>
+          <a:lstStyle/>
+          <a:p>
+            <a:pPr algn="ctr"/>
+            <a:r>
+              <a:rPr sz="1400" b="1">
+                <a:solidFill>
+                  <a:srgbClr val="FFFFFF"/>
+                </a:solidFill>
+                <a:latin typeface="Calibri"/>
+              </a:rPr>
+              <a:t>PAYBACK</a:t>
+            </a:r>
+          </a:p>
+        </p:txBody>
+      </p:sp>
+      <p:sp>
+        <p:nvSpPr>
+          <p:cNvPr id="12" name="TextBox 11" descr="PAYBACK detail"/>
+          <p:cNvSpPr txBox="1"/>
+          <p:nvPr/>
+        </p:nvSpPr>
+        <p:spPr>
+          <a:xfrm>
+            <a:off x="7307884" y="3154680"/>
+            <a:ext cx="2143353" cy="1463040"/>
+          </a:xfrm>
+          <a:prstGeom prst="rect">
+            <a:avLst/>
+          </a:prstGeom>
+          <a:noFill/>
+        </p:spPr>
+        <p:txBody>
+          <a:bodyPr wrap="square">
+            <a:spAutoFit/>
+          </a:bodyPr>
+          <a:lstStyle/>
+          <a:p>
+            <a:pPr algn="ctr">
+              <a:spcAft>
+                <a:spcPts val="800"/>
+              </a:spcAft>
+            </a:pPr>
+            <a:r>
+              <a:rPr sz="1250" b="0" i="0">
+                <a:solidFill>
+                  <a:srgbClr val="212A26"/>
+                </a:solidFill>
+                <a:latin typeface="Calibri"/>
+              </a:rPr>
+              <a:t>When the spend returns — the CFO's paragraph</a:t>
+            </a:r>
+          </a:p>
+        </p:txBody>
+      </p:sp>
+      <p:sp>
+        <p:nvSpPr>
+          <p:cNvPr id="13" name="Chevron 12" descr="Step 5: RISKS + PLAN B"/>
+          <p:cNvSpPr/>
+          <p:nvPr/>
+        </p:nvSpPr>
+        <p:spPr>
+          <a:xfrm>
+            <a:off x="9560966" y="1828800"/>
+            <a:ext cx="2143353" cy="1143000"/>
+          </a:xfrm>
+          <a:prstGeom prst="chevron">
+            <a:avLst/>
+          </a:prstGeom>
+          <a:solidFill>
+            <a:srgbClr val="0E4D33"/>
+          </a:solidFill>
+          <a:ln>
+            <a:noFill/>
+          </a:ln>
+          <a:effectLst/>
+        </p:spPr>
+        <p:style>
+          <a:lnRef idx="1">
+            <a:schemeClr val="accent1"/>
+          </a:lnRef>
+          <a:fillRef idx="3">
+            <a:schemeClr val="accent1"/>
+          </a:fillRef>
+          <a:effectRef idx="2">
+            <a:schemeClr val="accent1"/>
+          </a:effectRef>
+          <a:fontRef idx="minor">
+            <a:schemeClr val="lt1"/>
+          </a:fontRef>
+        </p:style>
+        <p:txBody>
+          <a:bodyPr rtlCol="0" anchor="ctr" wrap="square"/>
+          <a:lstStyle/>
+          <a:p>
+            <a:pPr algn="ctr"/>
+            <a:r>
+              <a:rPr sz="1400" b="1">
+                <a:solidFill>
+                  <a:srgbClr val="FFFFFF"/>
+                </a:solidFill>
+                <a:latin typeface="Calibri"/>
+              </a:rPr>
+              <a:t>RISKS + PLAN B</a:t>
+            </a:r>
+          </a:p>
+        </p:txBody>
+      </p:sp>
+      <p:sp>
+        <p:nvSpPr>
+          <p:cNvPr id="14" name="TextBox 13" descr="RISKS + PLAN B detail"/>
+          <p:cNvSpPr txBox="1"/>
+          <p:nvPr/>
+        </p:nvSpPr>
+        <p:spPr>
+          <a:xfrm>
+            <a:off x="9560966" y="3154680"/>
+            <a:ext cx="2143353" cy="1463040"/>
+          </a:xfrm>
+          <a:prstGeom prst="rect">
+            <a:avLst/>
+          </a:prstGeom>
+          <a:noFill/>
+        </p:spPr>
+        <p:txBody>
+          <a:bodyPr wrap="square">
+            <a:spAutoFit/>
+          </a:bodyPr>
+          <a:lstStyle/>
+          <a:p>
+            <a:pPr algn="ctr">
+              <a:spcAft>
+                <a:spcPts val="800"/>
+              </a:spcAft>
+            </a:pPr>
+            <a:r>
+              <a:rPr sz="1250" b="0" i="0">
+                <a:solidFill>
+                  <a:srgbClr val="212A26"/>
+                </a:solidFill>
+                <a:latin typeface="Calibri"/>
+              </a:rPr>
+              <a:t>What could fail; the honest yellow, pre-disclosed</a:t>
+            </a:r>
+          </a:p>
+        </p:txBody>
+      </p:sp>
+      <p:sp>
+        <p:nvSpPr>
+          <p:cNvPr id="15" name="Rounded Rectangle 14" descr="Key insight"/>
+          <p:cNvSpPr/>
+          <p:nvPr/>
+        </p:nvSpPr>
+        <p:spPr>
+          <a:xfrm>
+            <a:off x="548640" y="4892040"/>
+            <a:ext cx="11064240" cy="1234440"/>
+          </a:xfrm>
+          <a:prstGeom prst="roundRect">
+            <a:avLst/>
+          </a:prstGeom>
+          <a:solidFill>
+            <a:srgbClr val="EAF1EB"/>
+          </a:solidFill>
+          <a:ln>
+            <a:noFill/>
+          </a:ln>
+          <a:effectLst/>
+        </p:spPr>
+        <p:style>
+          <a:lnRef idx="1">
+            <a:schemeClr val="accent1"/>
+          </a:lnRef>
+          <a:fillRef idx="3">
+            <a:schemeClr val="accent1"/>
+          </a:fillRef>
+          <a:effectRef idx="2">
+            <a:schemeClr val="accent1"/>
+          </a:effectRef>
+          <a:fontRef idx="minor">
+            <a:schemeClr val="lt1"/>
+          </a:fontRef>
+        </p:style>
+        <p:txBody>
+          <a:bodyPr rtlCol="0" anchor="t" wrap="square" lIns="164592" rIns="164592" tIns="128016" bIns="109728"/>
+          <a:lstStyle/>
+          <a:p>
+            <a:pPr algn="l">
+              <a:spcAft>
+                <a:spcPts val="800"/>
+              </a:spcAft>
+            </a:pPr>
+            <a:r>
+              <a:rPr sz="1500" b="1">
+                <a:solidFill>
+                  <a:srgbClr val="0E4D33"/>
+                </a:solidFill>
+                <a:latin typeface="Calibri"/>
+              </a:rPr>
+              <a:t>Key insight:  </a:t>
+            </a:r>
+            <a:r>
+              <a:rPr sz="1500" b="0" i="0">
+                <a:solidFill>
+                  <a:srgbClr val="212A26"/>
+                </a:solidFill>
+                <a:latin typeface="Calibri"/>
+              </a:rPr>
+              <a:t>The justification report is the internal proposal (Chapter 8) wearing report clothes — same skeleton, completeness rules now mandatory.</a:t>
+            </a:r>
+          </a:p>
+        </p:txBody>
+      </p:sp>
+    </p:spTree>
+  </p:cSld>
+  <p:clrMapOvr>
+    <a:masterClrMapping/>
+  </p:clrMapOvr>
+</p:sld>
+</file>
+
+<file path=ppt/slides/slide28.xml><?xml version="1.0" encoding="utf-8"?>
+<p:sld xmlns:a="http://schemas.openxmlformats.org/drawingml/2006/main" xmlns:p="http://schemas.openxmlformats.org/presentationml/2006/main" xmlns:r="http://schemas.openxmlformats.org/officeDocument/2006/relationships">
+  <p:cSld>
+    <p:bg>
+      <p:bgPr>
+        <a:solidFill>
+          <a:srgbClr val="FFFFFF"/>
+        </a:solidFill>
+        <a:effectLst/>
+      </p:bgPr>
+    </p:bg>
+    <p:spTree>
+      <p:nvGrpSpPr>
+        <p:cNvPr id="1" name=""/>
+        <p:cNvGrpSpPr/>
+        <p:nvPr/>
+      </p:nvGrpSpPr>
+      <p:grpSpPr/>
+      <p:sp>
+        <p:nvSpPr>
+          <p:cNvPr id="2" name="Title 1" descr="Slide title: Comparison reports: criteria before candidates"/>
+          <p:cNvSpPr>
+            <a:spLocks noGrp="1"/>
+          </p:cNvSpPr>
+          <p:nvPr>
+            <p:ph type="title"/>
+          </p:nvPr>
+        </p:nvSpPr>
+        <p:spPr>
+          <a:xfrm>
+            <a:off x="502920" y="411480"/>
+            <a:ext cx="11155680" cy="914400"/>
+          </a:xfrm>
+        </p:spPr>
+        <p:txBody>
+          <a:bodyPr wrap="square"/>
+          <a:lstStyle/>
+          <a:p>
+            <a:pPr algn="l"/>
+            <a:r>
+              <a:rPr sz="3200" b="1">
+                <a:solidFill>
+                  <a:srgbClr val="0E4D33"/>
+                </a:solidFill>
+                <a:latin typeface="Cambria"/>
+              </a:rPr>
+              <a:t>Comparison reports: criteria before candidates</a:t>
+            </a:r>
+          </a:p>
+        </p:txBody>
+      </p:sp>
+      <p:sp>
+        <p:nvSpPr>
+          <p:cNvPr id="3" name="TextBox 2" descr="Footer: BADM 225 · Chapter 9"/>
+          <p:cNvSpPr txBox="1"/>
+          <p:nvPr/>
+        </p:nvSpPr>
+        <p:spPr>
+          <a:xfrm>
+            <a:off x="502920" y="6446520"/>
+            <a:ext cx="5486400" cy="320040"/>
+          </a:xfrm>
+          <a:prstGeom prst="rect">
+            <a:avLst/>
+          </a:prstGeom>
+          <a:noFill/>
+        </p:spPr>
+        <p:txBody>
+          <a:bodyPr wrap="none">
+            <a:spAutoFit/>
+          </a:bodyPr>
+          <a:lstStyle/>
+          <a:p>
+            <a:r>
+              <a:rPr sz="1000">
+                <a:solidFill>
+                  <a:srgbClr val="5E6B64"/>
+                </a:solidFill>
+                <a:latin typeface="Calibri"/>
+              </a:rPr>
+              <a:t>BADM 225 · Chapter 9</a:t>
+            </a:r>
+          </a:p>
+        </p:txBody>
+      </p:sp>
+      <p:sp>
+        <p:nvSpPr>
+          <p:cNvPr id="4" name="TextBox 3" descr="Slide number 28"/>
+          <p:cNvSpPr txBox="1"/>
+          <p:nvPr/>
+        </p:nvSpPr>
+        <p:spPr>
+          <a:xfrm>
+            <a:off x="11247120" y="6446520"/>
+            <a:ext cx="640080" cy="320040"/>
+          </a:xfrm>
+          <a:prstGeom prst="rect">
+            <a:avLst/>
+          </a:prstGeom>
+          <a:noFill/>
+        </p:spPr>
+        <p:txBody>
+          <a:bodyPr wrap="none">
+            <a:spAutoFit/>
+          </a:bodyPr>
+          <a:lstStyle/>
+          <a:p>
+            <a:pPr algn="r"/>
+            <a:r>
+              <a:rPr sz="1000">
+                <a:solidFill>
+                  <a:srgbClr val="5E6B64"/>
+                </a:solidFill>
+                <a:latin typeface="Calibri"/>
+              </a:rPr>
+              <a:t>28</a:t>
+            </a:r>
+          </a:p>
+        </p:txBody>
+      </p:sp>
+      <p:sp>
+        <p:nvSpPr>
+          <p:cNvPr id="5" name="TextBox 4" descr="Key points"/>
+          <p:cNvSpPr txBox="1"/>
+          <p:nvPr/>
+        </p:nvSpPr>
+        <p:spPr>
+          <a:xfrm>
+            <a:off x="548640" y="1554480"/>
+            <a:ext cx="11064240" cy="4663440"/>
+          </a:xfrm>
+          <a:prstGeom prst="rect">
+            <a:avLst/>
+          </a:prstGeom>
+          <a:noFill/>
+        </p:spPr>
+        <p:txBody>
+          <a:bodyPr wrap="square">
+            <a:spAutoFit/>
+          </a:bodyPr>
+          <a:lstStyle/>
+          <a:p>
+            <a:pPr algn="l">
+              <a:spcAft>
+                <a:spcPts val="1200"/>
+              </a:spcAft>
+            </a:pPr>
+            <a:r>
+              <a:rPr sz="1700">
+                <a:solidFill>
+                  <a:srgbClr val="8A6410"/>
+                </a:solidFill>
+                <a:latin typeface="Calibri"/>
+              </a:rPr>
+              <a:t>▪  </a:t>
+            </a:r>
+            <a:r>
+              <a:rPr sz="1700" b="1">
+                <a:solidFill>
+                  <a:srgbClr val="0E4D33"/>
+                </a:solidFill>
+                <a:latin typeface="Calibri"/>
+              </a:rPr>
+              <a:t>Agree the criteria FIRST — with the decider.  </a:t>
+            </a:r>
+            <a:r>
+              <a:rPr sz="1700" b="0" i="0">
+                <a:solidFill>
+                  <a:srgbClr val="212A26"/>
+                </a:solidFill>
+                <a:latin typeface="Calibri"/>
+              </a:rPr>
+              <a:t>Weighting price 40% after seeing the results is how comparisons become advocacy with a rubric.</a:t>
+            </a:r>
+          </a:p>
+          <a:p>
+            <a:pPr algn="l">
+              <a:spcAft>
+                <a:spcPts val="1200"/>
+              </a:spcAft>
+            </a:pPr>
+            <a:r>
+              <a:rPr sz="1700">
+                <a:solidFill>
+                  <a:srgbClr val="8A6410"/>
+                </a:solidFill>
+                <a:latin typeface="Calibri"/>
+              </a:rPr>
+              <a:t>▪  </a:t>
+            </a:r>
+            <a:r>
+              <a:rPr sz="1700" b="1">
+                <a:solidFill>
+                  <a:srgbClr val="0E4D33"/>
+                </a:solidFill>
+                <a:latin typeface="Calibri"/>
+              </a:rPr>
+              <a:t>Same data, every candidate.  </a:t>
+            </a:r>
+            <a:r>
+              <a:rPr sz="1700" b="0" i="0">
+                <a:solidFill>
+                  <a:srgbClr val="212A26"/>
+                </a:solidFill>
+                <a:latin typeface="Calibri"/>
+              </a:rPr>
+              <a:t>A glowing paragraph for vendor A and a spec table for vendor B is selection bias in layout form.</a:t>
+            </a:r>
+          </a:p>
+          <a:p>
+            <a:pPr algn="l">
+              <a:spcAft>
+                <a:spcPts val="1200"/>
+              </a:spcAft>
+            </a:pPr>
+            <a:r>
+              <a:rPr sz="1700">
+                <a:solidFill>
+                  <a:srgbClr val="8A6410"/>
+                </a:solidFill>
+                <a:latin typeface="Calibri"/>
+              </a:rPr>
+              <a:t>▪  </a:t>
+            </a:r>
+            <a:r>
+              <a:rPr sz="1700" b="1">
+                <a:solidFill>
+                  <a:srgbClr val="0E4D33"/>
+                </a:solidFill>
+                <a:latin typeface="Calibri"/>
+              </a:rPr>
+              <a:t>The matrix shows, the prose judges.  </a:t>
+            </a:r>
+            <a:r>
+              <a:rPr sz="1700" b="0" i="0">
+                <a:solidFill>
+                  <a:srgbClr val="212A26"/>
+                </a:solidFill>
+                <a:latin typeface="Calibri"/>
+              </a:rPr>
+              <a:t>Criteria × candidates table for the facts; a short recommendation section for what the facts mean (Chapter 3's table rule).</a:t>
+            </a:r>
+          </a:p>
+          <a:p>
+            <a:pPr algn="l">
+              <a:spcAft>
+                <a:spcPts val="1200"/>
+              </a:spcAft>
+            </a:pPr>
+            <a:r>
+              <a:rPr sz="1700">
+                <a:solidFill>
+                  <a:srgbClr val="8A6410"/>
+                </a:solidFill>
+                <a:latin typeface="Calibri"/>
+              </a:rPr>
+              <a:t>▪  </a:t>
+            </a:r>
+            <a:r>
+              <a:rPr sz="1700" b="1">
+                <a:solidFill>
+                  <a:srgbClr val="0E4D33"/>
+                </a:solidFill>
+                <a:latin typeface="Calibri"/>
+              </a:rPr>
+              <a:t>Disclose the near-miss honestly.  </a:t>
+            </a:r>
+            <a:r>
+              <a:rPr sz="1700" b="0" i="0">
+                <a:solidFill>
+                  <a:srgbClr val="212A26"/>
+                </a:solidFill>
+                <a:latin typeface="Calibri"/>
+              </a:rPr>
+              <a:t>'B wins on price and loses on the integration our timeline requires' — the runner-up's best case, stated fairly, is your credibility exhibit.</a:t>
+            </a:r>
+          </a:p>
+        </p:txBody>
+      </p:sp>
+    </p:spTree>
+  </p:cSld>
+  <p:clrMapOvr>
+    <a:masterClrMapping/>
+  </p:clrMapOvr>
+</p:sld>
+</file>
+
+<file path=ppt/slides/slide29.xml><?xml version="1.0" encoding="utf-8"?>
+<p:sld xmlns:a="http://schemas.openxmlformats.org/drawingml/2006/main" xmlns:p="http://schemas.openxmlformats.org/presentationml/2006/main" xmlns:r="http://schemas.openxmlformats.org/officeDocument/2006/relationships">
+  <p:cSld>
+    <p:bg>
+      <p:bgPr>
+        <a:solidFill>
+          <a:srgbClr val="FFFFFF"/>
+        </a:solidFill>
+        <a:effectLst/>
+      </p:bgPr>
+    </p:bg>
+    <p:spTree>
+      <p:nvGrpSpPr>
+        <p:cNvPr id="1" name=""/>
+        <p:cNvGrpSpPr/>
+        <p:nvPr/>
+      </p:nvGrpSpPr>
+      <p:grpSpPr/>
+      <p:sp>
+        <p:nvSpPr>
+          <p:cNvPr id="2" name="Title 1" descr="Slide title: The feasibility report (your capstone's shape)"/>
+          <p:cNvSpPr>
+            <a:spLocks noGrp="1"/>
+          </p:cNvSpPr>
+          <p:nvPr>
+            <p:ph type="title"/>
+          </p:nvPr>
+        </p:nvSpPr>
+        <p:spPr>
+          <a:xfrm>
+            <a:off x="502920" y="411480"/>
+            <a:ext cx="11155680" cy="914400"/>
+          </a:xfrm>
+        </p:spPr>
+        <p:txBody>
+          <a:bodyPr wrap="square"/>
+          <a:lstStyle/>
+          <a:p>
+            <a:pPr algn="l"/>
+            <a:r>
+              <a:rPr sz="3200" b="1">
+                <a:solidFill>
+                  <a:srgbClr val="0E4D33"/>
+                </a:solidFill>
+                <a:latin typeface="Cambria"/>
+              </a:rPr>
+              <a:t>The feasibility report (your capstone's shape)</a:t>
+            </a:r>
+          </a:p>
+        </p:txBody>
+      </p:sp>
+      <p:sp>
+        <p:nvSpPr>
+          <p:cNvPr id="3" name="TextBox 2" descr="Footer: BADM 225 · Chapter 9"/>
+          <p:cNvSpPr txBox="1"/>
+          <p:nvPr/>
+        </p:nvSpPr>
+        <p:spPr>
+          <a:xfrm>
+            <a:off x="502920" y="6446520"/>
+            <a:ext cx="5486400" cy="320040"/>
+          </a:xfrm>
+          <a:prstGeom prst="rect">
+            <a:avLst/>
+          </a:prstGeom>
+          <a:noFill/>
+        </p:spPr>
+        <p:txBody>
+          <a:bodyPr wrap="none">
+            <a:spAutoFit/>
+          </a:bodyPr>
+          <a:lstStyle/>
+          <a:p>
+            <a:r>
+              <a:rPr sz="1000">
+                <a:solidFill>
+                  <a:srgbClr val="5E6B64"/>
+                </a:solidFill>
+                <a:latin typeface="Calibri"/>
+              </a:rPr>
+              <a:t>BADM 225 · Chapter 9</a:t>
+            </a:r>
+          </a:p>
+        </p:txBody>
+      </p:sp>
+      <p:sp>
+        <p:nvSpPr>
+          <p:cNvPr id="4" name="TextBox 3" descr="Slide number 29"/>
+          <p:cNvSpPr txBox="1"/>
+          <p:nvPr/>
+        </p:nvSpPr>
+        <p:spPr>
+          <a:xfrm>
+            <a:off x="11247120" y="6446520"/>
+            <a:ext cx="640080" cy="320040"/>
+          </a:xfrm>
+          <a:prstGeom prst="rect">
+            <a:avLst/>
+          </a:prstGeom>
+          <a:noFill/>
+        </p:spPr>
+        <p:txBody>
+          <a:bodyPr wrap="none">
+            <a:spAutoFit/>
+          </a:bodyPr>
+          <a:lstStyle/>
+          <a:p>
+            <a:pPr algn="r"/>
+            <a:r>
+              <a:rPr sz="1000">
+                <a:solidFill>
+                  <a:srgbClr val="5E6B64"/>
+                </a:solidFill>
+                <a:latin typeface="Calibri"/>
+              </a:rPr>
+              <a:t>29</a:t>
+            </a:r>
+          </a:p>
+        </p:txBody>
+      </p:sp>
+      <p:sp>
+        <p:nvSpPr>
+          <p:cNvPr id="5" name="Chevron 4" descr="Step 1: THE VERDICT"/>
+          <p:cNvSpPr/>
+          <p:nvPr/>
+        </p:nvSpPr>
+        <p:spPr>
+          <a:xfrm>
+            <a:off x="548640" y="1828800"/>
+            <a:ext cx="2143353" cy="1143000"/>
+          </a:xfrm>
+          <a:prstGeom prst="chevron">
+            <a:avLst/>
+          </a:prstGeom>
+          <a:solidFill>
+            <a:srgbClr val="0E4D33"/>
+          </a:solidFill>
+          <a:ln>
+            <a:noFill/>
+          </a:ln>
+          <a:effectLst/>
+        </p:spPr>
+        <p:style>
+          <a:lnRef idx="1">
+            <a:schemeClr val="accent1"/>
+          </a:lnRef>
+          <a:fillRef idx="3">
+            <a:schemeClr val="accent1"/>
+          </a:fillRef>
+          <a:effectRef idx="2">
+            <a:schemeClr val="accent1"/>
+          </a:effectRef>
+          <a:fontRef idx="minor">
+            <a:schemeClr val="lt1"/>
+          </a:fontRef>
+        </p:style>
+        <p:txBody>
+          <a:bodyPr rtlCol="0" anchor="ctr" wrap="square"/>
+          <a:lstStyle/>
+          <a:p>
+            <a:pPr algn="ctr"/>
+            <a:r>
+              <a:rPr sz="1400" b="1">
+                <a:solidFill>
+                  <a:srgbClr val="FFFFFF"/>
+                </a:solidFill>
+                <a:latin typeface="Calibri"/>
+              </a:rPr>
+              <a:t>THE VERDICT</a:t>
+            </a:r>
+          </a:p>
+        </p:txBody>
+      </p:sp>
+      <p:sp>
+        <p:nvSpPr>
+          <p:cNvPr id="6" name="TextBox 5" descr="THE VERDICT detail"/>
+          <p:cNvSpPr txBox="1"/>
+          <p:nvPr/>
+        </p:nvSpPr>
+        <p:spPr>
+          <a:xfrm>
+            <a:off x="548640" y="3154680"/>
+            <a:ext cx="2143353" cy="1463040"/>
+          </a:xfrm>
+          <a:prstGeom prst="rect">
+            <a:avLst/>
+          </a:prstGeom>
+          <a:noFill/>
+        </p:spPr>
+        <p:txBody>
+          <a:bodyPr wrap="square">
+            <a:spAutoFit/>
+          </a:bodyPr>
+          <a:lstStyle/>
+          <a:p>
+            <a:pPr algn="ctr">
+              <a:spcAft>
+                <a:spcPts val="800"/>
+              </a:spcAft>
+            </a:pPr>
+            <a:r>
+              <a:rPr sz="1250" b="0" i="0">
+                <a:solidFill>
+                  <a:srgbClr val="212A26"/>
+                </a:solidFill>
+                <a:latin typeface="Calibri"/>
+              </a:rPr>
+              <a:t>Feasible or not, under what conditions — sentence one</a:t>
+            </a:r>
+          </a:p>
+        </p:txBody>
+      </p:sp>
+      <p:sp>
+        <p:nvSpPr>
+          <p:cNvPr id="7" name="Chevron 6" descr="Step 2: THE PROPOSAL"/>
+          <p:cNvSpPr/>
+          <p:nvPr/>
+        </p:nvSpPr>
+        <p:spPr>
+          <a:xfrm>
+            <a:off x="2801721" y="1828800"/>
+            <a:ext cx="2143353" cy="1143000"/>
+          </a:xfrm>
+          <a:prstGeom prst="chevron">
+            <a:avLst/>
+          </a:prstGeom>
+          <a:solidFill>
+            <a:srgbClr val="5C8A6E"/>
+          </a:solidFill>
+          <a:ln>
+            <a:noFill/>
+          </a:ln>
+          <a:effectLst/>
+        </p:spPr>
+        <p:style>
+          <a:lnRef idx="1">
+            <a:schemeClr val="accent1"/>
+          </a:lnRef>
+          <a:fillRef idx="3">
+            <a:schemeClr val="accent1"/>
+          </a:fillRef>
+          <a:effectRef idx="2">
+            <a:schemeClr val="accent1"/>
+          </a:effectRef>
+          <a:fontRef idx="minor">
+            <a:schemeClr val="lt1"/>
+          </a:fontRef>
+        </p:style>
+        <p:txBody>
+          <a:bodyPr rtlCol="0" anchor="ctr" wrap="square"/>
+          <a:lstStyle/>
+          <a:p>
+            <a:pPr algn="ctr"/>
+            <a:r>
+              <a:rPr sz="1400" b="1">
+                <a:solidFill>
+                  <a:srgbClr val="FFFFFF"/>
+                </a:solidFill>
+                <a:latin typeface="Calibri"/>
+              </a:rPr>
+              <a:t>THE PROPOSAL</a:t>
+            </a:r>
+          </a:p>
+        </p:txBody>
+      </p:sp>
+      <p:sp>
+        <p:nvSpPr>
+          <p:cNvPr id="8" name="TextBox 7" descr="THE PROPOSAL detail"/>
+          <p:cNvSpPr txBox="1"/>
+          <p:nvPr/>
+        </p:nvSpPr>
+        <p:spPr>
+          <a:xfrm>
+            <a:off x="2801721" y="3154680"/>
+            <a:ext cx="2143353" cy="1463040"/>
+          </a:xfrm>
+          <a:prstGeom prst="rect">
+            <a:avLst/>
+          </a:prstGeom>
+          <a:noFill/>
+        </p:spPr>
+        <p:txBody>
+          <a:bodyPr wrap="square">
+            <a:spAutoFit/>
+          </a:bodyPr>
+          <a:lstStyle/>
+          <a:p>
+            <a:pPr algn="ctr">
+              <a:spcAft>
+                <a:spcPts val="800"/>
+              </a:spcAft>
+            </a:pPr>
+            <a:r>
+              <a:rPr sz="1250" b="0" i="0">
+                <a:solidFill>
+                  <a:srgbClr val="212A26"/>
+                </a:solidFill>
+                <a:latin typeface="Calibri"/>
+              </a:rPr>
+              <a:t>What's being evaluated, scoped precisely</a:t>
+            </a:r>
+          </a:p>
+        </p:txBody>
+      </p:sp>
+      <p:sp>
+        <p:nvSpPr>
+          <p:cNvPr id="9" name="Chevron 8" descr="Step 3: THE TESTS"/>
+          <p:cNvSpPr/>
+          <p:nvPr/>
+        </p:nvSpPr>
+        <p:spPr>
+          <a:xfrm>
+            <a:off x="5054803" y="1828800"/>
+            <a:ext cx="2143353" cy="1143000"/>
+          </a:xfrm>
+          <a:prstGeom prst="chevron">
+            <a:avLst/>
+          </a:prstGeom>
+          <a:solidFill>
+            <a:srgbClr val="0E4D33"/>
+          </a:solidFill>
+          <a:ln>
+            <a:noFill/>
+          </a:ln>
+          <a:effectLst/>
+        </p:spPr>
+        <p:style>
+          <a:lnRef idx="1">
+            <a:schemeClr val="accent1"/>
+          </a:lnRef>
+          <a:fillRef idx="3">
+            <a:schemeClr val="accent1"/>
+          </a:fillRef>
+          <a:effectRef idx="2">
+            <a:schemeClr val="accent1"/>
+          </a:effectRef>
+          <a:fontRef idx="minor">
+            <a:schemeClr val="lt1"/>
+          </a:fontRef>
+        </p:style>
+        <p:txBody>
+          <a:bodyPr rtlCol="0" anchor="ctr" wrap="square"/>
+          <a:lstStyle/>
+          <a:p>
+            <a:pPr algn="ctr"/>
+            <a:r>
+              <a:rPr sz="1400" b="1">
+                <a:solidFill>
+                  <a:srgbClr val="FFFFFF"/>
+                </a:solidFill>
+                <a:latin typeface="Calibri"/>
+              </a:rPr>
+              <a:t>THE TESTS</a:t>
+            </a:r>
+          </a:p>
+        </p:txBody>
+      </p:sp>
+      <p:sp>
+        <p:nvSpPr>
+          <p:cNvPr id="10" name="TextBox 9" descr="THE TESTS detail"/>
+          <p:cNvSpPr txBox="1"/>
+          <p:nvPr/>
+        </p:nvSpPr>
+        <p:spPr>
+          <a:xfrm>
+            <a:off x="5054803" y="3154680"/>
+            <a:ext cx="2143353" cy="1463040"/>
+          </a:xfrm>
+          <a:prstGeom prst="rect">
+            <a:avLst/>
+          </a:prstGeom>
+          <a:noFill/>
+        </p:spPr>
+        <p:txBody>
+          <a:bodyPr wrap="square">
+            <a:spAutoFit/>
+          </a:bodyPr>
+          <a:lstStyle/>
+          <a:p>
+            <a:pPr algn="ctr">
+              <a:spcAft>
+                <a:spcPts val="800"/>
+              </a:spcAft>
+            </a:pPr>
+            <a:r>
+              <a:rPr sz="1250" b="0" i="0">
+                <a:solidFill>
+                  <a:srgbClr val="212A26"/>
+                </a:solidFill>
+                <a:latin typeface="Calibri"/>
+              </a:rPr>
+              <a:t>Technical · financial · operational · schedule — each pass/fail with evidence</a:t>
+            </a:r>
+          </a:p>
+        </p:txBody>
+      </p:sp>
+      <p:sp>
+        <p:nvSpPr>
+          <p:cNvPr id="11" name="Chevron 10" descr="Step 4: THE CONDITIONS"/>
+          <p:cNvSpPr/>
+          <p:nvPr/>
+        </p:nvSpPr>
+        <p:spPr>
+          <a:xfrm>
+            <a:off x="7307884" y="1828800"/>
+            <a:ext cx="2143353" cy="1143000"/>
+          </a:xfrm>
+          <a:prstGeom prst="chevron">
+            <a:avLst/>
+          </a:prstGeom>
+          <a:solidFill>
+            <a:srgbClr val="5C8A6E"/>
+          </a:solidFill>
+          <a:ln>
+            <a:noFill/>
+          </a:ln>
+          <a:effectLst/>
+        </p:spPr>
+        <p:style>
+          <a:lnRef idx="1">
+            <a:schemeClr val="accent1"/>
+          </a:lnRef>
+          <a:fillRef idx="3">
+            <a:schemeClr val="accent1"/>
+          </a:fillRef>
+          <a:effectRef idx="2">
+            <a:schemeClr val="accent1"/>
+          </a:effectRef>
+          <a:fontRef idx="minor">
+            <a:schemeClr val="lt1"/>
+          </a:fontRef>
+        </p:style>
+        <p:txBody>
+          <a:bodyPr rtlCol="0" anchor="ctr" wrap="square"/>
+          <a:lstStyle/>
+          <a:p>
+            <a:pPr algn="ctr"/>
+            <a:r>
+              <a:rPr sz="1400" b="1">
+                <a:solidFill>
+                  <a:srgbClr val="FFFFFF"/>
+                </a:solidFill>
+                <a:latin typeface="Calibri"/>
+              </a:rPr>
+              <a:t>THE CONDITIONS</a:t>
+            </a:r>
+          </a:p>
+        </p:txBody>
+      </p:sp>
+      <p:sp>
+        <p:nvSpPr>
+          <p:cNvPr id="12" name="TextBox 11" descr="THE CONDITIONS detail"/>
+          <p:cNvSpPr txBox="1"/>
+          <p:nvPr/>
+        </p:nvSpPr>
+        <p:spPr>
+          <a:xfrm>
+            <a:off x="7307884" y="3154680"/>
+            <a:ext cx="2143353" cy="1463040"/>
+          </a:xfrm>
+          <a:prstGeom prst="rect">
+            <a:avLst/>
+          </a:prstGeom>
+          <a:noFill/>
+        </p:spPr>
+        <p:txBody>
+          <a:bodyPr wrap="square">
+            <a:spAutoFit/>
+          </a:bodyPr>
+          <a:lstStyle/>
+          <a:p>
+            <a:pPr algn="ctr">
+              <a:spcAft>
+                <a:spcPts val="800"/>
+              </a:spcAft>
+            </a:pPr>
+            <a:r>
+              <a:rPr sz="1250" b="0" i="0">
+                <a:solidFill>
+                  <a:srgbClr val="212A26"/>
+                </a:solidFill>
+                <a:latin typeface="Calibri"/>
+              </a:rPr>
+              <a:t>What must be true for yes to hold — named assumptions</a:t>
+            </a:r>
+          </a:p>
+        </p:txBody>
+      </p:sp>
+      <p:sp>
+        <p:nvSpPr>
+          <p:cNvPr id="13" name="Chevron 12" descr="Step 5: NEXT STEPS"/>
+          <p:cNvSpPr/>
+          <p:nvPr/>
+        </p:nvSpPr>
+        <p:spPr>
+          <a:xfrm>
+            <a:off x="9560966" y="1828800"/>
+            <a:ext cx="2143353" cy="1143000"/>
+          </a:xfrm>
+          <a:prstGeom prst="chevron">
+            <a:avLst/>
+          </a:prstGeom>
+          <a:solidFill>
+            <a:srgbClr val="0E4D33"/>
+          </a:solidFill>
+          <a:ln>
+            <a:noFill/>
+          </a:ln>
+          <a:effectLst/>
+        </p:spPr>
+        <p:style>
+          <a:lnRef idx="1">
+            <a:schemeClr val="accent1"/>
+          </a:lnRef>
+          <a:fillRef idx="3">
+            <a:schemeClr val="accent1"/>
+          </a:fillRef>
+          <a:effectRef idx="2">
+            <a:schemeClr val="accent1"/>
+          </a:effectRef>
+          <a:fontRef idx="minor">
+            <a:schemeClr val="lt1"/>
+          </a:fontRef>
+        </p:style>
+        <p:txBody>
+          <a:bodyPr rtlCol="0" anchor="ctr" wrap="square"/>
+          <a:lstStyle/>
+          <a:p>
+            <a:pPr algn="ctr"/>
+            <a:r>
+              <a:rPr sz="1400" b="1">
+                <a:solidFill>
+                  <a:srgbClr val="FFFFFF"/>
+                </a:solidFill>
+                <a:latin typeface="Calibri"/>
+              </a:rPr>
+              <a:t>NEXT STEPS</a:t>
+            </a:r>
+          </a:p>
+        </p:txBody>
+      </p:sp>
+      <p:sp>
+        <p:nvSpPr>
+          <p:cNvPr id="14" name="TextBox 13" descr="NEXT STEPS detail"/>
+          <p:cNvSpPr txBox="1"/>
+          <p:nvPr/>
+        </p:nvSpPr>
+        <p:spPr>
+          <a:xfrm>
+            <a:off x="9560966" y="3154680"/>
+            <a:ext cx="2143353" cy="1463040"/>
+          </a:xfrm>
+          <a:prstGeom prst="rect">
+            <a:avLst/>
+          </a:prstGeom>
+          <a:noFill/>
+        </p:spPr>
+        <p:txBody>
+          <a:bodyPr wrap="square">
+            <a:spAutoFit/>
+          </a:bodyPr>
+          <a:lstStyle/>
+          <a:p>
+            <a:pPr algn="ctr">
+              <a:spcAft>
+                <a:spcPts val="800"/>
+              </a:spcAft>
+            </a:pPr>
+            <a:r>
+              <a:rPr sz="1250" b="0" i="0">
+                <a:solidFill>
+                  <a:srgbClr val="212A26"/>
+                </a:solidFill>
+                <a:latin typeface="Calibri"/>
+              </a:rPr>
+              <a:t>If yes: the first three moves, dated. If no: what would change the answer</a:t>
+            </a:r>
+          </a:p>
+        </p:txBody>
+      </p:sp>
+      <p:sp>
+        <p:nvSpPr>
+          <p:cNvPr id="15" name="Rounded Rectangle 14" descr="Key insight"/>
+          <p:cNvSpPr/>
+          <p:nvPr/>
+        </p:nvSpPr>
+        <p:spPr>
+          <a:xfrm>
+            <a:off x="548640" y="4892040"/>
+            <a:ext cx="11064240" cy="1234440"/>
+          </a:xfrm>
+          <a:prstGeom prst="roundRect">
+            <a:avLst/>
+          </a:prstGeom>
+          <a:solidFill>
+            <a:srgbClr val="EAF1EB"/>
+          </a:solidFill>
+          <a:ln>
+            <a:noFill/>
+          </a:ln>
+          <a:effectLst/>
+        </p:spPr>
+        <p:style>
+          <a:lnRef idx="1">
+            <a:schemeClr val="accent1"/>
+          </a:lnRef>
+          <a:fillRef idx="3">
+            <a:schemeClr val="accent1"/>
+          </a:fillRef>
+          <a:effectRef idx="2">
+            <a:schemeClr val="accent1"/>
+          </a:effectRef>
+          <a:fontRef idx="minor">
+            <a:schemeClr val="lt1"/>
+          </a:fontRef>
+        </p:style>
+        <p:txBody>
+          <a:bodyPr rtlCol="0" anchor="t" wrap="square" lIns="164592" rIns="164592" tIns="128016" bIns="109728"/>
+          <a:lstStyle/>
+          <a:p>
+            <a:pPr algn="l">
+              <a:spcAft>
+                <a:spcPts val="800"/>
+              </a:spcAft>
+            </a:pPr>
+            <a:r>
+              <a:rPr sz="1500" b="1">
+                <a:solidFill>
+                  <a:srgbClr val="0E4D33"/>
+                </a:solidFill>
+                <a:latin typeface="Calibri"/>
+              </a:rPr>
+              <a:t>Key insight:  </a:t>
+            </a:r>
+            <a:r>
+              <a:rPr sz="1500" b="0" i="0">
+                <a:solidFill>
+                  <a:srgbClr val="212A26"/>
+                </a:solidFill>
+                <a:latin typeface="Calibri"/>
+              </a:rPr>
+              <a:t>Feasibility asks 'CAN we, and should we?' — the verdict can be 'yes, if…' and the ifs are the report's most valuable lines.</a:t>
             </a:r>
           </a:p>
         </p:txBody>
@@ -10620,6 +14140,2924 @@
                 <a:latin typeface="Calibri"/>
               </a:rPr>
               <a:t>ends in a recommendation → analytical rules govern</a:t>
+            </a:r>
+          </a:p>
+        </p:txBody>
+      </p:sp>
+    </p:spTree>
+  </p:cSld>
+  <p:clrMapOvr>
+    <a:masterClrMapping/>
+  </p:clrMapOvr>
+</p:sld>
+</file>
+
+<file path=ppt/slides/slide30.xml><?xml version="1.0" encoding="utf-8"?>
+<p:sld xmlns:a="http://schemas.openxmlformats.org/drawingml/2006/main" xmlns:p="http://schemas.openxmlformats.org/presentationml/2006/main" xmlns:r="http://schemas.openxmlformats.org/officeDocument/2006/relationships">
+  <p:cSld>
+    <p:bg>
+      <p:bgPr>
+        <a:solidFill>
+          <a:srgbClr val="0E4D33"/>
+        </a:solidFill>
+        <a:effectLst/>
+      </p:bgPr>
+    </p:bg>
+    <p:spTree>
+      <p:nvGrpSpPr>
+        <p:cNvPr id="1" name=""/>
+        <p:cNvGrpSpPr/>
+        <p:nvPr/>
+      </p:nvGrpSpPr>
+      <p:grpSpPr/>
+      <p:sp>
+        <p:nvSpPr>
+          <p:cNvPr id="2" name="Title 1" descr="Slide title: Chart clinic"/>
+          <p:cNvSpPr>
+            <a:spLocks noGrp="1"/>
+          </p:cNvSpPr>
+          <p:nvPr>
+            <p:ph type="title"/>
+          </p:nvPr>
+        </p:nvSpPr>
+        <p:spPr>
+          <a:xfrm>
+            <a:off x="822960" y="2834640"/>
+            <a:ext cx="10515600" cy="914400"/>
+          </a:xfrm>
+        </p:spPr>
+        <p:txBody>
+          <a:bodyPr wrap="square"/>
+          <a:lstStyle/>
+          <a:p>
+            <a:pPr algn="l"/>
+            <a:r>
+              <a:rPr sz="4000" b="1">
+                <a:solidFill>
+                  <a:srgbClr val="FFFFFF"/>
+                </a:solidFill>
+                <a:latin typeface="Cambria"/>
+              </a:rPr>
+              <a:t>Chart clinic</a:t>
+            </a:r>
+          </a:p>
+        </p:txBody>
+      </p:sp>
+      <p:sp>
+        <p:nvSpPr>
+          <p:cNvPr id="3" name="TextBox 2" descr="Section number 07"/>
+          <p:cNvSpPr txBox="1"/>
+          <p:nvPr/>
+        </p:nvSpPr>
+        <p:spPr>
+          <a:xfrm>
+            <a:off x="822960" y="1188720"/>
+            <a:ext cx="2743200" cy="1463040"/>
+          </a:xfrm>
+          <a:prstGeom prst="rect">
+            <a:avLst/>
+          </a:prstGeom>
+          <a:noFill/>
+        </p:spPr>
+        <p:txBody>
+          <a:bodyPr wrap="square">
+            <a:spAutoFit/>
+          </a:bodyPr>
+          <a:lstStyle/>
+          <a:p>
+            <a:pPr algn="l">
+              <a:spcAft>
+                <a:spcPts val="800"/>
+              </a:spcAft>
+            </a:pPr>
+            <a:r>
+              <a:rPr sz="8000" b="1" i="0">
+                <a:solidFill>
+                  <a:srgbClr val="C9931A"/>
+                </a:solidFill>
+                <a:latin typeface="Cambria"/>
+              </a:rPr>
+              <a:t>07</a:t>
+            </a:r>
+          </a:p>
+        </p:txBody>
+      </p:sp>
+      <p:sp>
+        <p:nvSpPr>
+          <p:cNvPr id="4" name="TextBox 3" descr="Section note"/>
+          <p:cNvSpPr txBox="1"/>
+          <p:nvPr/>
+        </p:nvSpPr>
+        <p:spPr>
+          <a:xfrm>
+            <a:off x="822960" y="4023360"/>
+            <a:ext cx="9601200" cy="1097280"/>
+          </a:xfrm>
+          <a:prstGeom prst="rect">
+            <a:avLst/>
+          </a:prstGeom>
+          <a:noFill/>
+        </p:spPr>
+        <p:txBody>
+          <a:bodyPr wrap="square">
+            <a:spAutoFit/>
+          </a:bodyPr>
+          <a:lstStyle/>
+          <a:p>
+            <a:pPr algn="l">
+              <a:spcAft>
+                <a:spcPts val="800"/>
+              </a:spcAft>
+            </a:pPr>
+            <a:r>
+              <a:rPr sz="1700" b="0" i="0">
+                <a:solidFill>
+                  <a:srgbClr val="EAF1EB"/>
+                </a:solidFill>
+                <a:latin typeface="Calibri"/>
+              </a:rPr>
+              <a:t>Pick the chart by the question — and keep the axes honest.</a:t>
+            </a:r>
+          </a:p>
+        </p:txBody>
+      </p:sp>
+      <p:sp>
+        <p:nvSpPr>
+          <p:cNvPr id="5" name="TextBox 4" descr="Footer: BADM 225 · Chapter 9"/>
+          <p:cNvSpPr txBox="1"/>
+          <p:nvPr/>
+        </p:nvSpPr>
+        <p:spPr>
+          <a:xfrm>
+            <a:off x="502920" y="6446520"/>
+            <a:ext cx="5486400" cy="320040"/>
+          </a:xfrm>
+          <a:prstGeom prst="rect">
+            <a:avLst/>
+          </a:prstGeom>
+          <a:noFill/>
+        </p:spPr>
+        <p:txBody>
+          <a:bodyPr wrap="none">
+            <a:spAutoFit/>
+          </a:bodyPr>
+          <a:lstStyle/>
+          <a:p>
+            <a:r>
+              <a:rPr sz="1000">
+                <a:solidFill>
+                  <a:srgbClr val="5E6B64"/>
+                </a:solidFill>
+                <a:latin typeface="Calibri"/>
+              </a:rPr>
+              <a:t>BADM 225 · Chapter 9</a:t>
+            </a:r>
+          </a:p>
+        </p:txBody>
+      </p:sp>
+      <p:sp>
+        <p:nvSpPr>
+          <p:cNvPr id="6" name="TextBox 5" descr="Slide number 30"/>
+          <p:cNvSpPr txBox="1"/>
+          <p:nvPr/>
+        </p:nvSpPr>
+        <p:spPr>
+          <a:xfrm>
+            <a:off x="11247120" y="6446520"/>
+            <a:ext cx="640080" cy="320040"/>
+          </a:xfrm>
+          <a:prstGeom prst="rect">
+            <a:avLst/>
+          </a:prstGeom>
+          <a:noFill/>
+        </p:spPr>
+        <p:txBody>
+          <a:bodyPr wrap="none">
+            <a:spAutoFit/>
+          </a:bodyPr>
+          <a:lstStyle/>
+          <a:p>
+            <a:pPr algn="r"/>
+            <a:r>
+              <a:rPr sz="1000">
+                <a:solidFill>
+                  <a:srgbClr val="5E6B64"/>
+                </a:solidFill>
+                <a:latin typeface="Calibri"/>
+              </a:rPr>
+              <a:t>30</a:t>
+            </a:r>
+          </a:p>
+        </p:txBody>
+      </p:sp>
+    </p:spTree>
+  </p:cSld>
+  <p:clrMapOvr>
+    <a:masterClrMapping/>
+  </p:clrMapOvr>
+</p:sld>
+</file>
+
+<file path=ppt/slides/slide31.xml><?xml version="1.0" encoding="utf-8"?>
+<p:sld xmlns:a="http://schemas.openxmlformats.org/drawingml/2006/main" xmlns:p="http://schemas.openxmlformats.org/presentationml/2006/main" xmlns:r="http://schemas.openxmlformats.org/officeDocument/2006/relationships">
+  <p:cSld>
+    <p:bg>
+      <p:bgPr>
+        <a:solidFill>
+          <a:srgbClr val="FFFFFF"/>
+        </a:solidFill>
+        <a:effectLst/>
+      </p:bgPr>
+    </p:bg>
+    <p:spTree>
+      <p:nvGrpSpPr>
+        <p:cNvPr id="1" name=""/>
+        <p:cNvGrpSpPr/>
+        <p:nvPr/>
+      </p:nvGrpSpPr>
+      <p:grpSpPr/>
+      <p:sp>
+        <p:nvSpPr>
+          <p:cNvPr id="2" name="Title 1" descr="Slide title: Pick the chart by the reader's question"/>
+          <p:cNvSpPr>
+            <a:spLocks noGrp="1"/>
+          </p:cNvSpPr>
+          <p:nvPr>
+            <p:ph type="title"/>
+          </p:nvPr>
+        </p:nvSpPr>
+        <p:spPr>
+          <a:xfrm>
+            <a:off x="502920" y="411480"/>
+            <a:ext cx="11155680" cy="914400"/>
+          </a:xfrm>
+        </p:spPr>
+        <p:txBody>
+          <a:bodyPr wrap="square"/>
+          <a:lstStyle/>
+          <a:p>
+            <a:pPr algn="l"/>
+            <a:r>
+              <a:rPr sz="3200" b="1">
+                <a:solidFill>
+                  <a:srgbClr val="0E4D33"/>
+                </a:solidFill>
+                <a:latin typeface="Cambria"/>
+              </a:rPr>
+              <a:t>Pick the chart by the reader's question</a:t>
+            </a:r>
+          </a:p>
+        </p:txBody>
+      </p:sp>
+      <p:sp>
+        <p:nvSpPr>
+          <p:cNvPr id="3" name="TextBox 2" descr="Footer: BADM 225 · Chapter 9"/>
+          <p:cNvSpPr txBox="1"/>
+          <p:nvPr/>
+        </p:nvSpPr>
+        <p:spPr>
+          <a:xfrm>
+            <a:off x="502920" y="6446520"/>
+            <a:ext cx="5486400" cy="320040"/>
+          </a:xfrm>
+          <a:prstGeom prst="rect">
+            <a:avLst/>
+          </a:prstGeom>
+          <a:noFill/>
+        </p:spPr>
+        <p:txBody>
+          <a:bodyPr wrap="none">
+            <a:spAutoFit/>
+          </a:bodyPr>
+          <a:lstStyle/>
+          <a:p>
+            <a:r>
+              <a:rPr sz="1000">
+                <a:solidFill>
+                  <a:srgbClr val="5E6B64"/>
+                </a:solidFill>
+                <a:latin typeface="Calibri"/>
+              </a:rPr>
+              <a:t>BADM 225 · Chapter 9</a:t>
+            </a:r>
+          </a:p>
+        </p:txBody>
+      </p:sp>
+      <p:sp>
+        <p:nvSpPr>
+          <p:cNvPr id="4" name="TextBox 3" descr="Slide number 31"/>
+          <p:cNvSpPr txBox="1"/>
+          <p:nvPr/>
+        </p:nvSpPr>
+        <p:spPr>
+          <a:xfrm>
+            <a:off x="11247120" y="6446520"/>
+            <a:ext cx="640080" cy="320040"/>
+          </a:xfrm>
+          <a:prstGeom prst="rect">
+            <a:avLst/>
+          </a:prstGeom>
+          <a:noFill/>
+        </p:spPr>
+        <p:txBody>
+          <a:bodyPr wrap="none">
+            <a:spAutoFit/>
+          </a:bodyPr>
+          <a:lstStyle/>
+          <a:p>
+            <a:pPr algn="r"/>
+            <a:r>
+              <a:rPr sz="1000">
+                <a:solidFill>
+                  <a:srgbClr val="5E6B64"/>
+                </a:solidFill>
+                <a:latin typeface="Calibri"/>
+              </a:rPr>
+              <a:t>31</a:t>
+            </a:r>
+          </a:p>
+        </p:txBody>
+      </p:sp>
+      <p:sp>
+        <p:nvSpPr>
+          <p:cNvPr id="5" name="TextBox 4" descr="Context"/>
+          <p:cNvSpPr txBox="1"/>
+          <p:nvPr/>
+        </p:nvSpPr>
+        <p:spPr>
+          <a:xfrm>
+            <a:off x="548640" y="1417320"/>
+            <a:ext cx="10972800" cy="411480"/>
+          </a:xfrm>
+          <a:prstGeom prst="rect">
+            <a:avLst/>
+          </a:prstGeom>
+          <a:noFill/>
+        </p:spPr>
+        <p:txBody>
+          <a:bodyPr wrap="square">
+            <a:spAutoFit/>
+          </a:bodyPr>
+          <a:lstStyle/>
+          <a:p>
+            <a:pPr algn="l">
+              <a:spcAft>
+                <a:spcPts val="800"/>
+              </a:spcAft>
+            </a:pPr>
+            <a:r>
+              <a:rPr sz="1400" b="0" i="1">
+                <a:solidFill>
+                  <a:srgbClr val="5E6B64"/>
+                </a:solidFill>
+                <a:latin typeface="Calibri"/>
+              </a:rPr>
+              <a:t>If you can't name the reader's question, no chart type will save the exhibit.</a:t>
+            </a:r>
+          </a:p>
+        </p:txBody>
+      </p:sp>
+      <p:sp>
+        <p:nvSpPr>
+          <p:cNvPr id="6" name="Oval 5" descr="'Which is bigger?' → bar chart icon"/>
+          <p:cNvSpPr/>
+          <p:nvPr/>
+        </p:nvSpPr>
+        <p:spPr>
+          <a:xfrm>
+            <a:off x="640080" y="1975104"/>
+            <a:ext cx="566928" cy="566928"/>
+          </a:xfrm>
+          <a:prstGeom prst="ellipse">
+            <a:avLst/>
+          </a:prstGeom>
+          <a:solidFill>
+            <a:srgbClr val="0E4D33"/>
+          </a:solidFill>
+          <a:ln>
+            <a:noFill/>
+          </a:ln>
+          <a:effectLst/>
+        </p:spPr>
+        <p:style>
+          <a:lnRef idx="1">
+            <a:schemeClr val="accent1"/>
+          </a:lnRef>
+          <a:fillRef idx="3">
+            <a:schemeClr val="accent1"/>
+          </a:fillRef>
+          <a:effectRef idx="2">
+            <a:schemeClr val="accent1"/>
+          </a:effectRef>
+          <a:fontRef idx="minor">
+            <a:schemeClr val="lt1"/>
+          </a:fontRef>
+        </p:style>
+        <p:txBody>
+          <a:bodyPr rtlCol="0" anchor="ctr" lIns="0" rIns="0" tIns="0" bIns="0"/>
+          <a:lstStyle/>
+          <a:p>
+            <a:pPr algn="ctr"/>
+            <a:r>
+              <a:rPr sz="1600" b="1">
+                <a:solidFill>
+                  <a:srgbClr val="FFFFFF"/>
+                </a:solidFill>
+                <a:latin typeface="Calibri"/>
+              </a:rPr>
+              <a:t>▮</a:t>
+            </a:r>
+          </a:p>
+        </p:txBody>
+      </p:sp>
+      <p:sp>
+        <p:nvSpPr>
+          <p:cNvPr id="7" name="TextBox 6" descr="'Which is bigger?' → bar chart"/>
+          <p:cNvSpPr txBox="1"/>
+          <p:nvPr/>
+        </p:nvSpPr>
+        <p:spPr>
+          <a:xfrm>
+            <a:off x="1417320" y="1920240"/>
+            <a:ext cx="10241280" cy="1078992"/>
+          </a:xfrm>
+          <a:prstGeom prst="rect">
+            <a:avLst/>
+          </a:prstGeom>
+          <a:noFill/>
+        </p:spPr>
+        <p:txBody>
+          <a:bodyPr wrap="square">
+            <a:spAutoFit/>
+          </a:bodyPr>
+          <a:lstStyle/>
+          <a:p>
+            <a:pPr algn="l">
+              <a:spcAft>
+                <a:spcPts val="200"/>
+              </a:spcAft>
+            </a:pPr>
+            <a:r>
+              <a:rPr sz="1650" b="1" i="0">
+                <a:solidFill>
+                  <a:srgbClr val="0E4D33"/>
+                </a:solidFill>
+                <a:latin typeface="Cambria"/>
+              </a:rPr>
+              <a:t>'Which is bigger?' → bar chart</a:t>
+            </a:r>
+          </a:p>
+          <a:p>
+            <a:pPr algn="l">
+              <a:spcAft>
+                <a:spcPts val="0"/>
+              </a:spcAft>
+            </a:pPr>
+            <a:r>
+              <a:rPr sz="1550" b="0" i="0">
+                <a:solidFill>
+                  <a:srgbClr val="212A26"/>
+                </a:solidFill>
+                <a:latin typeface="Calibri"/>
+              </a:rPr>
+              <a:t>Comparison across categories — bars start at zero or they lie (next slide).</a:t>
+            </a:r>
+          </a:p>
+        </p:txBody>
+      </p:sp>
+      <p:sp>
+        <p:nvSpPr>
+          <p:cNvPr id="8" name="Oval 7" descr="'Where is it heading?' → line chart icon"/>
+          <p:cNvSpPr/>
+          <p:nvPr/>
+        </p:nvSpPr>
+        <p:spPr>
+          <a:xfrm>
+            <a:off x="640080" y="3163824"/>
+            <a:ext cx="566928" cy="566928"/>
+          </a:xfrm>
+          <a:prstGeom prst="ellipse">
+            <a:avLst/>
+          </a:prstGeom>
+          <a:solidFill>
+            <a:srgbClr val="0E4D33"/>
+          </a:solidFill>
+          <a:ln>
+            <a:noFill/>
+          </a:ln>
+          <a:effectLst/>
+        </p:spPr>
+        <p:style>
+          <a:lnRef idx="1">
+            <a:schemeClr val="accent1"/>
+          </a:lnRef>
+          <a:fillRef idx="3">
+            <a:schemeClr val="accent1"/>
+          </a:fillRef>
+          <a:effectRef idx="2">
+            <a:schemeClr val="accent1"/>
+          </a:effectRef>
+          <a:fontRef idx="minor">
+            <a:schemeClr val="lt1"/>
+          </a:fontRef>
+        </p:style>
+        <p:txBody>
+          <a:bodyPr rtlCol="0" anchor="ctr" lIns="0" rIns="0" tIns="0" bIns="0"/>
+          <a:lstStyle/>
+          <a:p>
+            <a:pPr algn="ctr"/>
+            <a:r>
+              <a:rPr sz="1600" b="1">
+                <a:solidFill>
+                  <a:srgbClr val="FFFFFF"/>
+                </a:solidFill>
+                <a:latin typeface="Calibri"/>
+              </a:rPr>
+              <a:t>📈</a:t>
+            </a:r>
+          </a:p>
+        </p:txBody>
+      </p:sp>
+      <p:sp>
+        <p:nvSpPr>
+          <p:cNvPr id="9" name="TextBox 8" descr="'Where is it heading?' → line chart"/>
+          <p:cNvSpPr txBox="1"/>
+          <p:nvPr/>
+        </p:nvSpPr>
+        <p:spPr>
+          <a:xfrm>
+            <a:off x="1417320" y="3108960"/>
+            <a:ext cx="10241280" cy="1078992"/>
+          </a:xfrm>
+          <a:prstGeom prst="rect">
+            <a:avLst/>
+          </a:prstGeom>
+          <a:noFill/>
+        </p:spPr>
+        <p:txBody>
+          <a:bodyPr wrap="square">
+            <a:spAutoFit/>
+          </a:bodyPr>
+          <a:lstStyle/>
+          <a:p>
+            <a:pPr algn="l">
+              <a:spcAft>
+                <a:spcPts val="200"/>
+              </a:spcAft>
+            </a:pPr>
+            <a:r>
+              <a:rPr sz="1650" b="1" i="0">
+                <a:solidFill>
+                  <a:srgbClr val="0E4D33"/>
+                </a:solidFill>
+                <a:latin typeface="Cambria"/>
+              </a:rPr>
+              <a:t>'Where is it heading?' → line chart</a:t>
+            </a:r>
+          </a:p>
+          <a:p>
+            <a:pPr algn="l">
+              <a:spcAft>
+                <a:spcPts val="0"/>
+              </a:spcAft>
+            </a:pPr>
+            <a:r>
+              <a:rPr sz="1550" b="0" i="0">
+                <a:solidFill>
+                  <a:srgbClr val="212A26"/>
+                </a:solidFill>
+                <a:latin typeface="Calibri"/>
+              </a:rPr>
+              <a:t>Trend over time — the workhorse for status and progress evidence.</a:t>
+            </a:r>
+          </a:p>
+        </p:txBody>
+      </p:sp>
+      <p:sp>
+        <p:nvSpPr>
+          <p:cNvPr id="10" name="Oval 9" descr="'What share of the whole?' → pie (≤4 slices) or stacked bar icon"/>
+          <p:cNvSpPr/>
+          <p:nvPr/>
+        </p:nvSpPr>
+        <p:spPr>
+          <a:xfrm>
+            <a:off x="640080" y="4352544"/>
+            <a:ext cx="566928" cy="566928"/>
+          </a:xfrm>
+          <a:prstGeom prst="ellipse">
+            <a:avLst/>
+          </a:prstGeom>
+          <a:solidFill>
+            <a:srgbClr val="0E4D33"/>
+          </a:solidFill>
+          <a:ln>
+            <a:noFill/>
+          </a:ln>
+          <a:effectLst/>
+        </p:spPr>
+        <p:style>
+          <a:lnRef idx="1">
+            <a:schemeClr val="accent1"/>
+          </a:lnRef>
+          <a:fillRef idx="3">
+            <a:schemeClr val="accent1"/>
+          </a:fillRef>
+          <a:effectRef idx="2">
+            <a:schemeClr val="accent1"/>
+          </a:effectRef>
+          <a:fontRef idx="minor">
+            <a:schemeClr val="lt1"/>
+          </a:fontRef>
+        </p:style>
+        <p:txBody>
+          <a:bodyPr rtlCol="0" anchor="ctr" lIns="0" rIns="0" tIns="0" bIns="0"/>
+          <a:lstStyle/>
+          <a:p>
+            <a:pPr algn="ctr"/>
+            <a:r>
+              <a:rPr sz="1600" b="1">
+                <a:solidFill>
+                  <a:srgbClr val="FFFFFF"/>
+                </a:solidFill>
+                <a:latin typeface="Calibri"/>
+              </a:rPr>
+              <a:t>◔</a:t>
+            </a:r>
+          </a:p>
+        </p:txBody>
+      </p:sp>
+      <p:sp>
+        <p:nvSpPr>
+          <p:cNvPr id="11" name="TextBox 10" descr="'What share of the whole?' → pie (≤4 slices) or stacked bar"/>
+          <p:cNvSpPr txBox="1"/>
+          <p:nvPr/>
+        </p:nvSpPr>
+        <p:spPr>
+          <a:xfrm>
+            <a:off x="1417320" y="4297680"/>
+            <a:ext cx="10241280" cy="1078992"/>
+          </a:xfrm>
+          <a:prstGeom prst="rect">
+            <a:avLst/>
+          </a:prstGeom>
+          <a:noFill/>
+        </p:spPr>
+        <p:txBody>
+          <a:bodyPr wrap="square">
+            <a:spAutoFit/>
+          </a:bodyPr>
+          <a:lstStyle/>
+          <a:p>
+            <a:pPr algn="l">
+              <a:spcAft>
+                <a:spcPts val="200"/>
+              </a:spcAft>
+            </a:pPr>
+            <a:r>
+              <a:rPr sz="1650" b="1" i="0">
+                <a:solidFill>
+                  <a:srgbClr val="0E4D33"/>
+                </a:solidFill>
+                <a:latin typeface="Cambria"/>
+              </a:rPr>
+              <a:t>'What share of the whole?' → pie (≤4 slices) or stacked bar</a:t>
+            </a:r>
+          </a:p>
+          <a:p>
+            <a:pPr algn="l">
+              <a:spcAft>
+                <a:spcPts val="0"/>
+              </a:spcAft>
+            </a:pPr>
+            <a:r>
+              <a:rPr sz="1550" b="0" i="0">
+                <a:solidFill>
+                  <a:srgbClr val="212A26"/>
+                </a:solidFill>
+                <a:latin typeface="Calibri"/>
+              </a:rPr>
+              <a:t>Past four slices, a pie is a mystery — use a sorted bar instead.</a:t>
+            </a:r>
+          </a:p>
+        </p:txBody>
+      </p:sp>
+      <p:sp>
+        <p:nvSpPr>
+          <p:cNvPr id="12" name="Oval 11" descr="'Is there a relationship?' → scatter icon"/>
+          <p:cNvSpPr/>
+          <p:nvPr/>
+        </p:nvSpPr>
+        <p:spPr>
+          <a:xfrm>
+            <a:off x="640080" y="5541264"/>
+            <a:ext cx="566928" cy="566928"/>
+          </a:xfrm>
+          <a:prstGeom prst="ellipse">
+            <a:avLst/>
+          </a:prstGeom>
+          <a:solidFill>
+            <a:srgbClr val="0E4D33"/>
+          </a:solidFill>
+          <a:ln>
+            <a:noFill/>
+          </a:ln>
+          <a:effectLst/>
+        </p:spPr>
+        <p:style>
+          <a:lnRef idx="1">
+            <a:schemeClr val="accent1"/>
+          </a:lnRef>
+          <a:fillRef idx="3">
+            <a:schemeClr val="accent1"/>
+          </a:fillRef>
+          <a:effectRef idx="2">
+            <a:schemeClr val="accent1"/>
+          </a:effectRef>
+          <a:fontRef idx="minor">
+            <a:schemeClr val="lt1"/>
+          </a:fontRef>
+        </p:style>
+        <p:txBody>
+          <a:bodyPr rtlCol="0" anchor="ctr" lIns="0" rIns="0" tIns="0" bIns="0"/>
+          <a:lstStyle/>
+          <a:p>
+            <a:pPr algn="ctr"/>
+            <a:r>
+              <a:rPr sz="1600" b="1">
+                <a:solidFill>
+                  <a:srgbClr val="FFFFFF"/>
+                </a:solidFill>
+                <a:latin typeface="Calibri"/>
+              </a:rPr>
+              <a:t>⣿</a:t>
+            </a:r>
+          </a:p>
+        </p:txBody>
+      </p:sp>
+      <p:sp>
+        <p:nvSpPr>
+          <p:cNvPr id="13" name="TextBox 12" descr="'Is there a relationship?' → scatter"/>
+          <p:cNvSpPr txBox="1"/>
+          <p:nvPr/>
+        </p:nvSpPr>
+        <p:spPr>
+          <a:xfrm>
+            <a:off x="1417320" y="5486400"/>
+            <a:ext cx="10241280" cy="1078992"/>
+          </a:xfrm>
+          <a:prstGeom prst="rect">
+            <a:avLst/>
+          </a:prstGeom>
+          <a:noFill/>
+        </p:spPr>
+        <p:txBody>
+          <a:bodyPr wrap="square">
+            <a:spAutoFit/>
+          </a:bodyPr>
+          <a:lstStyle/>
+          <a:p>
+            <a:pPr algn="l">
+              <a:spcAft>
+                <a:spcPts val="200"/>
+              </a:spcAft>
+            </a:pPr>
+            <a:r>
+              <a:rPr sz="1650" b="1" i="0">
+                <a:solidFill>
+                  <a:srgbClr val="0E4D33"/>
+                </a:solidFill>
+                <a:latin typeface="Cambria"/>
+              </a:rPr>
+              <a:t>'Is there a relationship?' → scatter</a:t>
+            </a:r>
+          </a:p>
+          <a:p>
+            <a:pPr algn="l">
+              <a:spcAft>
+                <a:spcPts val="0"/>
+              </a:spcAft>
+            </a:pPr>
+            <a:r>
+              <a:rPr sz="1550" b="0" i="0">
+                <a:solidFill>
+                  <a:srgbClr val="212A26"/>
+                </a:solidFill>
+                <a:latin typeface="Calibri"/>
+              </a:rPr>
+              <a:t>Two variables, every point a case — the honest way to show 'more X, more Y.'</a:t>
+            </a:r>
+          </a:p>
+        </p:txBody>
+      </p:sp>
+    </p:spTree>
+  </p:cSld>
+  <p:clrMapOvr>
+    <a:masterClrMapping/>
+  </p:clrMapOvr>
+</p:sld>
+</file>
+
+<file path=ppt/slides/slide32.xml><?xml version="1.0" encoding="utf-8"?>
+<p:sld xmlns:a="http://schemas.openxmlformats.org/drawingml/2006/main" xmlns:p="http://schemas.openxmlformats.org/presentationml/2006/main" xmlns:r="http://schemas.openxmlformats.org/officeDocument/2006/relationships">
+  <p:cSld>
+    <p:bg>
+      <p:bgPr>
+        <a:solidFill>
+          <a:srgbClr val="FFFFFF"/>
+        </a:solidFill>
+        <a:effectLst/>
+      </p:bgPr>
+    </p:bg>
+    <p:spTree>
+      <p:nvGrpSpPr>
+        <p:cNvPr id="1" name=""/>
+        <p:cNvGrpSpPr/>
+        <p:nvPr/>
+      </p:nvGrpSpPr>
+      <p:grpSpPr/>
+      <p:sp>
+        <p:nvSpPr>
+          <p:cNvPr id="2" name="Title 1" descr="Slide title: The dishonest chart hall of fame"/>
+          <p:cNvSpPr>
+            <a:spLocks noGrp="1"/>
+          </p:cNvSpPr>
+          <p:nvPr>
+            <p:ph type="title"/>
+          </p:nvPr>
+        </p:nvSpPr>
+        <p:spPr>
+          <a:xfrm>
+            <a:off x="502920" y="411480"/>
+            <a:ext cx="11155680" cy="914400"/>
+          </a:xfrm>
+        </p:spPr>
+        <p:txBody>
+          <a:bodyPr wrap="square"/>
+          <a:lstStyle/>
+          <a:p>
+            <a:pPr algn="l"/>
+            <a:r>
+              <a:rPr sz="3200" b="1">
+                <a:solidFill>
+                  <a:srgbClr val="0E4D33"/>
+                </a:solidFill>
+                <a:latin typeface="Cambria"/>
+              </a:rPr>
+              <a:t>The dishonest chart hall of fame</a:t>
+            </a:r>
+          </a:p>
+        </p:txBody>
+      </p:sp>
+      <p:sp>
+        <p:nvSpPr>
+          <p:cNvPr id="3" name="TextBox 2" descr="Footer: BADM 225 · Chapter 9"/>
+          <p:cNvSpPr txBox="1"/>
+          <p:nvPr/>
+        </p:nvSpPr>
+        <p:spPr>
+          <a:xfrm>
+            <a:off x="502920" y="6446520"/>
+            <a:ext cx="5486400" cy="320040"/>
+          </a:xfrm>
+          <a:prstGeom prst="rect">
+            <a:avLst/>
+          </a:prstGeom>
+          <a:noFill/>
+        </p:spPr>
+        <p:txBody>
+          <a:bodyPr wrap="none">
+            <a:spAutoFit/>
+          </a:bodyPr>
+          <a:lstStyle/>
+          <a:p>
+            <a:r>
+              <a:rPr sz="1000">
+                <a:solidFill>
+                  <a:srgbClr val="5E6B64"/>
+                </a:solidFill>
+                <a:latin typeface="Calibri"/>
+              </a:rPr>
+              <a:t>BADM 225 · Chapter 9</a:t>
+            </a:r>
+          </a:p>
+        </p:txBody>
+      </p:sp>
+      <p:sp>
+        <p:nvSpPr>
+          <p:cNvPr id="4" name="TextBox 3" descr="Slide number 32"/>
+          <p:cNvSpPr txBox="1"/>
+          <p:nvPr/>
+        </p:nvSpPr>
+        <p:spPr>
+          <a:xfrm>
+            <a:off x="11247120" y="6446520"/>
+            <a:ext cx="640080" cy="320040"/>
+          </a:xfrm>
+          <a:prstGeom prst="rect">
+            <a:avLst/>
+          </a:prstGeom>
+          <a:noFill/>
+        </p:spPr>
+        <p:txBody>
+          <a:bodyPr wrap="none">
+            <a:spAutoFit/>
+          </a:bodyPr>
+          <a:lstStyle/>
+          <a:p>
+            <a:pPr algn="r"/>
+            <a:r>
+              <a:rPr sz="1000">
+                <a:solidFill>
+                  <a:srgbClr val="5E6B64"/>
+                </a:solidFill>
+                <a:latin typeface="Calibri"/>
+              </a:rPr>
+              <a:t>32</a:t>
+            </a:r>
+          </a:p>
+        </p:txBody>
+      </p:sp>
+      <p:sp>
+        <p:nvSpPr>
+          <p:cNvPr id="5" name="TextBox 4" descr="Key points"/>
+          <p:cNvSpPr txBox="1"/>
+          <p:nvPr/>
+        </p:nvSpPr>
+        <p:spPr>
+          <a:xfrm>
+            <a:off x="548640" y="1554480"/>
+            <a:ext cx="11064240" cy="4663440"/>
+          </a:xfrm>
+          <a:prstGeom prst="rect">
+            <a:avLst/>
+          </a:prstGeom>
+          <a:noFill/>
+        </p:spPr>
+        <p:txBody>
+          <a:bodyPr wrap="square">
+            <a:spAutoFit/>
+          </a:bodyPr>
+          <a:lstStyle/>
+          <a:p>
+            <a:pPr algn="l">
+              <a:spcAft>
+                <a:spcPts val="1200"/>
+              </a:spcAft>
+            </a:pPr>
+            <a:r>
+              <a:rPr sz="1700">
+                <a:solidFill>
+                  <a:srgbClr val="8A6410"/>
+                </a:solidFill>
+                <a:latin typeface="Calibri"/>
+              </a:rPr>
+              <a:t>▪  </a:t>
+            </a:r>
+            <a:r>
+              <a:rPr sz="1700" b="1">
+                <a:solidFill>
+                  <a:srgbClr val="0E4D33"/>
+                </a:solidFill>
+                <a:latin typeface="Calibri"/>
+              </a:rPr>
+              <a:t>The truncated bar axis:  </a:t>
+            </a:r>
+            <a:r>
+              <a:rPr sz="1700" b="0" i="0">
+                <a:solidFill>
+                  <a:srgbClr val="212A26"/>
+                </a:solidFill>
+                <a:latin typeface="Calibri"/>
+              </a:rPr>
+              <a:t>bars starting at 40 make a 42-vs-44 difference look like a doubling — zero the axis, or switch to a dot plot and SAY the axis is cropped.</a:t>
+            </a:r>
+          </a:p>
+          <a:p>
+            <a:pPr algn="l">
+              <a:spcAft>
+                <a:spcPts val="1200"/>
+              </a:spcAft>
+            </a:pPr>
+            <a:r>
+              <a:rPr sz="1700">
+                <a:solidFill>
+                  <a:srgbClr val="8A6410"/>
+                </a:solidFill>
+                <a:latin typeface="Calibri"/>
+              </a:rPr>
+              <a:t>▪  </a:t>
+            </a:r>
+            <a:r>
+              <a:rPr sz="1700" b="1">
+                <a:solidFill>
+                  <a:srgbClr val="0E4D33"/>
+                </a:solidFill>
+                <a:latin typeface="Calibri"/>
+              </a:rPr>
+              <a:t>The dual-axis special:  </a:t>
+            </a:r>
+            <a:r>
+              <a:rPr sz="1700" b="0" i="0">
+                <a:solidFill>
+                  <a:srgbClr val="212A26"/>
+                </a:solidFill>
+                <a:latin typeface="Calibri"/>
+              </a:rPr>
+              <a:t>two lines, two scales, one implied correlation — the axes were chosen to make the lines dance together.</a:t>
+            </a:r>
+          </a:p>
+          <a:p>
+            <a:pPr algn="l">
+              <a:spcAft>
+                <a:spcPts val="1200"/>
+              </a:spcAft>
+            </a:pPr>
+            <a:r>
+              <a:rPr sz="1700">
+                <a:solidFill>
+                  <a:srgbClr val="8A6410"/>
+                </a:solidFill>
+                <a:latin typeface="Calibri"/>
+              </a:rPr>
+              <a:t>▪  </a:t>
+            </a:r>
+            <a:r>
+              <a:rPr sz="1700" b="1">
+                <a:solidFill>
+                  <a:srgbClr val="0E4D33"/>
+                </a:solidFill>
+                <a:latin typeface="Calibri"/>
+              </a:rPr>
+              <a:t>The cherry-picked window:  </a:t>
+            </a:r>
+            <a:r>
+              <a:rPr sz="1700" b="0" i="0">
+                <a:solidFill>
+                  <a:srgbClr val="212A26"/>
+                </a:solidFill>
+                <a:latin typeface="Calibri"/>
+              </a:rPr>
+              <a:t>the trend since March looks great because February was the cliff — show the full relevant period or disclose the cut.</a:t>
+            </a:r>
+          </a:p>
+          <a:p>
+            <a:pPr algn="l">
+              <a:spcAft>
+                <a:spcPts val="1200"/>
+              </a:spcAft>
+            </a:pPr>
+            <a:r>
+              <a:rPr sz="1700">
+                <a:solidFill>
+                  <a:srgbClr val="8A6410"/>
+                </a:solidFill>
+                <a:latin typeface="Calibri"/>
+              </a:rPr>
+              <a:t>▪  </a:t>
+            </a:r>
+            <a:r>
+              <a:rPr sz="1700" b="1">
+                <a:solidFill>
+                  <a:srgbClr val="0E4D33"/>
+                </a:solidFill>
+                <a:latin typeface="Calibri"/>
+              </a:rPr>
+              <a:t>The 3-D pie:  </a:t>
+            </a:r>
+            <a:r>
+              <a:rPr sz="1700" b="0" i="0">
+                <a:solidFill>
+                  <a:srgbClr val="212A26"/>
+                </a:solidFill>
+                <a:latin typeface="Calibri"/>
+              </a:rPr>
+              <a:t>perspective inflates the front slice — decoration that changes the data. Flat, always.</a:t>
+            </a:r>
+          </a:p>
+          <a:p>
+            <a:pPr algn="l">
+              <a:spcAft>
+                <a:spcPts val="1200"/>
+              </a:spcAft>
+            </a:pPr>
+            <a:r>
+              <a:rPr sz="1700">
+                <a:solidFill>
+                  <a:srgbClr val="8A6410"/>
+                </a:solidFill>
+                <a:latin typeface="Calibri"/>
+              </a:rPr>
+              <a:t>▪  </a:t>
+            </a:r>
+            <a:r>
+              <a:rPr sz="1700" b="1">
+                <a:solidFill>
+                  <a:srgbClr val="0E4D33"/>
+                </a:solidFill>
+                <a:latin typeface="Calibri"/>
+              </a:rPr>
+              <a:t>Every one of these can be built from TRUE numbers.  </a:t>
+            </a:r>
+            <a:r>
+              <a:rPr sz="1700" b="0" i="0">
+                <a:solidFill>
+                  <a:srgbClr val="212A26"/>
+                </a:solidFill>
+                <a:latin typeface="Calibri"/>
+              </a:rPr>
+              <a:t>That's the point: honest data, dishonest picture — and your name on the slide.</a:t>
+            </a:r>
+          </a:p>
+        </p:txBody>
+      </p:sp>
+    </p:spTree>
+  </p:cSld>
+  <p:clrMapOvr>
+    <a:masterClrMapping/>
+  </p:clrMapOvr>
+</p:sld>
+</file>
+
+<file path=ppt/slides/slide33.xml><?xml version="1.0" encoding="utf-8"?>
+<p:sld xmlns:a="http://schemas.openxmlformats.org/drawingml/2006/main" xmlns:p="http://schemas.openxmlformats.org/presentationml/2006/main" xmlns:r="http://schemas.openxmlformats.org/officeDocument/2006/relationships">
+  <p:cSld>
+    <p:bg>
+      <p:bgPr>
+        <a:solidFill>
+          <a:srgbClr val="FFFFFF"/>
+        </a:solidFill>
+        <a:effectLst/>
+      </p:bgPr>
+    </p:bg>
+    <p:spTree>
+      <p:nvGrpSpPr>
+        <p:cNvPr id="1" name=""/>
+        <p:cNvGrpSpPr/>
+        <p:nvPr/>
+      </p:nvGrpSpPr>
+      <p:grpSpPr/>
+      <p:sp>
+        <p:nvSpPr>
+          <p:cNvPr id="2" name="Title 1" descr="Slide title: Color, labels, and the squint test"/>
+          <p:cNvSpPr>
+            <a:spLocks noGrp="1"/>
+          </p:cNvSpPr>
+          <p:nvPr>
+            <p:ph type="title"/>
+          </p:nvPr>
+        </p:nvSpPr>
+        <p:spPr>
+          <a:xfrm>
+            <a:off x="502920" y="411480"/>
+            <a:ext cx="11155680" cy="914400"/>
+          </a:xfrm>
+        </p:spPr>
+        <p:txBody>
+          <a:bodyPr wrap="square"/>
+          <a:lstStyle/>
+          <a:p>
+            <a:pPr algn="l"/>
+            <a:r>
+              <a:rPr sz="3200" b="1">
+                <a:solidFill>
+                  <a:srgbClr val="0E4D33"/>
+                </a:solidFill>
+                <a:latin typeface="Cambria"/>
+              </a:rPr>
+              <a:t>Color, labels, and the squint test</a:t>
+            </a:r>
+          </a:p>
+        </p:txBody>
+      </p:sp>
+      <p:sp>
+        <p:nvSpPr>
+          <p:cNvPr id="3" name="TextBox 2" descr="Footer: BADM 225 · Chapter 9"/>
+          <p:cNvSpPr txBox="1"/>
+          <p:nvPr/>
+        </p:nvSpPr>
+        <p:spPr>
+          <a:xfrm>
+            <a:off x="502920" y="6446520"/>
+            <a:ext cx="5486400" cy="320040"/>
+          </a:xfrm>
+          <a:prstGeom prst="rect">
+            <a:avLst/>
+          </a:prstGeom>
+          <a:noFill/>
+        </p:spPr>
+        <p:txBody>
+          <a:bodyPr wrap="none">
+            <a:spAutoFit/>
+          </a:bodyPr>
+          <a:lstStyle/>
+          <a:p>
+            <a:r>
+              <a:rPr sz="1000">
+                <a:solidFill>
+                  <a:srgbClr val="5E6B64"/>
+                </a:solidFill>
+                <a:latin typeface="Calibri"/>
+              </a:rPr>
+              <a:t>BADM 225 · Chapter 9</a:t>
+            </a:r>
+          </a:p>
+        </p:txBody>
+      </p:sp>
+      <p:sp>
+        <p:nvSpPr>
+          <p:cNvPr id="4" name="TextBox 3" descr="Slide number 33"/>
+          <p:cNvSpPr txBox="1"/>
+          <p:nvPr/>
+        </p:nvSpPr>
+        <p:spPr>
+          <a:xfrm>
+            <a:off x="11247120" y="6446520"/>
+            <a:ext cx="640080" cy="320040"/>
+          </a:xfrm>
+          <a:prstGeom prst="rect">
+            <a:avLst/>
+          </a:prstGeom>
+          <a:noFill/>
+        </p:spPr>
+        <p:txBody>
+          <a:bodyPr wrap="none">
+            <a:spAutoFit/>
+          </a:bodyPr>
+          <a:lstStyle/>
+          <a:p>
+            <a:pPr algn="r"/>
+            <a:r>
+              <a:rPr sz="1000">
+                <a:solidFill>
+                  <a:srgbClr val="5E6B64"/>
+                </a:solidFill>
+                <a:latin typeface="Calibri"/>
+              </a:rPr>
+              <a:t>33</a:t>
+            </a:r>
+          </a:p>
+        </p:txBody>
+      </p:sp>
+      <p:sp>
+        <p:nvSpPr>
+          <p:cNvPr id="5" name="TextBox 4" descr="Key points"/>
+          <p:cNvSpPr txBox="1"/>
+          <p:nvPr/>
+        </p:nvSpPr>
+        <p:spPr>
+          <a:xfrm>
+            <a:off x="548640" y="1554480"/>
+            <a:ext cx="11064240" cy="4663440"/>
+          </a:xfrm>
+          <a:prstGeom prst="rect">
+            <a:avLst/>
+          </a:prstGeom>
+          <a:noFill/>
+        </p:spPr>
+        <p:txBody>
+          <a:bodyPr wrap="square">
+            <a:spAutoFit/>
+          </a:bodyPr>
+          <a:lstStyle/>
+          <a:p>
+            <a:pPr algn="l">
+              <a:spcAft>
+                <a:spcPts val="1200"/>
+              </a:spcAft>
+            </a:pPr>
+            <a:r>
+              <a:rPr sz="1700">
+                <a:solidFill>
+                  <a:srgbClr val="8A6410"/>
+                </a:solidFill>
+                <a:latin typeface="Calibri"/>
+              </a:rPr>
+              <a:t>▪  </a:t>
+            </a:r>
+            <a:r>
+              <a:rPr sz="1700" b="1">
+                <a:solidFill>
+                  <a:srgbClr val="0E4D33"/>
+                </a:solidFill>
+                <a:latin typeface="Calibri"/>
+              </a:rPr>
+              <a:t>One color for data, one for THE point.  </a:t>
+            </a:r>
+            <a:r>
+              <a:rPr sz="1700" b="0" i="0">
+                <a:solidFill>
+                  <a:srgbClr val="212A26"/>
+                </a:solidFill>
+                <a:latin typeface="Calibri"/>
+              </a:rPr>
+              <a:t>The forest-green bars and the single gold bar — highlight is a spending decision; spend it once (Chapter 3's emphasis rule).</a:t>
+            </a:r>
+          </a:p>
+          <a:p>
+            <a:pPr algn="l">
+              <a:spcAft>
+                <a:spcPts val="1200"/>
+              </a:spcAft>
+            </a:pPr>
+            <a:r>
+              <a:rPr sz="1700">
+                <a:solidFill>
+                  <a:srgbClr val="8A6410"/>
+                </a:solidFill>
+                <a:latin typeface="Calibri"/>
+              </a:rPr>
+              <a:t>▪  </a:t>
+            </a:r>
+            <a:r>
+              <a:rPr sz="1700" b="1">
+                <a:solidFill>
+                  <a:srgbClr val="0E4D33"/>
+                </a:solidFill>
+                <a:latin typeface="Calibri"/>
+              </a:rPr>
+              <a:t>Never encode meaning in color alone.  </a:t>
+            </a:r>
+            <a:r>
+              <a:rPr sz="1700" b="0" i="0">
+                <a:solidFill>
+                  <a:srgbClr val="212A26"/>
+                </a:solidFill>
+                <a:latin typeface="Calibri"/>
+              </a:rPr>
+              <a:t>A tenth of your male readers can't see the red/green distinction — pair color with position, shape, or a label.</a:t>
+            </a:r>
+          </a:p>
+          <a:p>
+            <a:pPr algn="l">
+              <a:spcAft>
+                <a:spcPts val="1200"/>
+              </a:spcAft>
+            </a:pPr>
+            <a:r>
+              <a:rPr sz="1700">
+                <a:solidFill>
+                  <a:srgbClr val="8A6410"/>
+                </a:solidFill>
+                <a:latin typeface="Calibri"/>
+              </a:rPr>
+              <a:t>▪  </a:t>
+            </a:r>
+            <a:r>
+              <a:rPr sz="1700" b="1">
+                <a:solidFill>
+                  <a:srgbClr val="0E4D33"/>
+                </a:solidFill>
+                <a:latin typeface="Calibri"/>
+              </a:rPr>
+              <a:t>Label the data directly when you can.  </a:t>
+            </a:r>
+            <a:r>
+              <a:rPr sz="1700" b="0" i="0">
+                <a:solidFill>
+                  <a:srgbClr val="212A26"/>
+                </a:solidFill>
+                <a:latin typeface="Calibri"/>
+              </a:rPr>
+              <a:t>Values on the bars beat a legend across the room — every eye-trip to a legend is a chance to lose the reader.</a:t>
+            </a:r>
+          </a:p>
+          <a:p>
+            <a:pPr algn="l">
+              <a:spcAft>
+                <a:spcPts val="1200"/>
+              </a:spcAft>
+            </a:pPr>
+            <a:r>
+              <a:rPr sz="1700">
+                <a:solidFill>
+                  <a:srgbClr val="8A6410"/>
+                </a:solidFill>
+                <a:latin typeface="Calibri"/>
+              </a:rPr>
+              <a:t>▪  </a:t>
+            </a:r>
+            <a:r>
+              <a:rPr sz="1700" b="1">
+                <a:solidFill>
+                  <a:srgbClr val="0E4D33"/>
+                </a:solidFill>
+                <a:latin typeface="Calibri"/>
+              </a:rPr>
+              <a:t>The squint test:  </a:t>
+            </a:r>
+            <a:r>
+              <a:rPr sz="1700" b="0" i="0">
+                <a:solidFill>
+                  <a:srgbClr val="212A26"/>
+                </a:solidFill>
+                <a:latin typeface="Calibri"/>
+              </a:rPr>
+              <a:t>blur your eyes; whatever still stands out is what the chart actually says. If that isn't your point, the chart isn't done.</a:t>
+            </a:r>
+          </a:p>
+        </p:txBody>
+      </p:sp>
+    </p:spTree>
+  </p:cSld>
+  <p:clrMapOvr>
+    <a:masterClrMapping/>
+  </p:clrMapOvr>
+</p:sld>
+</file>
+
+<file path=ppt/slides/slide34.xml><?xml version="1.0" encoding="utf-8"?>
+<p:sld xmlns:a="http://schemas.openxmlformats.org/drawingml/2006/main" xmlns:p="http://schemas.openxmlformats.org/presentationml/2006/main" xmlns:r="http://schemas.openxmlformats.org/officeDocument/2006/relationships">
+  <p:cSld>
+    <p:bg>
+      <p:bgPr>
+        <a:solidFill>
+          <a:srgbClr val="FFFFFF"/>
+        </a:solidFill>
+        <a:effectLst/>
+      </p:bgPr>
+    </p:bg>
+    <p:spTree>
+      <p:nvGrpSpPr>
+        <p:cNvPr id="1" name=""/>
+        <p:cNvGrpSpPr/>
+        <p:nvPr/>
+      </p:nvGrpSpPr>
+      <p:grpSpPr/>
+      <p:sp>
+        <p:nvSpPr>
+          <p:cNvPr id="2" name="Title 1" descr="Slide title: Key takeaways"/>
+          <p:cNvSpPr>
+            <a:spLocks noGrp="1"/>
+          </p:cNvSpPr>
+          <p:nvPr>
+            <p:ph type="title"/>
+          </p:nvPr>
+        </p:nvSpPr>
+        <p:spPr>
+          <a:xfrm>
+            <a:off x="502920" y="411480"/>
+            <a:ext cx="11155680" cy="914400"/>
+          </a:xfrm>
+        </p:spPr>
+        <p:txBody>
+          <a:bodyPr wrap="square"/>
+          <a:lstStyle/>
+          <a:p>
+            <a:pPr algn="l"/>
+            <a:r>
+              <a:rPr sz="3200" b="1">
+                <a:solidFill>
+                  <a:srgbClr val="0E4D33"/>
+                </a:solidFill>
+                <a:latin typeface="Cambria"/>
+              </a:rPr>
+              <a:t>Key takeaways</a:t>
+            </a:r>
+          </a:p>
+        </p:txBody>
+      </p:sp>
+      <p:sp>
+        <p:nvSpPr>
+          <p:cNvPr id="3" name="TextBox 2" descr="Footer: BADM 225 · Chapter 9"/>
+          <p:cNvSpPr txBox="1"/>
+          <p:nvPr/>
+        </p:nvSpPr>
+        <p:spPr>
+          <a:xfrm>
+            <a:off x="502920" y="6446520"/>
+            <a:ext cx="5486400" cy="320040"/>
+          </a:xfrm>
+          <a:prstGeom prst="rect">
+            <a:avLst/>
+          </a:prstGeom>
+          <a:noFill/>
+        </p:spPr>
+        <p:txBody>
+          <a:bodyPr wrap="none">
+            <a:spAutoFit/>
+          </a:bodyPr>
+          <a:lstStyle/>
+          <a:p>
+            <a:r>
+              <a:rPr sz="1000">
+                <a:solidFill>
+                  <a:srgbClr val="5E6B64"/>
+                </a:solidFill>
+                <a:latin typeface="Calibri"/>
+              </a:rPr>
+              <a:t>BADM 225 · Chapter 9</a:t>
+            </a:r>
+          </a:p>
+        </p:txBody>
+      </p:sp>
+      <p:sp>
+        <p:nvSpPr>
+          <p:cNvPr id="4" name="TextBox 3" descr="Slide number 34"/>
+          <p:cNvSpPr txBox="1"/>
+          <p:nvPr/>
+        </p:nvSpPr>
+        <p:spPr>
+          <a:xfrm>
+            <a:off x="11247120" y="6446520"/>
+            <a:ext cx="640080" cy="320040"/>
+          </a:xfrm>
+          <a:prstGeom prst="rect">
+            <a:avLst/>
+          </a:prstGeom>
+          <a:noFill/>
+        </p:spPr>
+        <p:txBody>
+          <a:bodyPr wrap="none">
+            <a:spAutoFit/>
+          </a:bodyPr>
+          <a:lstStyle/>
+          <a:p>
+            <a:pPr algn="r"/>
+            <a:r>
+              <a:rPr sz="1000">
+                <a:solidFill>
+                  <a:srgbClr val="5E6B64"/>
+                </a:solidFill>
+                <a:latin typeface="Calibri"/>
+              </a:rPr>
+              <a:t>34</a:t>
+            </a:r>
+          </a:p>
+        </p:txBody>
+      </p:sp>
+      <p:sp>
+        <p:nvSpPr>
+          <p:cNvPr id="5" name="Oval 4" descr="Checkmark"/>
+          <p:cNvSpPr/>
+          <p:nvPr/>
+        </p:nvSpPr>
+        <p:spPr>
+          <a:xfrm>
+            <a:off x="640080" y="1572768"/>
+            <a:ext cx="420624" cy="420624"/>
+          </a:xfrm>
+          <a:prstGeom prst="ellipse">
+            <a:avLst/>
+          </a:prstGeom>
+          <a:solidFill>
+            <a:srgbClr val="0E4D33"/>
+          </a:solidFill>
+          <a:ln>
+            <a:noFill/>
+          </a:ln>
+          <a:effectLst/>
+        </p:spPr>
+        <p:style>
+          <a:lnRef idx="1">
+            <a:schemeClr val="accent1"/>
+          </a:lnRef>
+          <a:fillRef idx="3">
+            <a:schemeClr val="accent1"/>
+          </a:fillRef>
+          <a:effectRef idx="2">
+            <a:schemeClr val="accent1"/>
+          </a:effectRef>
+          <a:fontRef idx="minor">
+            <a:schemeClr val="lt1"/>
+          </a:fontRef>
+        </p:style>
+        <p:txBody>
+          <a:bodyPr rtlCol="0" anchor="ctr" lIns="0" rIns="0" tIns="0" bIns="0"/>
+          <a:lstStyle/>
+          <a:p>
+            <a:pPr algn="ctr"/>
+            <a:r>
+              <a:rPr sz="1100" b="1">
+                <a:solidFill>
+                  <a:srgbClr val="FFFFFF"/>
+                </a:solidFill>
+                <a:latin typeface="Calibri"/>
+              </a:rPr>
+              <a:t>✓</a:t>
+            </a:r>
+          </a:p>
+        </p:txBody>
+      </p:sp>
+      <p:sp>
+        <p:nvSpPr>
+          <p:cNvPr id="6" name="TextBox 5" descr="Takeaway 1"/>
+          <p:cNvSpPr txBox="1"/>
+          <p:nvPr/>
+        </p:nvSpPr>
+        <p:spPr>
+          <a:xfrm>
+            <a:off x="1325880" y="1554480"/>
+            <a:ext cx="10332720" cy="640080"/>
+          </a:xfrm>
+          <a:prstGeom prst="rect">
+            <a:avLst/>
+          </a:prstGeom>
+          <a:noFill/>
+        </p:spPr>
+        <p:txBody>
+          <a:bodyPr wrap="square">
+            <a:spAutoFit/>
+          </a:bodyPr>
+          <a:lstStyle/>
+          <a:p>
+            <a:pPr algn="l">
+              <a:spcAft>
+                <a:spcPts val="800"/>
+              </a:spcAft>
+            </a:pPr>
+            <a:r>
+              <a:rPr sz="1550" b="0" i="0">
+                <a:solidFill>
+                  <a:srgbClr val="212A26"/>
+                </a:solidFill>
+                <a:latin typeface="Calibri"/>
+              </a:rPr>
+              <a:t>Classify by the reader's question; a recommendation ending invokes analytical rules.</a:t>
+            </a:r>
+          </a:p>
+        </p:txBody>
+      </p:sp>
+      <p:sp>
+        <p:nvSpPr>
+          <p:cNvPr id="7" name="Oval 6" descr="Checkmark"/>
+          <p:cNvSpPr/>
+          <p:nvPr/>
+        </p:nvSpPr>
+        <p:spPr>
+          <a:xfrm>
+            <a:off x="640080" y="2212848"/>
+            <a:ext cx="420624" cy="420624"/>
+          </a:xfrm>
+          <a:prstGeom prst="ellipse">
+            <a:avLst/>
+          </a:prstGeom>
+          <a:solidFill>
+            <a:srgbClr val="0E4D33"/>
+          </a:solidFill>
+          <a:ln>
+            <a:noFill/>
+          </a:ln>
+          <a:effectLst/>
+        </p:spPr>
+        <p:style>
+          <a:lnRef idx="1">
+            <a:schemeClr val="accent1"/>
+          </a:lnRef>
+          <a:fillRef idx="3">
+            <a:schemeClr val="accent1"/>
+          </a:fillRef>
+          <a:effectRef idx="2">
+            <a:schemeClr val="accent1"/>
+          </a:effectRef>
+          <a:fontRef idx="minor">
+            <a:schemeClr val="lt1"/>
+          </a:fontRef>
+        </p:style>
+        <p:txBody>
+          <a:bodyPr rtlCol="0" anchor="ctr" lIns="0" rIns="0" tIns="0" bIns="0"/>
+          <a:lstStyle/>
+          <a:p>
+            <a:pPr algn="ctr"/>
+            <a:r>
+              <a:rPr sz="1100" b="1">
+                <a:solidFill>
+                  <a:srgbClr val="FFFFFF"/>
+                </a:solidFill>
+                <a:latin typeface="Calibri"/>
+              </a:rPr>
+              <a:t>✓</a:t>
+            </a:r>
+          </a:p>
+        </p:txBody>
+      </p:sp>
+      <p:sp>
+        <p:nvSpPr>
+          <p:cNvPr id="8" name="TextBox 7" descr="Takeaway 2"/>
+          <p:cNvSpPr txBox="1"/>
+          <p:nvPr/>
+        </p:nvSpPr>
+        <p:spPr>
+          <a:xfrm>
+            <a:off x="1325880" y="2194560"/>
+            <a:ext cx="10332720" cy="640080"/>
+          </a:xfrm>
+          <a:prstGeom prst="rect">
+            <a:avLst/>
+          </a:prstGeom>
+          <a:noFill/>
+        </p:spPr>
+        <p:txBody>
+          <a:bodyPr wrap="square">
+            <a:spAutoFit/>
+          </a:bodyPr>
+          <a:lstStyle/>
+          <a:p>
+            <a:pPr algn="l">
+              <a:spcAft>
+                <a:spcPts val="800"/>
+              </a:spcAft>
+            </a:pPr>
+            <a:r>
+              <a:rPr sz="1550" b="0" i="0">
+                <a:solidFill>
+                  <a:srgbClr val="212A26"/>
+                </a:solidFill>
+                <a:latin typeface="Calibri"/>
+              </a:rPr>
+              <a:t>Conclude before structuring — then build the pyramid: answer, MECE reasons, evidence.</a:t>
+            </a:r>
+          </a:p>
+        </p:txBody>
+      </p:sp>
+      <p:sp>
+        <p:nvSpPr>
+          <p:cNvPr id="9" name="Oval 8" descr="Checkmark"/>
+          <p:cNvSpPr/>
+          <p:nvPr/>
+        </p:nvSpPr>
+        <p:spPr>
+          <a:xfrm>
+            <a:off x="640080" y="2852928"/>
+            <a:ext cx="420624" cy="420624"/>
+          </a:xfrm>
+          <a:prstGeom prst="ellipse">
+            <a:avLst/>
+          </a:prstGeom>
+          <a:solidFill>
+            <a:srgbClr val="0E4D33"/>
+          </a:solidFill>
+          <a:ln>
+            <a:noFill/>
+          </a:ln>
+          <a:effectLst/>
+        </p:spPr>
+        <p:style>
+          <a:lnRef idx="1">
+            <a:schemeClr val="accent1"/>
+          </a:lnRef>
+          <a:fillRef idx="3">
+            <a:schemeClr val="accent1"/>
+          </a:fillRef>
+          <a:effectRef idx="2">
+            <a:schemeClr val="accent1"/>
+          </a:effectRef>
+          <a:fontRef idx="minor">
+            <a:schemeClr val="lt1"/>
+          </a:fontRef>
+        </p:style>
+        <p:txBody>
+          <a:bodyPr rtlCol="0" anchor="ctr" lIns="0" rIns="0" tIns="0" bIns="0"/>
+          <a:lstStyle/>
+          <a:p>
+            <a:pPr algn="ctr"/>
+            <a:r>
+              <a:rPr sz="1100" b="1">
+                <a:solidFill>
+                  <a:srgbClr val="FFFFFF"/>
+                </a:solidFill>
+                <a:latin typeface="Calibri"/>
+              </a:rPr>
+              <a:t>✓</a:t>
+            </a:r>
+          </a:p>
+        </p:txBody>
+      </p:sp>
+      <p:sp>
+        <p:nvSpPr>
+          <p:cNvPr id="10" name="TextBox 9" descr="Takeaway 3"/>
+          <p:cNvSpPr txBox="1"/>
+          <p:nvPr/>
+        </p:nvSpPr>
+        <p:spPr>
+          <a:xfrm>
+            <a:off x="1325880" y="2834640"/>
+            <a:ext cx="10332720" cy="640080"/>
+          </a:xfrm>
+          <a:prstGeom prst="rect">
+            <a:avLst/>
+          </a:prstGeom>
+          <a:noFill/>
+        </p:spPr>
+        <p:txBody>
+          <a:bodyPr wrap="square">
+            <a:spAutoFit/>
+          </a:bodyPr>
+          <a:lstStyle/>
+          <a:p>
+            <a:pPr algn="l">
+              <a:spcAft>
+                <a:spcPts val="800"/>
+              </a:spcAft>
+            </a:pPr>
+            <a:r>
+              <a:rPr sz="1550" b="0" i="0">
+                <a:solidFill>
+                  <a:srgbClr val="212A26"/>
+                </a:solidFill>
+                <a:latin typeface="Calibri"/>
+              </a:rPr>
+              <a:t>Status lines carry verdicts; honest yellows beat green-to-red surprises — the audit is retrospective.</a:t>
+            </a:r>
+          </a:p>
+        </p:txBody>
+      </p:sp>
+      <p:sp>
+        <p:nvSpPr>
+          <p:cNvPr id="11" name="Oval 10" descr="Checkmark"/>
+          <p:cNvSpPr/>
+          <p:nvPr/>
+        </p:nvSpPr>
+        <p:spPr>
+          <a:xfrm>
+            <a:off x="640080" y="3493008"/>
+            <a:ext cx="420624" cy="420624"/>
+          </a:xfrm>
+          <a:prstGeom prst="ellipse">
+            <a:avLst/>
+          </a:prstGeom>
+          <a:solidFill>
+            <a:srgbClr val="0E4D33"/>
+          </a:solidFill>
+          <a:ln>
+            <a:noFill/>
+          </a:ln>
+          <a:effectLst/>
+        </p:spPr>
+        <p:style>
+          <a:lnRef idx="1">
+            <a:schemeClr val="accent1"/>
+          </a:lnRef>
+          <a:fillRef idx="3">
+            <a:schemeClr val="accent1"/>
+          </a:fillRef>
+          <a:effectRef idx="2">
+            <a:schemeClr val="accent1"/>
+          </a:effectRef>
+          <a:fontRef idx="minor">
+            <a:schemeClr val="lt1"/>
+          </a:fontRef>
+        </p:style>
+        <p:txBody>
+          <a:bodyPr rtlCol="0" anchor="ctr" lIns="0" rIns="0" tIns="0" bIns="0"/>
+          <a:lstStyle/>
+          <a:p>
+            <a:pPr algn="ctr"/>
+            <a:r>
+              <a:rPr sz="1100" b="1">
+                <a:solidFill>
+                  <a:srgbClr val="FFFFFF"/>
+                </a:solidFill>
+                <a:latin typeface="Calibri"/>
+              </a:rPr>
+              <a:t>✓</a:t>
+            </a:r>
+          </a:p>
+        </p:txBody>
+      </p:sp>
+      <p:sp>
+        <p:nvSpPr>
+          <p:cNvPr id="12" name="TextBox 11" descr="Takeaway 4"/>
+          <p:cNvSpPr txBox="1"/>
+          <p:nvPr/>
+        </p:nvSpPr>
+        <p:spPr>
+          <a:xfrm>
+            <a:off x="1325880" y="3474720"/>
+            <a:ext cx="10332720" cy="640080"/>
+          </a:xfrm>
+          <a:prstGeom prst="rect">
+            <a:avLst/>
+          </a:prstGeom>
+          <a:noFill/>
+        </p:spPr>
+        <p:txBody>
+          <a:bodyPr wrap="square">
+            <a:spAutoFit/>
+          </a:bodyPr>
+          <a:lstStyle/>
+          <a:p>
+            <a:pPr algn="l">
+              <a:spcAft>
+                <a:spcPts val="800"/>
+              </a:spcAft>
+            </a:pPr>
+            <a:r>
+              <a:rPr sz="1550" b="0" i="0">
+                <a:solidFill>
+                  <a:srgbClr val="212A26"/>
+                </a:solidFill>
+                <a:latin typeface="Calibri"/>
+              </a:rPr>
+              <a:t>Minutes: decisions, owners, deadlines — one page, same day. Incidents: actors, causes, owners, prevention.</a:t>
+            </a:r>
+          </a:p>
+        </p:txBody>
+      </p:sp>
+      <p:sp>
+        <p:nvSpPr>
+          <p:cNvPr id="13" name="Oval 12" descr="Checkmark"/>
+          <p:cNvSpPr/>
+          <p:nvPr/>
+        </p:nvSpPr>
+        <p:spPr>
+          <a:xfrm>
+            <a:off x="640080" y="4133088"/>
+            <a:ext cx="420624" cy="420624"/>
+          </a:xfrm>
+          <a:prstGeom prst="ellipse">
+            <a:avLst/>
+          </a:prstGeom>
+          <a:solidFill>
+            <a:srgbClr val="0E4D33"/>
+          </a:solidFill>
+          <a:ln>
+            <a:noFill/>
+          </a:ln>
+          <a:effectLst/>
+        </p:spPr>
+        <p:style>
+          <a:lnRef idx="1">
+            <a:schemeClr val="accent1"/>
+          </a:lnRef>
+          <a:fillRef idx="3">
+            <a:schemeClr val="accent1"/>
+          </a:fillRef>
+          <a:effectRef idx="2">
+            <a:schemeClr val="accent1"/>
+          </a:effectRef>
+          <a:fontRef idx="minor">
+            <a:schemeClr val="lt1"/>
+          </a:fontRef>
+        </p:style>
+        <p:txBody>
+          <a:bodyPr rtlCol="0" anchor="ctr" lIns="0" rIns="0" tIns="0" bIns="0"/>
+          <a:lstStyle/>
+          <a:p>
+            <a:pPr algn="ctr"/>
+            <a:r>
+              <a:rPr sz="1100" b="1">
+                <a:solidFill>
+                  <a:srgbClr val="FFFFFF"/>
+                </a:solidFill>
+                <a:latin typeface="Calibri"/>
+              </a:rPr>
+              <a:t>✓</a:t>
+            </a:r>
+          </a:p>
+        </p:txBody>
+      </p:sp>
+      <p:sp>
+        <p:nvSpPr>
+          <p:cNvPr id="14" name="TextBox 13" descr="Takeaway 5"/>
+          <p:cNvSpPr txBox="1"/>
+          <p:nvPr/>
+        </p:nvSpPr>
+        <p:spPr>
+          <a:xfrm>
+            <a:off x="1325880" y="4114800"/>
+            <a:ext cx="10332720" cy="640080"/>
+          </a:xfrm>
+          <a:prstGeom prst="rect">
+            <a:avLst/>
+          </a:prstGeom>
+          <a:noFill/>
+        </p:spPr>
+        <p:txBody>
+          <a:bodyPr wrap="square">
+            <a:spAutoFit/>
+          </a:bodyPr>
+          <a:lstStyle/>
+          <a:p>
+            <a:pPr algn="l">
+              <a:spcAft>
+                <a:spcPts val="800"/>
+              </a:spcAft>
+            </a:pPr>
+            <a:r>
+              <a:rPr sz="1550" b="0" i="0">
+                <a:solidFill>
+                  <a:srgbClr val="212A26"/>
+                </a:solidFill>
+                <a:latin typeface="Calibri"/>
+              </a:rPr>
+              <a:t>Displays make one point, announced in the title, on honest axes.</a:t>
+            </a:r>
+          </a:p>
+        </p:txBody>
+      </p:sp>
+      <p:sp>
+        <p:nvSpPr>
+          <p:cNvPr id="15" name="Oval 14" descr="Checkmark"/>
+          <p:cNvSpPr/>
+          <p:nvPr/>
+        </p:nvSpPr>
+        <p:spPr>
+          <a:xfrm>
+            <a:off x="640080" y="4773168"/>
+            <a:ext cx="420624" cy="420624"/>
+          </a:xfrm>
+          <a:prstGeom prst="ellipse">
+            <a:avLst/>
+          </a:prstGeom>
+          <a:solidFill>
+            <a:srgbClr val="0E4D33"/>
+          </a:solidFill>
+          <a:ln>
+            <a:noFill/>
+          </a:ln>
+          <a:effectLst/>
+        </p:spPr>
+        <p:style>
+          <a:lnRef idx="1">
+            <a:schemeClr val="accent1"/>
+          </a:lnRef>
+          <a:fillRef idx="3">
+            <a:schemeClr val="accent1"/>
+          </a:fillRef>
+          <a:effectRef idx="2">
+            <a:schemeClr val="accent1"/>
+          </a:effectRef>
+          <a:fontRef idx="minor">
+            <a:schemeClr val="lt1"/>
+          </a:fontRef>
+        </p:style>
+        <p:txBody>
+          <a:bodyPr rtlCol="0" anchor="ctr" lIns="0" rIns="0" tIns="0" bIns="0"/>
+          <a:lstStyle/>
+          <a:p>
+            <a:pPr algn="ctr"/>
+            <a:r>
+              <a:rPr sz="1100" b="1">
+                <a:solidFill>
+                  <a:srgbClr val="FFFFFF"/>
+                </a:solidFill>
+                <a:latin typeface="Calibri"/>
+              </a:rPr>
+              <a:t>✓</a:t>
+            </a:r>
+          </a:p>
+        </p:txBody>
+      </p:sp>
+      <p:sp>
+        <p:nvSpPr>
+          <p:cNvPr id="16" name="TextBox 15" descr="Takeaway 6"/>
+          <p:cNvSpPr txBox="1"/>
+          <p:nvPr/>
+        </p:nvSpPr>
+        <p:spPr>
+          <a:xfrm>
+            <a:off x="1325880" y="4754880"/>
+            <a:ext cx="10332720" cy="640080"/>
+          </a:xfrm>
+          <a:prstGeom prst="rect">
+            <a:avLst/>
+          </a:prstGeom>
+          <a:noFill/>
+        </p:spPr>
+        <p:txBody>
+          <a:bodyPr wrap="square">
+            <a:spAutoFit/>
+          </a:bodyPr>
+          <a:lstStyle/>
+          <a:p>
+            <a:pPr algn="l">
+              <a:spcAft>
+                <a:spcPts val="800"/>
+              </a:spcAft>
+            </a:pPr>
+            <a:r>
+              <a:rPr sz="1550" b="0" i="0">
+                <a:solidFill>
+                  <a:srgbClr val="212A26"/>
+                </a:solidFill>
+                <a:latin typeface="Calibri"/>
+              </a:rPr>
+              <a:t>Persuasive AND complete: the skeptic test governs the analytical line.</a:t>
+            </a:r>
+          </a:p>
+        </p:txBody>
+      </p:sp>
+      <p:sp>
+        <p:nvSpPr>
+          <p:cNvPr id="17" name="Rounded Rectangle 16" descr="Practice reminder"/>
+          <p:cNvSpPr/>
+          <p:nvPr/>
+        </p:nvSpPr>
+        <p:spPr>
+          <a:xfrm>
+            <a:off x="548640" y="5468112"/>
+            <a:ext cx="10424160" cy="685800"/>
+          </a:xfrm>
+          <a:prstGeom prst="roundRect">
+            <a:avLst/>
+          </a:prstGeom>
+          <a:solidFill>
+            <a:srgbClr val="0E4D33"/>
+          </a:solidFill>
+          <a:ln>
+            <a:noFill/>
+          </a:ln>
+          <a:effectLst/>
+        </p:spPr>
+        <p:style>
+          <a:lnRef idx="1">
+            <a:schemeClr val="accent1"/>
+          </a:lnRef>
+          <a:fillRef idx="3">
+            <a:schemeClr val="accent1"/>
+          </a:fillRef>
+          <a:effectRef idx="2">
+            <a:schemeClr val="accent1"/>
+          </a:effectRef>
+          <a:fontRef idx="minor">
+            <a:schemeClr val="lt1"/>
+          </a:fontRef>
+        </p:style>
+        <p:txBody>
+          <a:bodyPr rtlCol="0" anchor="t" wrap="square" lIns="164592" rIns="164592" tIns="128016" bIns="109728"/>
+          <a:lstStyle/>
+          <a:p>
+            <a:pPr algn="l">
+              <a:spcAft>
+                <a:spcPts val="0"/>
+              </a:spcAft>
+            </a:pPr>
+            <a:r>
+              <a:rPr sz="1450" b="1" i="0">
+                <a:solidFill>
+                  <a:srgbClr val="FFFFFF"/>
+                </a:solidFill>
+                <a:latin typeface="Calibri"/>
+              </a:rPr>
+              <a:t>Practice now: course site → Chapter 9 → Practice, then the graded homework before the weekly deadline.</a:t>
+            </a:r>
+          </a:p>
+        </p:txBody>
+      </p:sp>
+    </p:spTree>
+  </p:cSld>
+  <p:clrMapOvr>
+    <a:masterClrMapping/>
+  </p:clrMapOvr>
+</p:sld>
+</file>
+
+<file path=ppt/slides/slide35.xml><?xml version="1.0" encoding="utf-8"?>
+<p:sld xmlns:a="http://schemas.openxmlformats.org/drawingml/2006/main" xmlns:p="http://schemas.openxmlformats.org/presentationml/2006/main" xmlns:r="http://schemas.openxmlformats.org/officeDocument/2006/relationships">
+  <p:cSld>
+    <p:bg>
+      <p:bgPr>
+        <a:solidFill>
+          <a:srgbClr val="EAF1EB"/>
+        </a:solidFill>
+        <a:effectLst/>
+      </p:bgPr>
+    </p:bg>
+    <p:spTree>
+      <p:nvGrpSpPr>
+        <p:cNvPr id="1" name=""/>
+        <p:cNvGrpSpPr/>
+        <p:nvPr/>
+      </p:nvGrpSpPr>
+      <p:grpSpPr/>
+      <p:sp>
+        <p:nvSpPr>
+          <p:cNvPr id="2" name="Title 1" descr="Slide title: Worth keeping"/>
+          <p:cNvSpPr>
+            <a:spLocks noGrp="1"/>
+          </p:cNvSpPr>
+          <p:nvPr>
+            <p:ph type="title"/>
+          </p:nvPr>
+        </p:nvSpPr>
+        <p:spPr>
+          <a:xfrm>
+            <a:off x="502920" y="411480"/>
+            <a:ext cx="11155680" cy="914400"/>
+          </a:xfrm>
+        </p:spPr>
+        <p:txBody>
+          <a:bodyPr wrap="square"/>
+          <a:lstStyle/>
+          <a:p>
+            <a:pPr algn="l"/>
+            <a:r>
+              <a:rPr sz="3400" b="1">
+                <a:solidFill>
+                  <a:srgbClr val="0E4D33"/>
+                </a:solidFill>
+                <a:latin typeface="Cambria"/>
+              </a:rPr>
+              <a:t>Worth keeping</a:t>
+            </a:r>
+          </a:p>
+        </p:txBody>
+      </p:sp>
+      <p:sp>
+        <p:nvSpPr>
+          <p:cNvPr id="3" name="TextBox 2" descr="Quotation"/>
+          <p:cNvSpPr txBox="1"/>
+          <p:nvPr/>
+        </p:nvSpPr>
+        <p:spPr>
+          <a:xfrm>
+            <a:off x="1280160" y="2194560"/>
+            <a:ext cx="9601200" cy="2377440"/>
+          </a:xfrm>
+          <a:prstGeom prst="rect">
+            <a:avLst/>
+          </a:prstGeom>
+          <a:noFill/>
+        </p:spPr>
+        <p:txBody>
+          <a:bodyPr wrap="square">
+            <a:spAutoFit/>
+          </a:bodyPr>
+          <a:lstStyle/>
+          <a:p>
+            <a:pPr algn="l">
+              <a:spcAft>
+                <a:spcPts val="800"/>
+              </a:spcAft>
+            </a:pPr>
+            <a:r>
+              <a:rPr sz="2700" b="0" i="1">
+                <a:solidFill>
+                  <a:srgbClr val="212A26"/>
+                </a:solidFill>
+                <a:latin typeface="Cambria"/>
+              </a:rPr>
+              <a:t>“Every report is an audition you didn't know was scheduled — judged by readers you may never meet, on the one skill organizations can't fake caring about: knowing what matters.”</a:t>
+            </a:r>
+          </a:p>
+        </p:txBody>
+      </p:sp>
+      <p:sp>
+        <p:nvSpPr>
+          <p:cNvPr id="4" name="TextBox 3" descr="Attribution"/>
+          <p:cNvSpPr txBox="1"/>
+          <p:nvPr/>
+        </p:nvSpPr>
+        <p:spPr>
+          <a:xfrm>
+            <a:off x="1280160" y="4754880"/>
+            <a:ext cx="9601200" cy="548640"/>
+          </a:xfrm>
+          <a:prstGeom prst="rect">
+            <a:avLst/>
+          </a:prstGeom>
+          <a:noFill/>
+        </p:spPr>
+        <p:txBody>
+          <a:bodyPr wrap="square">
+            <a:spAutoFit/>
+          </a:bodyPr>
+          <a:lstStyle/>
+          <a:p>
+            <a:pPr algn="l">
+              <a:spcAft>
+                <a:spcPts val="800"/>
+              </a:spcAft>
+            </a:pPr>
+            <a:r>
+              <a:rPr sz="1600" b="0" i="0">
+                <a:solidFill>
+                  <a:srgbClr val="5E6B64"/>
+                </a:solidFill>
+                <a:latin typeface="Calibri"/>
+              </a:rPr>
+              <a:t>— this chapter, compressed</a:t>
+            </a:r>
+          </a:p>
+        </p:txBody>
+      </p:sp>
+      <p:sp>
+        <p:nvSpPr>
+          <p:cNvPr id="5" name="TextBox 4" descr="Footer: BADM 225 · Chapter 9"/>
+          <p:cNvSpPr txBox="1"/>
+          <p:nvPr/>
+        </p:nvSpPr>
+        <p:spPr>
+          <a:xfrm>
+            <a:off x="502920" y="6446520"/>
+            <a:ext cx="5486400" cy="320040"/>
+          </a:xfrm>
+          <a:prstGeom prst="rect">
+            <a:avLst/>
+          </a:prstGeom>
+          <a:noFill/>
+        </p:spPr>
+        <p:txBody>
+          <a:bodyPr wrap="none">
+            <a:spAutoFit/>
+          </a:bodyPr>
+          <a:lstStyle/>
+          <a:p>
+            <a:r>
+              <a:rPr sz="1000">
+                <a:solidFill>
+                  <a:srgbClr val="5E6B64"/>
+                </a:solidFill>
+                <a:latin typeface="Calibri"/>
+              </a:rPr>
+              <a:t>BADM 225 · Chapter 9</a:t>
+            </a:r>
+          </a:p>
+        </p:txBody>
+      </p:sp>
+      <p:sp>
+        <p:nvSpPr>
+          <p:cNvPr id="6" name="TextBox 5" descr="Slide number 35"/>
+          <p:cNvSpPr txBox="1"/>
+          <p:nvPr/>
+        </p:nvSpPr>
+        <p:spPr>
+          <a:xfrm>
+            <a:off x="11247120" y="6446520"/>
+            <a:ext cx="640080" cy="320040"/>
+          </a:xfrm>
+          <a:prstGeom prst="rect">
+            <a:avLst/>
+          </a:prstGeom>
+          <a:noFill/>
+        </p:spPr>
+        <p:txBody>
+          <a:bodyPr wrap="none">
+            <a:spAutoFit/>
+          </a:bodyPr>
+          <a:lstStyle/>
+          <a:p>
+            <a:pPr algn="r"/>
+            <a:r>
+              <a:rPr sz="1000">
+                <a:solidFill>
+                  <a:srgbClr val="5E6B64"/>
+                </a:solidFill>
+                <a:latin typeface="Calibri"/>
+              </a:rPr>
+              <a:t>35</a:t>
+            </a:r>
+          </a:p>
+        </p:txBody>
+      </p:sp>
+    </p:spTree>
+  </p:cSld>
+  <p:clrMapOvr>
+    <a:masterClrMapping/>
+  </p:clrMapOvr>
+</p:sld>
+</file>
+
+<file path=ppt/slides/slide36.xml><?xml version="1.0" encoding="utf-8"?>
+<p:sld xmlns:a="http://schemas.openxmlformats.org/drawingml/2006/main" xmlns:p="http://schemas.openxmlformats.org/presentationml/2006/main" xmlns:r="http://schemas.openxmlformats.org/officeDocument/2006/relationships">
+  <p:cSld>
+    <p:bg>
+      <p:bgPr>
+        <a:solidFill>
+          <a:srgbClr val="0E4D33"/>
+        </a:solidFill>
+        <a:effectLst/>
+      </p:bgPr>
+    </p:bg>
+    <p:spTree>
+      <p:nvGrpSpPr>
+        <p:cNvPr id="1" name=""/>
+        <p:cNvGrpSpPr/>
+        <p:nvPr/>
+      </p:nvGrpSpPr>
+      <p:grpSpPr/>
+      <p:sp>
+        <p:nvSpPr>
+          <p:cNvPr id="2" name="Title 1" descr="Slide title: Discussion questions"/>
+          <p:cNvSpPr>
+            <a:spLocks noGrp="1"/>
+          </p:cNvSpPr>
+          <p:nvPr>
+            <p:ph type="title"/>
+          </p:nvPr>
+        </p:nvSpPr>
+        <p:spPr>
+          <a:xfrm>
+            <a:off x="502920" y="411480"/>
+            <a:ext cx="11155680" cy="914400"/>
+          </a:xfrm>
+        </p:spPr>
+        <p:txBody>
+          <a:bodyPr wrap="square"/>
+          <a:lstStyle/>
+          <a:p>
+            <a:pPr algn="l"/>
+            <a:r>
+              <a:rPr sz="3400" b="1">
+                <a:solidFill>
+                  <a:srgbClr val="FFFFFF"/>
+                </a:solidFill>
+                <a:latin typeface="Cambria"/>
+              </a:rPr>
+              <a:t>Discussion questions</a:t>
+            </a:r>
+          </a:p>
+        </p:txBody>
+      </p:sp>
+      <p:sp>
+        <p:nvSpPr>
+          <p:cNvPr id="3" name="TextBox 2" descr="Discussion questions"/>
+          <p:cNvSpPr txBox="1"/>
+          <p:nvPr/>
+        </p:nvSpPr>
+        <p:spPr>
+          <a:xfrm>
+            <a:off x="731520" y="1737360"/>
+            <a:ext cx="10698480" cy="4480560"/>
+          </a:xfrm>
+          <a:prstGeom prst="rect">
+            <a:avLst/>
+          </a:prstGeom>
+          <a:noFill/>
+        </p:spPr>
+        <p:txBody>
+          <a:bodyPr wrap="square">
+            <a:spAutoFit/>
+          </a:bodyPr>
+          <a:lstStyle/>
+          <a:p>
+            <a:pPr algn="l">
+              <a:spcAft>
+                <a:spcPts val="1800"/>
+              </a:spcAft>
+            </a:pPr>
+            <a:r>
+              <a:rPr sz="1800" b="1">
+                <a:solidFill>
+                  <a:srgbClr val="C9931A"/>
+                </a:solidFill>
+                <a:latin typeface="Calibri"/>
+              </a:rPr>
+              <a:t>1.  </a:t>
+            </a:r>
+            <a:r>
+              <a:rPr sz="1800" b="0" i="0">
+                <a:solidFill>
+                  <a:srgbClr val="FFFFFF"/>
+                </a:solidFill>
+                <a:latin typeface="Calibri"/>
+              </a:rPr>
+              <a:t>Bring a real report and build its pyramid on one page: summit, reasons, orphans.</a:t>
+            </a:r>
+          </a:p>
+          <a:p>
+            <a:pPr algn="l">
+              <a:spcAft>
+                <a:spcPts val="1800"/>
+              </a:spcAft>
+            </a:pPr>
+            <a:r>
+              <a:rPr sz="1800" b="1">
+                <a:solidFill>
+                  <a:srgbClr val="C9931A"/>
+                </a:solidFill>
+                <a:latin typeface="Calibri"/>
+              </a:rPr>
+              <a:t>2.  </a:t>
+            </a:r>
+            <a:r>
+              <a:rPr sz="1800" b="0" i="0">
+                <a:solidFill>
+                  <a:srgbClr val="FFFFFF"/>
+                </a:solidFill>
+                <a:latin typeface="Calibri"/>
+              </a:rPr>
+              <a:t>Why do organizations reward the reporting behaviors they claim to hate? Locate the incentive.</a:t>
+            </a:r>
+          </a:p>
+          <a:p>
+            <a:pPr algn="l">
+              <a:spcAft>
+                <a:spcPts val="1800"/>
+              </a:spcAft>
+            </a:pPr>
+            <a:r>
+              <a:rPr sz="1800" b="1">
+                <a:solidFill>
+                  <a:srgbClr val="C9931A"/>
+                </a:solidFill>
+                <a:latin typeface="Calibri"/>
+              </a:rPr>
+              <a:t>3.  </a:t>
+            </a:r>
+            <a:r>
+              <a:rPr sz="1800" b="0" i="0">
+                <a:solidFill>
+                  <a:srgbClr val="FFFFFF"/>
+                </a:solidFill>
+                <a:latin typeface="Calibri"/>
+              </a:rPr>
+              <a:t>Defend or attack: the one-page report is harder and more senior than the twelve-page report.</a:t>
+            </a:r>
+          </a:p>
+          <a:p>
+            <a:pPr algn="l">
+              <a:spcAft>
+                <a:spcPts val="1800"/>
+              </a:spcAft>
+            </a:pPr>
+            <a:r>
+              <a:rPr sz="1800" b="1">
+                <a:solidFill>
+                  <a:srgbClr val="C9931A"/>
+                </a:solidFill>
+                <a:latin typeface="Calibri"/>
+              </a:rPr>
+              <a:t>4.  </a:t>
+            </a:r>
+            <a:r>
+              <a:rPr sz="1800" b="0" i="0">
+                <a:solidFill>
+                  <a:srgbClr val="FFFFFF"/>
+                </a:solidFill>
+                <a:latin typeface="Calibri"/>
+              </a:rPr>
+              <a:t>Design a definition of “green” that a judgment call cannot stretch.</a:t>
+            </a:r>
+          </a:p>
+          <a:p>
+            <a:pPr algn="l">
+              <a:spcAft>
+                <a:spcPts val="1800"/>
+              </a:spcAft>
+            </a:pPr>
+            <a:r>
+              <a:rPr sz="1800" b="1">
+                <a:solidFill>
+                  <a:srgbClr val="C9931A"/>
+                </a:solidFill>
+                <a:latin typeface="Calibri"/>
+              </a:rPr>
+              <a:t>5.  </a:t>
+            </a:r>
+            <a:r>
+              <a:rPr sz="1800" b="0" i="0">
+                <a:solidFill>
+                  <a:srgbClr val="FFFFFF"/>
+                </a:solidFill>
+                <a:latin typeface="Calibri"/>
+              </a:rPr>
+              <a:t>Find a misleading-but-true chart in the wild; name the mechanism and rebuild it honestly.</a:t>
+            </a:r>
+          </a:p>
+        </p:txBody>
+      </p:sp>
+      <p:sp>
+        <p:nvSpPr>
+          <p:cNvPr id="4" name="TextBox 3" descr="Footer"/>
+          <p:cNvSpPr txBox="1"/>
+          <p:nvPr/>
+        </p:nvSpPr>
+        <p:spPr>
+          <a:xfrm>
+            <a:off x="502920" y="6446520"/>
+            <a:ext cx="5486400" cy="320040"/>
+          </a:xfrm>
+          <a:prstGeom prst="rect">
+            <a:avLst/>
+          </a:prstGeom>
+          <a:noFill/>
+        </p:spPr>
+        <p:txBody>
+          <a:bodyPr wrap="none">
+            <a:spAutoFit/>
+          </a:bodyPr>
+          <a:lstStyle/>
+          <a:p>
+            <a:r>
+              <a:rPr sz="1000">
+                <a:solidFill>
+                  <a:srgbClr val="A8C4B2"/>
+                </a:solidFill>
+                <a:latin typeface="Calibri"/>
+              </a:rPr>
+              <a:t>BADM 225 · Chapter 9</a:t>
+            </a:r>
+          </a:p>
+        </p:txBody>
+      </p:sp>
+    </p:spTree>
+  </p:cSld>
+  <p:clrMapOvr>
+    <a:masterClrMapping/>
+  </p:clrMapOvr>
+</p:sld>
+</file>
+
+<file path=ppt/slides/slide37.xml><?xml version="1.0" encoding="utf-8"?>
+<p:sld xmlns:a="http://schemas.openxmlformats.org/drawingml/2006/main" xmlns:p="http://schemas.openxmlformats.org/presentationml/2006/main" xmlns:r="http://schemas.openxmlformats.org/officeDocument/2006/relationships">
+  <p:cSld>
+    <p:bg>
+      <p:bgPr>
+        <a:solidFill>
+          <a:srgbClr val="FFFFFF"/>
+        </a:solidFill>
+        <a:effectLst/>
+      </p:bgPr>
+    </p:bg>
+    <p:spTree>
+      <p:nvGrpSpPr>
+        <p:cNvPr id="1" name=""/>
+        <p:cNvGrpSpPr/>
+        <p:nvPr/>
+      </p:nvGrpSpPr>
+      <p:grpSpPr/>
+      <p:sp>
+        <p:nvSpPr>
+          <p:cNvPr id="2" name="Title 1" descr="Slide title: Your next steps"/>
+          <p:cNvSpPr>
+            <a:spLocks noGrp="1"/>
+          </p:cNvSpPr>
+          <p:nvPr>
+            <p:ph type="title"/>
+          </p:nvPr>
+        </p:nvSpPr>
+        <p:spPr>
+          <a:xfrm>
+            <a:off x="502920" y="411480"/>
+            <a:ext cx="11155680" cy="914400"/>
+          </a:xfrm>
+        </p:spPr>
+        <p:txBody>
+          <a:bodyPr wrap="square"/>
+          <a:lstStyle/>
+          <a:p>
+            <a:pPr algn="l"/>
+            <a:r>
+              <a:rPr sz="3200" b="1">
+                <a:solidFill>
+                  <a:srgbClr val="0E4D33"/>
+                </a:solidFill>
+                <a:latin typeface="Cambria"/>
+              </a:rPr>
+              <a:t>Your next steps</a:t>
+            </a:r>
+          </a:p>
+        </p:txBody>
+      </p:sp>
+      <p:sp>
+        <p:nvSpPr>
+          <p:cNvPr id="3" name="TextBox 2" descr="Footer: BADM 225 · Chapter 9"/>
+          <p:cNvSpPr txBox="1"/>
+          <p:nvPr/>
+        </p:nvSpPr>
+        <p:spPr>
+          <a:xfrm>
+            <a:off x="502920" y="6446520"/>
+            <a:ext cx="5486400" cy="320040"/>
+          </a:xfrm>
+          <a:prstGeom prst="rect">
+            <a:avLst/>
+          </a:prstGeom>
+          <a:noFill/>
+        </p:spPr>
+        <p:txBody>
+          <a:bodyPr wrap="none">
+            <a:spAutoFit/>
+          </a:bodyPr>
+          <a:lstStyle/>
+          <a:p>
+            <a:r>
+              <a:rPr sz="1000">
+                <a:solidFill>
+                  <a:srgbClr val="5E6B64"/>
+                </a:solidFill>
+                <a:latin typeface="Calibri"/>
+              </a:rPr>
+              <a:t>BADM 225 · Chapter 9</a:t>
+            </a:r>
+          </a:p>
+        </p:txBody>
+      </p:sp>
+      <p:sp>
+        <p:nvSpPr>
+          <p:cNvPr id="4" name="TextBox 3" descr="Slide number 37"/>
+          <p:cNvSpPr txBox="1"/>
+          <p:nvPr/>
+        </p:nvSpPr>
+        <p:spPr>
+          <a:xfrm>
+            <a:off x="11247120" y="6446520"/>
+            <a:ext cx="640080" cy="320040"/>
+          </a:xfrm>
+          <a:prstGeom prst="rect">
+            <a:avLst/>
+          </a:prstGeom>
+          <a:noFill/>
+        </p:spPr>
+        <p:txBody>
+          <a:bodyPr wrap="none">
+            <a:spAutoFit/>
+          </a:bodyPr>
+          <a:lstStyle/>
+          <a:p>
+            <a:pPr algn="r"/>
+            <a:r>
+              <a:rPr sz="1000">
+                <a:solidFill>
+                  <a:srgbClr val="5E6B64"/>
+                </a:solidFill>
+                <a:latin typeface="Calibri"/>
+              </a:rPr>
+              <a:t>37</a:t>
+            </a:r>
+          </a:p>
+        </p:txBody>
+      </p:sp>
+      <p:sp>
+        <p:nvSpPr>
+          <p:cNvPr id="5" name="TextBox 4" descr="Key points"/>
+          <p:cNvSpPr txBox="1"/>
+          <p:nvPr/>
+        </p:nvSpPr>
+        <p:spPr>
+          <a:xfrm>
+            <a:off x="548640" y="1554480"/>
+            <a:ext cx="11064240" cy="4663440"/>
+          </a:xfrm>
+          <a:prstGeom prst="rect">
+            <a:avLst/>
+          </a:prstGeom>
+          <a:noFill/>
+        </p:spPr>
+        <p:txBody>
+          <a:bodyPr wrap="square">
+            <a:spAutoFit/>
+          </a:bodyPr>
+          <a:lstStyle/>
+          <a:p>
+            <a:pPr algn="l">
+              <a:spcAft>
+                <a:spcPts val="1200"/>
+              </a:spcAft>
+            </a:pPr>
+            <a:r>
+              <a:rPr sz="1700">
+                <a:solidFill>
+                  <a:srgbClr val="8A6410"/>
+                </a:solidFill>
+                <a:latin typeface="Calibri"/>
+              </a:rPr>
+              <a:t>▪  </a:t>
+            </a:r>
+            <a:r>
+              <a:rPr sz="1700" b="1">
+                <a:solidFill>
+                  <a:srgbClr val="0E4D33"/>
+                </a:solidFill>
+                <a:latin typeface="Calibri"/>
+              </a:rPr>
+              <a:t>Practice:  </a:t>
+            </a:r>
+            <a:r>
+              <a:rPr sz="1700" b="0" i="0">
+                <a:solidFill>
+                  <a:srgbClr val="212A26"/>
+                </a:solidFill>
+                <a:latin typeface="Calibri"/>
+              </a:rPr>
+              <a:t>Course site → Chapter 9 → Practice questions (instant feedback, unlimited tries).</a:t>
+            </a:r>
+          </a:p>
+          <a:p>
+            <a:pPr algn="l">
+              <a:spcAft>
+                <a:spcPts val="1200"/>
+              </a:spcAft>
+            </a:pPr>
+            <a:r>
+              <a:rPr sz="1700">
+                <a:solidFill>
+                  <a:srgbClr val="8A6410"/>
+                </a:solidFill>
+                <a:latin typeface="Calibri"/>
+              </a:rPr>
+              <a:t>▪  </a:t>
+            </a:r>
+            <a:r>
+              <a:rPr sz="1700" b="1">
+                <a:solidFill>
+                  <a:srgbClr val="0E4D33"/>
+                </a:solidFill>
+                <a:latin typeface="Calibri"/>
+              </a:rPr>
+              <a:t>Graded:  </a:t>
+            </a:r>
+            <a:r>
+              <a:rPr sz="1700" b="0" i="0">
+                <a:solidFill>
+                  <a:srgbClr val="212A26"/>
+                </a:solidFill>
+                <a:latin typeface="Calibri"/>
+              </a:rPr>
+              <a:t>Complete the Chapter 9 homework on the site; paste your completion code into the Blackboard assignment before the weekly deadline.</a:t>
+            </a:r>
+          </a:p>
+          <a:p>
+            <a:pPr algn="l">
+              <a:spcAft>
+                <a:spcPts val="1200"/>
+              </a:spcAft>
+            </a:pPr>
+            <a:r>
+              <a:rPr sz="1700">
+                <a:solidFill>
+                  <a:srgbClr val="8A6410"/>
+                </a:solidFill>
+                <a:latin typeface="Calibri"/>
+              </a:rPr>
+              <a:t>▪  </a:t>
+            </a:r>
+            <a:r>
+              <a:rPr sz="1700" b="1">
+                <a:solidFill>
+                  <a:srgbClr val="0E4D33"/>
+                </a:solidFill>
+                <a:latin typeface="Calibri"/>
+              </a:rPr>
+              <a:t>Apply:  </a:t>
+            </a:r>
+            <a:r>
+              <a:rPr sz="1700" b="0" i="0">
+                <a:solidFill>
+                  <a:srgbClr val="212A26"/>
+                </a:solidFill>
+                <a:latin typeface="Calibri"/>
+              </a:rPr>
+              <a:t>Your market-research assignment's sections are a pyramid scaffold — this chapter is its manual.</a:t>
+            </a:r>
+          </a:p>
+          <a:p>
+            <a:pPr algn="l">
+              <a:spcAft>
+                <a:spcPts val="1200"/>
+              </a:spcAft>
+            </a:pPr>
+            <a:r>
+              <a:rPr sz="1700">
+                <a:solidFill>
+                  <a:srgbClr val="8A6410"/>
+                </a:solidFill>
+                <a:latin typeface="Calibri"/>
+              </a:rPr>
+              <a:t>▪  </a:t>
+            </a:r>
+            <a:r>
+              <a:rPr sz="1700" b="1">
+                <a:solidFill>
+                  <a:srgbClr val="0E4D33"/>
+                </a:solidFill>
+                <a:latin typeface="Calibri"/>
+              </a:rPr>
+              <a:t>Read:  </a:t>
+            </a:r>
+            <a:r>
+              <a:rPr sz="1700" b="0" i="0">
+                <a:solidFill>
+                  <a:srgbClr val="212A26"/>
+                </a:solidFill>
+                <a:latin typeface="Calibri"/>
+              </a:rPr>
+              <a:t>The Chapter 9 Study Guide — the full workshop, templates, and both cases.</a:t>
+            </a:r>
+          </a:p>
+          <a:p>
+            <a:pPr algn="l">
+              <a:spcAft>
+                <a:spcPts val="1200"/>
+              </a:spcAft>
+            </a:pPr>
+            <a:r>
+              <a:rPr sz="1700">
+                <a:solidFill>
+                  <a:srgbClr val="8A6410"/>
+                </a:solidFill>
+                <a:latin typeface="Calibri"/>
+              </a:rPr>
+              <a:t>▪  </a:t>
+            </a:r>
+            <a:r>
+              <a:rPr sz="1700" b="1">
+                <a:solidFill>
+                  <a:srgbClr val="0E4D33"/>
+                </a:solidFill>
+                <a:latin typeface="Calibri"/>
+              </a:rPr>
+              <a:t>Coming next:  </a:t>
+            </a:r>
+            <a:r>
+              <a:rPr sz="1700" b="0" i="0">
+                <a:solidFill>
+                  <a:srgbClr val="212A26"/>
+                </a:solidFill>
+                <a:latin typeface="Calibri"/>
+              </a:rPr>
+              <a:t>Chapter 10 — proposals and formal reports: the upgrade kit for the same engine.</a:t>
             </a:r>
           </a:p>
         </p:txBody>

--- a/slides/ch09-informal-reports.pptx
+++ b/slides/ch09-informal-reports.pptx
@@ -6310,7 +6310,7 @@
                 </a:solidFill>
                 <a:latin typeface="Calibri"/>
               </a:rPr>
-              <a:t>BADM 225 · Chapter 9</a:t>
+              <a:t>BADM 225 · Chapter 9  ·  © Derek D. Bussan</a:t>
             </a:r>
           </a:p>
         </p:txBody>
@@ -6597,7 +6597,7 @@
                 </a:solidFill>
                 <a:latin typeface="Calibri"/>
               </a:rPr>
-              <a:t>BADM 225 · Chapter 9</a:t>
+              <a:t>BADM 225 · Chapter 9  ·  © Derek D. Bussan</a:t>
             </a:r>
           </a:p>
         </p:txBody>
@@ -7023,7 +7023,7 @@
                 </a:solidFill>
                 <a:latin typeface="Calibri"/>
               </a:rPr>
-              <a:t>BADM 225 · Chapter 9</a:t>
+              <a:t>BADM 225 · Chapter 9  ·  © Derek D. Bussan</a:t>
             </a:r>
           </a:p>
         </p:txBody>
@@ -7755,7 +7755,7 @@
                 </a:solidFill>
                 <a:latin typeface="Calibri"/>
               </a:rPr>
-              <a:t>BADM 225 · Chapter 9</a:t>
+              <a:t>BADM 225 · Chapter 9  ·  © Derek D. Bussan</a:t>
             </a:r>
           </a:p>
         </p:txBody>
@@ -7883,7 +7883,7 @@
                 </a:solidFill>
                 <a:latin typeface="Calibri"/>
               </a:rPr>
-              <a:t>BADM 225 · Chapter 9</a:t>
+              <a:t>BADM 225 · Chapter 9  ·  © Derek D. Bussan</a:t>
             </a:r>
           </a:p>
         </p:txBody>
@@ -8284,7 +8284,7 @@
                 </a:solidFill>
                 <a:latin typeface="Calibri"/>
               </a:rPr>
-              <a:t>BADM 225 · Chapter 9</a:t>
+              <a:t>BADM 225 · Chapter 9  ·  © Derek D. Bussan</a:t>
             </a:r>
           </a:p>
         </p:txBody>
@@ -8571,7 +8571,7 @@
                 </a:solidFill>
                 <a:latin typeface="Calibri"/>
               </a:rPr>
-              <a:t>BADM 225 · Chapter 9</a:t>
+              <a:t>BADM 225 · Chapter 9  ·  © Derek D. Bussan</a:t>
             </a:r>
           </a:p>
         </p:txBody>
@@ -8858,7 +8858,7 @@
                 </a:solidFill>
                 <a:latin typeface="Calibri"/>
               </a:rPr>
-              <a:t>BADM 225 · Chapter 9</a:t>
+              <a:t>BADM 225 · Chapter 9  ·  © Derek D. Bussan</a:t>
             </a:r>
           </a:p>
         </p:txBody>
@@ -9145,7 +9145,7 @@
                 </a:solidFill>
                 <a:latin typeface="Calibri"/>
               </a:rPr>
-              <a:t>BADM 225 · Chapter 9</a:t>
+              <a:t>BADM 225 · Chapter 9  ·  © Derek D. Bussan</a:t>
             </a:r>
           </a:p>
         </p:txBody>
@@ -9510,7 +9510,7 @@
                 </a:solidFill>
                 <a:latin typeface="Calibri"/>
               </a:rPr>
-              <a:t>BADM 225 · Chapter 9</a:t>
+              <a:t>BADM 225 · Chapter 9  ·  © Derek D. Bussan</a:t>
             </a:r>
           </a:p>
         </p:txBody>
@@ -9638,7 +9638,7 @@
                 </a:solidFill>
                 <a:latin typeface="Calibri"/>
               </a:rPr>
-              <a:t>BADM 225 · Chapter 9</a:t>
+              <a:t>BADM 225 · Chapter 9  ·  © Derek D. Bussan</a:t>
             </a:r>
           </a:p>
         </p:txBody>
@@ -9959,7 +9959,7 @@
                 </a:solidFill>
                 <a:latin typeface="Calibri"/>
               </a:rPr>
-              <a:t>BADM 225 · Chapter 9</a:t>
+              <a:t>BADM 225 · Chapter 9  ·  © Derek D. Bussan</a:t>
             </a:r>
           </a:p>
         </p:txBody>
@@ -10246,7 +10246,7 @@
                 </a:solidFill>
                 <a:latin typeface="Calibri"/>
               </a:rPr>
-              <a:t>BADM 225 · Chapter 9</a:t>
+              <a:t>BADM 225 · Chapter 9  ·  © Derek D. Bussan</a:t>
             </a:r>
           </a:p>
         </p:txBody>
@@ -10533,7 +10533,7 @@
                 </a:solidFill>
                 <a:latin typeface="Calibri"/>
               </a:rPr>
-              <a:t>BADM 225 · Chapter 9</a:t>
+              <a:t>BADM 225 · Chapter 9  ·  © Derek D. Bussan</a:t>
             </a:r>
           </a:p>
         </p:txBody>
@@ -10898,7 +10898,7 @@
                 </a:solidFill>
                 <a:latin typeface="Calibri"/>
               </a:rPr>
-              <a:t>BADM 225 · Chapter 9</a:t>
+              <a:t>BADM 225 · Chapter 9  ·  © Derek D. Bussan</a:t>
             </a:r>
           </a:p>
         </p:txBody>
@@ -11026,7 +11026,7 @@
                 </a:solidFill>
                 <a:latin typeface="Calibri"/>
               </a:rPr>
-              <a:t>BADM 225 · Chapter 9</a:t>
+              <a:t>BADM 225 · Chapter 9  ·  © Derek D. Bussan</a:t>
             </a:r>
           </a:p>
         </p:txBody>
@@ -11625,7 +11625,7 @@
                 </a:solidFill>
                 <a:latin typeface="Calibri"/>
               </a:rPr>
-              <a:t>BADM 225 · Chapter 9</a:t>
+              <a:t>BADM 225 · Chapter 9  ·  © Derek D. Bussan</a:t>
             </a:r>
           </a:p>
         </p:txBody>
@@ -11990,7 +11990,7 @@
                 </a:solidFill>
                 <a:latin typeface="Calibri"/>
               </a:rPr>
-              <a:t>BADM 225 · Chapter 9</a:t>
+              <a:t>BADM 225 · Chapter 9  ·  © Derek D. Bussan</a:t>
             </a:r>
           </a:p>
         </p:txBody>
@@ -12118,7 +12118,7 @@
                 </a:solidFill>
                 <a:latin typeface="Calibri"/>
               </a:rPr>
-              <a:t>BADM 225 · Chapter 9</a:t>
+              <a:t>BADM 225 · Chapter 9  ·  © Derek D. Bussan</a:t>
             </a:r>
           </a:p>
         </p:txBody>
@@ -12772,7 +12772,7 @@
                 </a:solidFill>
                 <a:latin typeface="Calibri"/>
               </a:rPr>
-              <a:t>BADM 225 · Chapter 9</a:t>
+              <a:t>BADM 225 · Chapter 9  ·  © Derek D. Bussan</a:t>
             </a:r>
           </a:p>
         </p:txBody>
@@ -13059,7 +13059,7 @@
                 </a:solidFill>
                 <a:latin typeface="Calibri"/>
               </a:rPr>
-              <a:t>BADM 225 · Chapter 9</a:t>
+              <a:t>BADM 225 · Chapter 9  ·  © Derek D. Bussan</a:t>
             </a:r>
           </a:p>
         </p:txBody>
@@ -13713,7 +13713,7 @@
                 </a:solidFill>
                 <a:latin typeface="Calibri"/>
               </a:rPr>
-              <a:t>BADM 225 · Chapter 9</a:t>
+              <a:t>BADM 225 · Chapter 9  ·  © Derek D. Bussan</a:t>
             </a:r>
           </a:p>
         </p:txBody>
@@ -14310,7 +14310,7 @@
                 </a:solidFill>
                 <a:latin typeface="Calibri"/>
               </a:rPr>
-              <a:t>BADM 225 · Chapter 9</a:t>
+              <a:t>BADM 225 · Chapter 9  ·  © Derek D. Bussan</a:t>
             </a:r>
           </a:p>
         </p:txBody>
@@ -14438,7 +14438,7 @@
                 </a:solidFill>
                 <a:latin typeface="Calibri"/>
               </a:rPr>
-              <a:t>BADM 225 · Chapter 9</a:t>
+              <a:t>BADM 225 · Chapter 9  ·  © Derek D. Bussan</a:t>
             </a:r>
           </a:p>
         </p:txBody>
@@ -15037,7 +15037,7 @@
                 </a:solidFill>
                 <a:latin typeface="Calibri"/>
               </a:rPr>
-              <a:t>BADM 225 · Chapter 9</a:t>
+              <a:t>BADM 225 · Chapter 9  ·  © Derek D. Bussan</a:t>
             </a:r>
           </a:p>
         </p:txBody>
@@ -15358,7 +15358,7 @@
                 </a:solidFill>
                 <a:latin typeface="Calibri"/>
               </a:rPr>
-              <a:t>BADM 225 · Chapter 9</a:t>
+              <a:t>BADM 225 · Chapter 9  ·  © Derek D. Bussan</a:t>
             </a:r>
           </a:p>
         </p:txBody>
@@ -15645,7 +15645,7 @@
                 </a:solidFill>
                 <a:latin typeface="Calibri"/>
               </a:rPr>
-              <a:t>BADM 225 · Chapter 9</a:t>
+              <a:t>BADM 225 · Chapter 9  ·  © Derek D. Bussan</a:t>
             </a:r>
           </a:p>
         </p:txBody>
@@ -16460,7 +16460,7 @@
                 </a:solidFill>
                 <a:latin typeface="Calibri"/>
               </a:rPr>
-              <a:t>BADM 225 · Chapter 9</a:t>
+              <a:t>BADM 225 · Chapter 9  ·  © Derek D. Bussan</a:t>
             </a:r>
           </a:p>
         </p:txBody>
@@ -16736,7 +16736,7 @@
                 </a:solidFill>
                 <a:latin typeface="Calibri"/>
               </a:rPr>
-              <a:t>BADM 225 · Chapter 9</a:t>
+              <a:t>BADM 225 · Chapter 9  ·  © Derek D. Bussan</a:t>
             </a:r>
           </a:p>
         </p:txBody>
@@ -16829,7 +16829,7 @@
                 </a:solidFill>
                 <a:latin typeface="Calibri"/>
               </a:rPr>
-              <a:t>BADM 225 · Chapter 9</a:t>
+              <a:t>BADM 225 · Chapter 9  ·  © Derek D. Bussan</a:t>
             </a:r>
           </a:p>
         </p:txBody>
@@ -17150,7 +17150,7 @@
                 </a:solidFill>
                 <a:latin typeface="Calibri"/>
               </a:rPr>
-              <a:t>BADM 225 · Chapter 9</a:t>
+              <a:t>BADM 225 · Chapter 9  ·  © Derek D. Bussan</a:t>
             </a:r>
           </a:p>
         </p:txBody>
@@ -17882,7 +17882,7 @@
                 </a:solidFill>
                 <a:latin typeface="Calibri"/>
               </a:rPr>
-              <a:t>BADM 225 · Chapter 9</a:t>
+              <a:t>BADM 225 · Chapter 9  ·  © Derek D. Bussan</a:t>
             </a:r>
           </a:p>
         </p:txBody>
@@ -18010,7 +18010,7 @@
                 </a:solidFill>
                 <a:latin typeface="Calibri"/>
               </a:rPr>
-              <a:t>BADM 225 · Chapter 9</a:t>
+              <a:t>BADM 225 · Chapter 9  ·  © Derek D. Bussan</a:t>
             </a:r>
           </a:p>
         </p:txBody>
@@ -18570,7 +18570,7 @@
                 </a:solidFill>
                 <a:latin typeface="Calibri"/>
               </a:rPr>
-              <a:t>BADM 225 · Chapter 9</a:t>
+              <a:t>BADM 225 · Chapter 9  ·  © Derek D. Bussan</a:t>
             </a:r>
           </a:p>
         </p:txBody>
@@ -18935,7 +18935,7 @@
                 </a:solidFill>
                 <a:latin typeface="Calibri"/>
               </a:rPr>
-              <a:t>BADM 225 · Chapter 9</a:t>
+              <a:t>BADM 225 · Chapter 9  ·  © Derek D. Bussan</a:t>
             </a:r>
           </a:p>
         </p:txBody>
@@ -19063,7 +19063,7 @@
                 </a:solidFill>
                 <a:latin typeface="Calibri"/>
               </a:rPr>
-              <a:t>BADM 225 · Chapter 9</a:t>
+              <a:t>BADM 225 · Chapter 9  ·  © Derek D. Bussan</a:t>
             </a:r>
           </a:p>
         </p:txBody>

--- a/slides/ch09-informal-reports.pptx
+++ b/slides/ch09-informal-reports.pptx
@@ -6217,7 +6217,7 @@
                 </a:solidFill>
                 <a:latin typeface="Calibri"/>
               </a:rPr>
-              <a:t>BADM 225 · Chapter 9  ·  Original instructional material — no publisher content</a:t>
+              <a:t>BADM 225 · Chapter 9  ·  Original material © 2026 Derek D. Bussan, PhD, MBA  ·  No publisher content</a:t>
             </a:r>
           </a:p>
         </p:txBody>
